--- a/files/DesignPatent_15min_Slides.pptx
+++ b/files/DesignPatent_15min_Slides.pptx
@@ -1917,13 +1917,51 @@
       </p:sp>
       <p:sp>
         <p:nvSpPr>
-          <p:cNvPr id="6" name="Shape 4"/>
-          <p:cNvSpPr/>
-          <p:nvPr/>
-        </p:nvSpPr>
-        <p:spPr>
-          <a:xfrm>
-            <a:off x="658368" y="3584448"/>
+          <p:cNvPr id="6" name="Text 4"/>
+          <p:cNvSpPr/>
+          <p:nvPr/>
+        </p:nvSpPr>
+        <p:spPr>
+          <a:xfrm>
+            <a:off x="658368" y="3346704"/>
+            <a:ext cx="10607040" cy="274320"/>
+          </a:xfrm>
+          <a:prstGeom prst="rect">
+            <a:avLst/>
+          </a:prstGeom>
+          <a:noFill/>
+          <a:ln/>
+        </p:spPr>
+        <p:txBody>
+          <a:bodyPr wrap="square" lIns="0" tIns="0" rIns="0" bIns="0" rtlCol="0" anchor="ctr">
+            <a:normAutofit/>
+          </a:bodyPr>
+          <a:lstStyle/>
+          <a:p>
+            <a:pPr indent="0" marL="0">
+              <a:buNone/>
+            </a:pPr>
+            <a:r>
+              <a:rPr lang="en-US" sz="1250" dirty="0">
+                <a:solidFill>
+                  <a:srgbClr val="5E6470"/>
+                </a:solidFill>
+              </a:rPr>
+              <a:t>Department of Statistics, National Taipei University  ·  hcchuang@gm.ntpu.edu.tw</a:t>
+            </a:r>
+            <a:endParaRPr lang="en-US" sz="1250" dirty="0"/>
+          </a:p>
+        </p:txBody>
+      </p:sp>
+      <p:sp>
+        <p:nvSpPr>
+          <p:cNvPr id="7" name="Shape 5"/>
+          <p:cNvSpPr/>
+          <p:nvPr/>
+        </p:nvSpPr>
+        <p:spPr>
+          <a:xfrm>
+            <a:off x="658368" y="3803904"/>
             <a:ext cx="1828800" cy="0"/>
           </a:xfrm>
           <a:prstGeom prst="line">
@@ -1940,14 +1978,14 @@
       </p:sp>
       <p:sp>
         <p:nvSpPr>
-          <p:cNvPr id="7" name="Text 5"/>
-          <p:cNvSpPr/>
-          <p:nvPr/>
-        </p:nvSpPr>
-        <p:spPr>
-          <a:xfrm>
-            <a:off x="658368" y="4023360"/>
-            <a:ext cx="8961120" cy="1097280"/>
+          <p:cNvPr id="8" name="Text 6"/>
+          <p:cNvSpPr/>
+          <p:nvPr/>
+        </p:nvSpPr>
+        <p:spPr>
+          <a:xfrm>
+            <a:off x="658368" y="4151376"/>
+            <a:ext cx="8961120" cy="987552"/>
           </a:xfrm>
           <a:prstGeom prst="rect">
             <a:avLst/>
@@ -1978,7 +2016,7 @@
       </p:sp>
       <p:sp>
         <p:nvSpPr>
-          <p:cNvPr id="8" name="Text 6"/>
+          <p:cNvPr id="9" name="Text 7"/>
           <p:cNvSpPr/>
           <p:nvPr/>
         </p:nvSpPr>
@@ -2165,9 +2203,50 @@
           </a:p>
         </p:txBody>
       </p:sp>
+      <p:sp>
+        <p:nvSpPr>
+          <p:cNvPr id="4" name="Text 2"/>
+          <p:cNvSpPr/>
+          <p:nvPr/>
+        </p:nvSpPr>
+        <p:spPr>
+          <a:xfrm>
+            <a:off x="3749040" y="6254496"/>
+            <a:ext cx="7772400" cy="164592"/>
+          </a:xfrm>
+          <a:prstGeom prst="rect">
+            <a:avLst/>
+          </a:prstGeom>
+          <a:noFill/>
+          <a:ln/>
+        </p:spPr>
+        <p:txBody>
+          <a:bodyPr wrap="square" lIns="0" tIns="0" rIns="0" bIns="0" rtlCol="0" anchor="ctr">
+            <a:normAutofit/>
+          </a:bodyPr>
+          <a:lstStyle/>
+          <a:p>
+            <a:pPr algn="r" indent="0" marL="0">
+              <a:buNone/>
+            </a:pPr>
+            <a:r>
+              <a:rPr lang="en-US" sz="730" b="1" spc="35" kern="0" dirty="0">
+                <a:solidFill>
+                  <a:srgbClr val="5E6470"/>
+                </a:solidFill>
+                <a:latin typeface="Arial" pitchFamily="34" charset="0"/>
+                <a:ea typeface="Arial" pitchFamily="34" charset="-122"/>
+                <a:cs typeface="Arial" pitchFamily="34" charset="-120"/>
+              </a:rPr>
+              <a:t>DESIGN PATENT SIMILARITY WITH ARCFACE METRIC LEARNING  ·  HUI-CHING CHUANG  ·  YUEH-HENG WU</a:t>
+            </a:r>
+            <a:endParaRPr lang="en-US" sz="730" dirty="0"/>
+          </a:p>
+        </p:txBody>
+      </p:sp>
       <p:pic>
         <p:nvPicPr>
-          <p:cNvPr id="4" name="Image 0" descr="C:\Dropbox\Apps\Overleaf\ACM Conference Proceedings Primary Article Template\figure\Compare_D0807117_6766.png">    </p:cNvPr>
+          <p:cNvPr id="5" name="Image 0" descr="C:\Dropbox\Apps\Overleaf\ACM Conference Proceedings Primary Article Template\figure\Compare_D0807117_6766.png">    </p:cNvPr>
           <p:cNvPicPr>
             <a:picLocks noChangeAspect="1"/>
           </p:cNvPicPr>
@@ -2191,7 +2270,7 @@
       </p:pic>
       <p:sp>
         <p:nvSpPr>
-          <p:cNvPr id="5" name="Shape 2"/>
+          <p:cNvPr id="6" name="Shape 3"/>
           <p:cNvSpPr/>
           <p:nvPr/>
         </p:nvSpPr>
@@ -2218,7 +2297,7 @@
       </p:sp>
       <p:sp>
         <p:nvSpPr>
-          <p:cNvPr id="6" name="Shape 3"/>
+          <p:cNvPr id="7" name="Shape 4"/>
           <p:cNvSpPr/>
           <p:nvPr/>
         </p:nvSpPr>
@@ -2245,7 +2324,7 @@
       </p:sp>
       <p:sp>
         <p:nvSpPr>
-          <p:cNvPr id="7" name="Shape 4"/>
+          <p:cNvPr id="8" name="Shape 5"/>
           <p:cNvSpPr/>
           <p:nvPr/>
         </p:nvSpPr>
@@ -2270,7 +2349,7 @@
       </p:sp>
       <p:sp>
         <p:nvSpPr>
-          <p:cNvPr id="8" name="Text 5"/>
+          <p:cNvPr id="9" name="Text 6"/>
           <p:cNvSpPr/>
           <p:nvPr/>
         </p:nvSpPr>
@@ -2300,7 +2379,7 @@
                   <a:srgbClr val="111111"/>
                 </a:solidFill>
               </a:rPr>
-              <a:t>The retrieval target</a:t>
+              <a:t>The retrieval challenge</a:t>
             </a:r>
             <a:endParaRPr lang="en-US" sz="1400" dirty="0"/>
           </a:p>
@@ -2308,7 +2387,7 @@
       </p:sp>
       <p:sp>
         <p:nvSpPr>
-          <p:cNvPr id="9" name="Text 6"/>
+          <p:cNvPr id="10" name="Text 7"/>
           <p:cNvSpPr/>
           <p:nvPr/>
         </p:nvSpPr>
@@ -2338,7 +2417,7 @@
                   <a:srgbClr val="5E6470"/>
                 </a:solidFill>
               </a:rPr>
-              <a:t>Multiple views and minor drawing changes can belong to the same patented design.</a:t>
+              <a:t>Multiple views can depict one design, while category similarity is too coarse for prior-art search.</a:t>
             </a:r>
             <a:endParaRPr lang="en-US" sz="1150" dirty="0"/>
           </a:p>
@@ -2346,7 +2425,7 @@
       </p:sp>
       <p:sp>
         <p:nvSpPr>
-          <p:cNvPr id="10" name="Shape 7"/>
+          <p:cNvPr id="11" name="Shape 8"/>
           <p:cNvSpPr/>
           <p:nvPr/>
         </p:nvSpPr>
@@ -2373,7 +2452,7 @@
       </p:sp>
       <p:sp>
         <p:nvSpPr>
-          <p:cNvPr id="11" name="Shape 8"/>
+          <p:cNvPr id="12" name="Shape 9"/>
           <p:cNvSpPr/>
           <p:nvPr/>
         </p:nvSpPr>
@@ -2398,7 +2477,7 @@
       </p:sp>
       <p:sp>
         <p:nvSpPr>
-          <p:cNvPr id="12" name="Text 9"/>
+          <p:cNvPr id="13" name="Text 10"/>
           <p:cNvSpPr/>
           <p:nvPr/>
         </p:nvSpPr>
@@ -2428,7 +2507,7 @@
                   <a:srgbClr val="111111"/>
                 </a:solidFill>
               </a:rPr>
-              <a:t>The failure mode</a:t>
+              <a:t>The research question</a:t>
             </a:r>
             <a:endParaRPr lang="en-US" sz="1400" dirty="0"/>
           </a:p>
@@ -2436,7 +2515,7 @@
       </p:sp>
       <p:sp>
         <p:nvSpPr>
-          <p:cNvPr id="13" name="Text 10"/>
+          <p:cNvPr id="14" name="Text 11"/>
           <p:cNvSpPr/>
           <p:nvPr/>
         </p:nvSpPr>
@@ -2466,7 +2545,7 @@
                   <a:srgbClr val="5E6470"/>
                 </a:solidFill>
               </a:rPr>
-              <a:t>Category similarity is too coarse: two chairs can be legally and visually distinct.</a:t>
+              <a:t>Can metric learning organize drawings around patent identity at national scale?</a:t>
             </a:r>
             <a:endParaRPr lang="en-US" sz="1150" dirty="0"/>
           </a:p>
@@ -2474,7 +2553,7 @@
       </p:sp>
       <p:sp>
         <p:nvSpPr>
-          <p:cNvPr id="14" name="Shape 11"/>
+          <p:cNvPr id="15" name="Shape 12"/>
           <p:cNvSpPr/>
           <p:nvPr/>
         </p:nvSpPr>
@@ -2501,7 +2580,7 @@
       </p:sp>
       <p:sp>
         <p:nvSpPr>
-          <p:cNvPr id="15" name="Shape 12"/>
+          <p:cNvPr id="16" name="Shape 13"/>
           <p:cNvSpPr/>
           <p:nvPr/>
         </p:nvSpPr>
@@ -2526,7 +2605,7 @@
       </p:sp>
       <p:sp>
         <p:nvSpPr>
-          <p:cNvPr id="16" name="Text 13"/>
+          <p:cNvPr id="17" name="Text 14"/>
           <p:cNvSpPr/>
           <p:nvPr/>
         </p:nvSpPr>
@@ -2556,7 +2635,7 @@
                   <a:srgbClr val="111111"/>
                 </a:solidFill>
               </a:rPr>
-              <a:t>The research question</a:t>
+              <a:t>Experimental results</a:t>
             </a:r>
             <a:endParaRPr lang="en-US" sz="1400" dirty="0"/>
           </a:p>
@@ -2564,7 +2643,7 @@
       </p:sp>
       <p:sp>
         <p:nvSpPr>
-          <p:cNvPr id="17" name="Text 14"/>
+          <p:cNvPr id="18" name="Text 15"/>
           <p:cNvSpPr/>
           <p:nvPr/>
         </p:nvSpPr>
@@ -2594,7 +2673,7 @@
                   <a:srgbClr val="5E6470"/>
                 </a:solidFill>
               </a:rPr>
-              <a:t>Can metric learning organize drawings around patent identity at national scale?</a:t>
+              <a:t>Best mAP: 0.8193 Standard / 0.6493 Extended. Acc@1: 0.9312 / 0.8088.</a:t>
             </a:r>
             <a:endParaRPr lang="en-US" sz="1150" dirty="0"/>
           </a:p>
@@ -2602,7 +2681,7 @@
       </p:sp>
       <p:sp>
         <p:nvSpPr>
-          <p:cNvPr id="18" name="Text 15"/>
+          <p:cNvPr id="19" name="Text 16"/>
           <p:cNvSpPr/>
           <p:nvPr/>
         </p:nvSpPr>
@@ -2796,7 +2875,48 @@
       </p:sp>
       <p:sp>
         <p:nvSpPr>
-          <p:cNvPr id="4" name="Shape 2"/>
+          <p:cNvPr id="4" name="Text 2"/>
+          <p:cNvSpPr/>
+          <p:nvPr/>
+        </p:nvSpPr>
+        <p:spPr>
+          <a:xfrm>
+            <a:off x="3749040" y="6254496"/>
+            <a:ext cx="7772400" cy="164592"/>
+          </a:xfrm>
+          <a:prstGeom prst="rect">
+            <a:avLst/>
+          </a:prstGeom>
+          <a:noFill/>
+          <a:ln/>
+        </p:spPr>
+        <p:txBody>
+          <a:bodyPr wrap="square" lIns="0" tIns="0" rIns="0" bIns="0" rtlCol="0" anchor="ctr">
+            <a:normAutofit/>
+          </a:bodyPr>
+          <a:lstStyle/>
+          <a:p>
+            <a:pPr algn="r" indent="0" marL="0">
+              <a:buNone/>
+            </a:pPr>
+            <a:r>
+              <a:rPr lang="en-US" sz="730" b="1" spc="35" kern="0" dirty="0">
+                <a:solidFill>
+                  <a:srgbClr val="5E6470"/>
+                </a:solidFill>
+                <a:latin typeface="Arial" pitchFamily="34" charset="0"/>
+                <a:ea typeface="Arial" pitchFamily="34" charset="-122"/>
+                <a:cs typeface="Arial" pitchFamily="34" charset="-120"/>
+              </a:rPr>
+              <a:t>DESIGN PATENT SIMILARITY WITH ARCFACE METRIC LEARNING  ·  HUI-CHING CHUANG  ·  YUEH-HENG WU</a:t>
+            </a:r>
+            <a:endParaRPr lang="en-US" sz="730" dirty="0"/>
+          </a:p>
+        </p:txBody>
+      </p:sp>
+      <p:sp>
+        <p:nvSpPr>
+          <p:cNvPr id="5" name="Shape 3"/>
           <p:cNvSpPr/>
           <p:nvPr/>
         </p:nvSpPr>
@@ -2823,7 +2943,7 @@
       </p:sp>
       <p:sp>
         <p:nvSpPr>
-          <p:cNvPr id="5" name="Shape 3"/>
+          <p:cNvPr id="6" name="Shape 4"/>
           <p:cNvSpPr/>
           <p:nvPr/>
         </p:nvSpPr>
@@ -2848,7 +2968,7 @@
       </p:sp>
       <p:sp>
         <p:nvSpPr>
-          <p:cNvPr id="6" name="Text 4"/>
+          <p:cNvPr id="7" name="Text 5"/>
           <p:cNvSpPr/>
           <p:nvPr/>
         </p:nvSpPr>
@@ -2886,7 +3006,7 @@
       </p:sp>
       <p:sp>
         <p:nvSpPr>
-          <p:cNvPr id="7" name="Text 5"/>
+          <p:cNvPr id="8" name="Text 6"/>
           <p:cNvSpPr/>
           <p:nvPr/>
         </p:nvSpPr>
@@ -2924,7 +3044,7 @@
       </p:sp>
       <p:sp>
         <p:nvSpPr>
-          <p:cNvPr id="8" name="Shape 6"/>
+          <p:cNvPr id="9" name="Shape 7"/>
           <p:cNvSpPr/>
           <p:nvPr/>
         </p:nvSpPr>
@@ -2951,7 +3071,7 @@
       </p:sp>
       <p:sp>
         <p:nvSpPr>
-          <p:cNvPr id="9" name="Shape 7"/>
+          <p:cNvPr id="10" name="Shape 8"/>
           <p:cNvSpPr/>
           <p:nvPr/>
         </p:nvSpPr>
@@ -2976,7 +3096,7 @@
       </p:sp>
       <p:sp>
         <p:nvSpPr>
-          <p:cNvPr id="10" name="Text 8"/>
+          <p:cNvPr id="11" name="Text 9"/>
           <p:cNvSpPr/>
           <p:nvPr/>
         </p:nvSpPr>
@@ -3014,7 +3134,7 @@
       </p:sp>
       <p:sp>
         <p:nvSpPr>
-          <p:cNvPr id="11" name="Text 9"/>
+          <p:cNvPr id="12" name="Text 10"/>
           <p:cNvSpPr/>
           <p:nvPr/>
         </p:nvSpPr>
@@ -3052,7 +3172,7 @@
       </p:sp>
       <p:sp>
         <p:nvSpPr>
-          <p:cNvPr id="12" name="Shape 10"/>
+          <p:cNvPr id="13" name="Shape 11"/>
           <p:cNvSpPr/>
           <p:nvPr/>
         </p:nvSpPr>
@@ -3079,7 +3199,7 @@
       </p:sp>
       <p:sp>
         <p:nvSpPr>
-          <p:cNvPr id="13" name="Shape 11"/>
+          <p:cNvPr id="14" name="Shape 12"/>
           <p:cNvSpPr/>
           <p:nvPr/>
         </p:nvSpPr>
@@ -3104,7 +3224,7 @@
       </p:sp>
       <p:sp>
         <p:nvSpPr>
-          <p:cNvPr id="14" name="Text 12"/>
+          <p:cNvPr id="15" name="Text 13"/>
           <p:cNvSpPr/>
           <p:nvPr/>
         </p:nvSpPr>
@@ -3142,7 +3262,7 @@
       </p:sp>
       <p:sp>
         <p:nvSpPr>
-          <p:cNvPr id="15" name="Text 13"/>
+          <p:cNvPr id="16" name="Text 14"/>
           <p:cNvSpPr/>
           <p:nvPr/>
         </p:nvSpPr>
@@ -3180,7 +3300,7 @@
       </p:sp>
       <p:sp>
         <p:nvSpPr>
-          <p:cNvPr id="16" name="Shape 14"/>
+          <p:cNvPr id="17" name="Shape 15"/>
           <p:cNvSpPr/>
           <p:nvPr/>
         </p:nvSpPr>
@@ -3207,7 +3327,7 @@
       </p:sp>
       <p:sp>
         <p:nvSpPr>
-          <p:cNvPr id="17" name="Shape 15"/>
+          <p:cNvPr id="18" name="Shape 16"/>
           <p:cNvSpPr/>
           <p:nvPr/>
         </p:nvSpPr>
@@ -3232,7 +3352,7 @@
       </p:sp>
       <p:sp>
         <p:nvSpPr>
-          <p:cNvPr id="18" name="Text 16"/>
+          <p:cNvPr id="19" name="Text 17"/>
           <p:cNvSpPr/>
           <p:nvPr/>
         </p:nvSpPr>
@@ -3270,7 +3390,7 @@
       </p:sp>
       <p:sp>
         <p:nvSpPr>
-          <p:cNvPr id="19" name="Text 17"/>
+          <p:cNvPr id="20" name="Text 18"/>
           <p:cNvSpPr/>
           <p:nvPr/>
         </p:nvSpPr>
@@ -3308,7 +3428,7 @@
       </p:sp>
       <p:sp>
         <p:nvSpPr>
-          <p:cNvPr id="20" name="Text 18"/>
+          <p:cNvPr id="21" name="Text 19"/>
           <p:cNvSpPr/>
           <p:nvPr/>
         </p:nvSpPr>
@@ -3344,7 +3464,7 @@
       </p:sp>
       <p:sp>
         <p:nvSpPr>
-          <p:cNvPr id="21" name="Shape 19"/>
+          <p:cNvPr id="22" name="Shape 20"/>
           <p:cNvSpPr/>
           <p:nvPr/>
         </p:nvSpPr>
@@ -3369,7 +3489,7 @@
       </p:sp>
       <p:sp>
         <p:nvSpPr>
-          <p:cNvPr id="22" name="Shape 20"/>
+          <p:cNvPr id="23" name="Shape 21"/>
           <p:cNvSpPr/>
           <p:nvPr/>
         </p:nvSpPr>
@@ -3394,7 +3514,7 @@
       </p:sp>
       <p:sp>
         <p:nvSpPr>
-          <p:cNvPr id="23" name="Shape 21"/>
+          <p:cNvPr id="24" name="Shape 22"/>
           <p:cNvSpPr/>
           <p:nvPr/>
         </p:nvSpPr>
@@ -3419,7 +3539,7 @@
       </p:sp>
       <p:sp>
         <p:nvSpPr>
-          <p:cNvPr id="24" name="Text 22"/>
+          <p:cNvPr id="25" name="Text 23"/>
           <p:cNvSpPr/>
           <p:nvPr/>
         </p:nvSpPr>
@@ -3455,7 +3575,7 @@
       </p:sp>
       <p:sp>
         <p:nvSpPr>
-          <p:cNvPr id="25" name="Text 23"/>
+          <p:cNvPr id="26" name="Text 24"/>
           <p:cNvSpPr/>
           <p:nvPr/>
         </p:nvSpPr>
@@ -3493,7 +3613,7 @@
       </p:sp>
       <p:sp>
         <p:nvSpPr>
-          <p:cNvPr id="26" name="Text 24"/>
+          <p:cNvPr id="27" name="Text 25"/>
           <p:cNvSpPr/>
           <p:nvPr/>
         </p:nvSpPr>
@@ -3531,7 +3651,7 @@
       </p:sp>
       <p:sp>
         <p:nvSpPr>
-          <p:cNvPr id="27" name="Text 25"/>
+          <p:cNvPr id="28" name="Text 26"/>
           <p:cNvSpPr/>
           <p:nvPr/>
         </p:nvSpPr>
@@ -3569,7 +3689,7 @@
       </p:sp>
       <p:sp>
         <p:nvSpPr>
-          <p:cNvPr id="28" name="Text 26"/>
+          <p:cNvPr id="29" name="Text 27"/>
           <p:cNvSpPr/>
           <p:nvPr/>
         </p:nvSpPr>
@@ -3763,7 +3883,48 @@
       </p:sp>
       <p:sp>
         <p:nvSpPr>
-          <p:cNvPr id="4" name="Shape 2"/>
+          <p:cNvPr id="4" name="Text 2"/>
+          <p:cNvSpPr/>
+          <p:nvPr/>
+        </p:nvSpPr>
+        <p:spPr>
+          <a:xfrm>
+            <a:off x="3749040" y="6254496"/>
+            <a:ext cx="7772400" cy="164592"/>
+          </a:xfrm>
+          <a:prstGeom prst="rect">
+            <a:avLst/>
+          </a:prstGeom>
+          <a:noFill/>
+          <a:ln/>
+        </p:spPr>
+        <p:txBody>
+          <a:bodyPr wrap="square" lIns="0" tIns="0" rIns="0" bIns="0" rtlCol="0" anchor="ctr">
+            <a:normAutofit/>
+          </a:bodyPr>
+          <a:lstStyle/>
+          <a:p>
+            <a:pPr algn="r" indent="0" marL="0">
+              <a:buNone/>
+            </a:pPr>
+            <a:r>
+              <a:rPr lang="en-US" sz="730" b="1" spc="35" kern="0" dirty="0">
+                <a:solidFill>
+                  <a:srgbClr val="5E6470"/>
+                </a:solidFill>
+                <a:latin typeface="Arial" pitchFamily="34" charset="0"/>
+                <a:ea typeface="Arial" pitchFamily="34" charset="-122"/>
+                <a:cs typeface="Arial" pitchFamily="34" charset="-120"/>
+              </a:rPr>
+              <a:t>DESIGN PATENT SIMILARITY WITH ARCFACE METRIC LEARNING  ·  HUI-CHING CHUANG  ·  YUEH-HENG WU</a:t>
+            </a:r>
+            <a:endParaRPr lang="en-US" sz="730" dirty="0"/>
+          </a:p>
+        </p:txBody>
+      </p:sp>
+      <p:sp>
+        <p:nvSpPr>
+          <p:cNvPr id="5" name="Shape 3"/>
           <p:cNvSpPr/>
           <p:nvPr/>
         </p:nvSpPr>
@@ -3788,7 +3949,7 @@
       </p:sp>
       <p:sp>
         <p:nvSpPr>
-          <p:cNvPr id="5" name="Shape 3"/>
+          <p:cNvPr id="6" name="Shape 4"/>
           <p:cNvSpPr/>
           <p:nvPr/>
         </p:nvSpPr>
@@ -3813,7 +3974,7 @@
       </p:sp>
       <p:sp>
         <p:nvSpPr>
-          <p:cNvPr id="6" name="Shape 4"/>
+          <p:cNvPr id="7" name="Shape 5"/>
           <p:cNvSpPr/>
           <p:nvPr/>
         </p:nvSpPr>
@@ -3838,7 +3999,7 @@
       </p:sp>
       <p:sp>
         <p:nvSpPr>
-          <p:cNvPr id="7" name="Shape 5"/>
+          <p:cNvPr id="8" name="Shape 6"/>
           <p:cNvSpPr/>
           <p:nvPr/>
         </p:nvSpPr>
@@ -3865,7 +4026,7 @@
       </p:sp>
       <p:sp>
         <p:nvSpPr>
-          <p:cNvPr id="8" name="Text 6"/>
+          <p:cNvPr id="9" name="Text 7"/>
           <p:cNvSpPr/>
           <p:nvPr/>
         </p:nvSpPr>
@@ -3903,7 +4064,7 @@
       </p:sp>
       <p:sp>
         <p:nvSpPr>
-          <p:cNvPr id="9" name="Text 7"/>
+          <p:cNvPr id="10" name="Text 8"/>
           <p:cNvSpPr/>
           <p:nvPr/>
         </p:nvSpPr>
@@ -3941,7 +4102,7 @@
       </p:sp>
       <p:sp>
         <p:nvSpPr>
-          <p:cNvPr id="10" name="Shape 8"/>
+          <p:cNvPr id="11" name="Shape 9"/>
           <p:cNvSpPr/>
           <p:nvPr/>
         </p:nvSpPr>
@@ -3968,7 +4129,7 @@
       </p:sp>
       <p:sp>
         <p:nvSpPr>
-          <p:cNvPr id="11" name="Text 9"/>
+          <p:cNvPr id="12" name="Text 10"/>
           <p:cNvSpPr/>
           <p:nvPr/>
         </p:nvSpPr>
@@ -4006,7 +4167,7 @@
       </p:sp>
       <p:sp>
         <p:nvSpPr>
-          <p:cNvPr id="12" name="Text 10"/>
+          <p:cNvPr id="13" name="Text 11"/>
           <p:cNvSpPr/>
           <p:nvPr/>
         </p:nvSpPr>
@@ -4044,7 +4205,7 @@
       </p:sp>
       <p:sp>
         <p:nvSpPr>
-          <p:cNvPr id="13" name="Shape 11"/>
+          <p:cNvPr id="14" name="Shape 12"/>
           <p:cNvSpPr/>
           <p:nvPr/>
         </p:nvSpPr>
@@ -4071,7 +4232,7 @@
       </p:sp>
       <p:sp>
         <p:nvSpPr>
-          <p:cNvPr id="14" name="Text 12"/>
+          <p:cNvPr id="15" name="Text 13"/>
           <p:cNvSpPr/>
           <p:nvPr/>
         </p:nvSpPr>
@@ -4109,7 +4270,7 @@
       </p:sp>
       <p:sp>
         <p:nvSpPr>
-          <p:cNvPr id="15" name="Text 13"/>
+          <p:cNvPr id="16" name="Text 14"/>
           <p:cNvSpPr/>
           <p:nvPr/>
         </p:nvSpPr>
@@ -4147,7 +4308,7 @@
       </p:sp>
       <p:sp>
         <p:nvSpPr>
-          <p:cNvPr id="16" name="Shape 14"/>
+          <p:cNvPr id="17" name="Shape 15"/>
           <p:cNvSpPr/>
           <p:nvPr/>
         </p:nvSpPr>
@@ -4174,7 +4335,7 @@
       </p:sp>
       <p:sp>
         <p:nvSpPr>
-          <p:cNvPr id="17" name="Text 15"/>
+          <p:cNvPr id="18" name="Text 16"/>
           <p:cNvSpPr/>
           <p:nvPr/>
         </p:nvSpPr>
@@ -4212,7 +4373,7 @@
       </p:sp>
       <p:sp>
         <p:nvSpPr>
-          <p:cNvPr id="18" name="Text 16"/>
+          <p:cNvPr id="19" name="Text 17"/>
           <p:cNvSpPr/>
           <p:nvPr/>
         </p:nvSpPr>
@@ -4264,7 +4425,7 @@
       </p:sp>
       <p:sp>
         <p:nvSpPr>
-          <p:cNvPr id="19" name="Shape 17"/>
+          <p:cNvPr id="20" name="Shape 18"/>
           <p:cNvSpPr/>
           <p:nvPr/>
         </p:nvSpPr>
@@ -4291,7 +4452,7 @@
       </p:sp>
       <p:sp>
         <p:nvSpPr>
-          <p:cNvPr id="20" name="Shape 18"/>
+          <p:cNvPr id="21" name="Shape 19"/>
           <p:cNvSpPr/>
           <p:nvPr/>
         </p:nvSpPr>
@@ -4316,7 +4477,7 @@
       </p:sp>
       <p:sp>
         <p:nvSpPr>
-          <p:cNvPr id="21" name="Text 19"/>
+          <p:cNvPr id="22" name="Text 20"/>
           <p:cNvSpPr/>
           <p:nvPr/>
         </p:nvSpPr>
@@ -4354,7 +4515,7 @@
       </p:sp>
       <p:sp>
         <p:nvSpPr>
-          <p:cNvPr id="22" name="Text 20"/>
+          <p:cNvPr id="23" name="Text 21"/>
           <p:cNvSpPr/>
           <p:nvPr/>
         </p:nvSpPr>
@@ -4392,7 +4553,7 @@
       </p:sp>
       <p:sp>
         <p:nvSpPr>
-          <p:cNvPr id="23" name="Shape 21"/>
+          <p:cNvPr id="24" name="Shape 22"/>
           <p:cNvSpPr/>
           <p:nvPr/>
         </p:nvSpPr>
@@ -4419,7 +4580,7 @@
       </p:sp>
       <p:sp>
         <p:nvSpPr>
-          <p:cNvPr id="24" name="Shape 22"/>
+          <p:cNvPr id="25" name="Shape 23"/>
           <p:cNvSpPr/>
           <p:nvPr/>
         </p:nvSpPr>
@@ -4444,7 +4605,7 @@
       </p:sp>
       <p:sp>
         <p:nvSpPr>
-          <p:cNvPr id="25" name="Text 23"/>
+          <p:cNvPr id="26" name="Text 24"/>
           <p:cNvSpPr/>
           <p:nvPr/>
         </p:nvSpPr>
@@ -4482,7 +4643,7 @@
       </p:sp>
       <p:sp>
         <p:nvSpPr>
-          <p:cNvPr id="26" name="Text 24"/>
+          <p:cNvPr id="27" name="Text 25"/>
           <p:cNvSpPr/>
           <p:nvPr/>
         </p:nvSpPr>
@@ -4520,7 +4681,7 @@
       </p:sp>
       <p:sp>
         <p:nvSpPr>
-          <p:cNvPr id="27" name="Text 25"/>
+          <p:cNvPr id="28" name="Text 26"/>
           <p:cNvSpPr/>
           <p:nvPr/>
         </p:nvSpPr>
@@ -4714,7 +4875,48 @@
       </p:sp>
       <p:sp>
         <p:nvSpPr>
-          <p:cNvPr id="4" name="Shape 2"/>
+          <p:cNvPr id="4" name="Text 2"/>
+          <p:cNvSpPr/>
+          <p:nvPr/>
+        </p:nvSpPr>
+        <p:spPr>
+          <a:xfrm>
+            <a:off x="3749040" y="6254496"/>
+            <a:ext cx="7772400" cy="164592"/>
+          </a:xfrm>
+          <a:prstGeom prst="rect">
+            <a:avLst/>
+          </a:prstGeom>
+          <a:noFill/>
+          <a:ln/>
+        </p:spPr>
+        <p:txBody>
+          <a:bodyPr wrap="square" lIns="0" tIns="0" rIns="0" bIns="0" rtlCol="0" anchor="ctr">
+            <a:normAutofit/>
+          </a:bodyPr>
+          <a:lstStyle/>
+          <a:p>
+            <a:pPr algn="r" indent="0" marL="0">
+              <a:buNone/>
+            </a:pPr>
+            <a:r>
+              <a:rPr lang="en-US" sz="730" b="1" spc="35" kern="0" dirty="0">
+                <a:solidFill>
+                  <a:srgbClr val="5E6470"/>
+                </a:solidFill>
+                <a:latin typeface="Arial" pitchFamily="34" charset="0"/>
+                <a:ea typeface="Arial" pitchFamily="34" charset="-122"/>
+                <a:cs typeface="Arial" pitchFamily="34" charset="-120"/>
+              </a:rPr>
+              <a:t>DESIGN PATENT SIMILARITY WITH ARCFACE METRIC LEARNING  ·  HUI-CHING CHUANG  ·  YUEH-HENG WU</a:t>
+            </a:r>
+            <a:endParaRPr lang="en-US" sz="730" dirty="0"/>
+          </a:p>
+        </p:txBody>
+      </p:sp>
+      <p:sp>
+        <p:nvSpPr>
+          <p:cNvPr id="5" name="Shape 3"/>
           <p:cNvSpPr/>
           <p:nvPr/>
         </p:nvSpPr>
@@ -4737,7 +4939,7 @@
       </p:sp>
       <p:sp>
         <p:nvSpPr>
-          <p:cNvPr id="5" name="Shape 3"/>
+          <p:cNvPr id="6" name="Shape 4"/>
           <p:cNvSpPr/>
           <p:nvPr/>
         </p:nvSpPr>
@@ -4760,7 +4962,7 @@
       </p:sp>
       <p:sp>
         <p:nvSpPr>
-          <p:cNvPr id="6" name="Text 4"/>
+          <p:cNvPr id="7" name="Text 5"/>
           <p:cNvSpPr/>
           <p:nvPr/>
         </p:nvSpPr>
@@ -4796,7 +4998,7 @@
       </p:sp>
       <p:sp>
         <p:nvSpPr>
-          <p:cNvPr id="7" name="Shape 5"/>
+          <p:cNvPr id="8" name="Shape 6"/>
           <p:cNvSpPr/>
           <p:nvPr/>
         </p:nvSpPr>
@@ -4819,7 +5021,7 @@
       </p:sp>
       <p:sp>
         <p:nvSpPr>
-          <p:cNvPr id="8" name="Text 6"/>
+          <p:cNvPr id="9" name="Text 7"/>
           <p:cNvSpPr/>
           <p:nvPr/>
         </p:nvSpPr>
@@ -4855,7 +5057,7 @@
       </p:sp>
       <p:sp>
         <p:nvSpPr>
-          <p:cNvPr id="9" name="Shape 7"/>
+          <p:cNvPr id="10" name="Shape 8"/>
           <p:cNvSpPr/>
           <p:nvPr/>
         </p:nvSpPr>
@@ -4878,7 +5080,7 @@
       </p:sp>
       <p:sp>
         <p:nvSpPr>
-          <p:cNvPr id="10" name="Text 8"/>
+          <p:cNvPr id="11" name="Text 9"/>
           <p:cNvSpPr/>
           <p:nvPr/>
         </p:nvSpPr>
@@ -4914,7 +5116,7 @@
       </p:sp>
       <p:sp>
         <p:nvSpPr>
-          <p:cNvPr id="11" name="Shape 9"/>
+          <p:cNvPr id="12" name="Shape 10"/>
           <p:cNvSpPr/>
           <p:nvPr/>
         </p:nvSpPr>
@@ -4937,7 +5139,7 @@
       </p:sp>
       <p:sp>
         <p:nvSpPr>
-          <p:cNvPr id="12" name="Text 10"/>
+          <p:cNvPr id="13" name="Text 11"/>
           <p:cNvSpPr/>
           <p:nvPr/>
         </p:nvSpPr>
@@ -4973,7 +5175,7 @@
       </p:sp>
       <p:sp>
         <p:nvSpPr>
-          <p:cNvPr id="13" name="Shape 11"/>
+          <p:cNvPr id="14" name="Shape 12"/>
           <p:cNvSpPr/>
           <p:nvPr/>
         </p:nvSpPr>
@@ -4996,7 +5198,7 @@
       </p:sp>
       <p:sp>
         <p:nvSpPr>
-          <p:cNvPr id="14" name="Text 12"/>
+          <p:cNvPr id="15" name="Text 13"/>
           <p:cNvSpPr/>
           <p:nvPr/>
         </p:nvSpPr>
@@ -5032,7 +5234,7 @@
       </p:sp>
       <p:sp>
         <p:nvSpPr>
-          <p:cNvPr id="15" name="Shape 13"/>
+          <p:cNvPr id="16" name="Shape 14"/>
           <p:cNvSpPr/>
           <p:nvPr/>
         </p:nvSpPr>
@@ -5057,7 +5259,7 @@
       </p:sp>
       <p:sp>
         <p:nvSpPr>
-          <p:cNvPr id="16" name="Text 14"/>
+          <p:cNvPr id="17" name="Text 15"/>
           <p:cNvSpPr/>
           <p:nvPr/>
         </p:nvSpPr>
@@ -5093,7 +5295,7 @@
       </p:sp>
       <p:sp>
         <p:nvSpPr>
-          <p:cNvPr id="17" name="Text 15"/>
+          <p:cNvPr id="18" name="Text 16"/>
           <p:cNvSpPr/>
           <p:nvPr/>
         </p:nvSpPr>
@@ -5145,7 +5347,7 @@
       </p:sp>
       <p:sp>
         <p:nvSpPr>
-          <p:cNvPr id="18" name="Shape 16"/>
+          <p:cNvPr id="19" name="Shape 17"/>
           <p:cNvSpPr/>
           <p:nvPr/>
         </p:nvSpPr>
@@ -5170,7 +5372,7 @@
       </p:sp>
       <p:sp>
         <p:nvSpPr>
-          <p:cNvPr id="19" name="Text 17"/>
+          <p:cNvPr id="20" name="Text 18"/>
           <p:cNvSpPr/>
           <p:nvPr/>
         </p:nvSpPr>
@@ -5206,7 +5408,7 @@
       </p:sp>
       <p:sp>
         <p:nvSpPr>
-          <p:cNvPr id="20" name="Text 18"/>
+          <p:cNvPr id="21" name="Text 19"/>
           <p:cNvSpPr/>
           <p:nvPr/>
         </p:nvSpPr>
@@ -5258,7 +5460,7 @@
       </p:sp>
       <p:sp>
         <p:nvSpPr>
-          <p:cNvPr id="21" name="Shape 19"/>
+          <p:cNvPr id="22" name="Shape 20"/>
           <p:cNvSpPr/>
           <p:nvPr/>
         </p:nvSpPr>
@@ -5283,7 +5485,7 @@
       </p:sp>
       <p:sp>
         <p:nvSpPr>
-          <p:cNvPr id="22" name="Text 20"/>
+          <p:cNvPr id="23" name="Text 21"/>
           <p:cNvSpPr/>
           <p:nvPr/>
         </p:nvSpPr>
@@ -5319,7 +5521,7 @@
       </p:sp>
       <p:sp>
         <p:nvSpPr>
-          <p:cNvPr id="23" name="Text 21"/>
+          <p:cNvPr id="24" name="Text 22"/>
           <p:cNvSpPr/>
           <p:nvPr/>
         </p:nvSpPr>
@@ -5371,7 +5573,7 @@
       </p:sp>
       <p:sp>
         <p:nvSpPr>
-          <p:cNvPr id="24" name="Shape 22"/>
+          <p:cNvPr id="25" name="Shape 23"/>
           <p:cNvSpPr/>
           <p:nvPr/>
         </p:nvSpPr>
@@ -5396,7 +5598,7 @@
       </p:sp>
       <p:sp>
         <p:nvSpPr>
-          <p:cNvPr id="25" name="Text 23"/>
+          <p:cNvPr id="26" name="Text 24"/>
           <p:cNvSpPr/>
           <p:nvPr/>
         </p:nvSpPr>
@@ -5432,7 +5634,7 @@
       </p:sp>
       <p:sp>
         <p:nvSpPr>
-          <p:cNvPr id="26" name="Text 24"/>
+          <p:cNvPr id="27" name="Text 25"/>
           <p:cNvSpPr/>
           <p:nvPr/>
         </p:nvSpPr>
@@ -5484,7 +5686,7 @@
       </p:sp>
       <p:sp>
         <p:nvSpPr>
-          <p:cNvPr id="27" name="Shape 25"/>
+          <p:cNvPr id="28" name="Shape 26"/>
           <p:cNvSpPr/>
           <p:nvPr/>
         </p:nvSpPr>
@@ -5509,7 +5711,7 @@
       </p:sp>
       <p:sp>
         <p:nvSpPr>
-          <p:cNvPr id="28" name="Text 26"/>
+          <p:cNvPr id="29" name="Text 27"/>
           <p:cNvSpPr/>
           <p:nvPr/>
         </p:nvSpPr>
@@ -5545,7 +5747,7 @@
       </p:sp>
       <p:sp>
         <p:nvSpPr>
-          <p:cNvPr id="29" name="Text 27"/>
+          <p:cNvPr id="30" name="Text 28"/>
           <p:cNvSpPr/>
           <p:nvPr/>
         </p:nvSpPr>
@@ -5597,7 +5799,7 @@
       </p:sp>
       <p:sp>
         <p:nvSpPr>
-          <p:cNvPr id="30" name="Shape 28"/>
+          <p:cNvPr id="31" name="Shape 29"/>
           <p:cNvSpPr/>
           <p:nvPr/>
         </p:nvSpPr>
@@ -5622,7 +5824,7 @@
       </p:sp>
       <p:sp>
         <p:nvSpPr>
-          <p:cNvPr id="31" name="Text 29"/>
+          <p:cNvPr id="32" name="Text 30"/>
           <p:cNvSpPr/>
           <p:nvPr/>
         </p:nvSpPr>
@@ -5658,7 +5860,7 @@
       </p:sp>
       <p:sp>
         <p:nvSpPr>
-          <p:cNvPr id="32" name="Text 30"/>
+          <p:cNvPr id="33" name="Text 31"/>
           <p:cNvSpPr/>
           <p:nvPr/>
         </p:nvSpPr>
@@ -5710,7 +5912,7 @@
       </p:sp>
       <p:sp>
         <p:nvSpPr>
-          <p:cNvPr id="33" name="Shape 31"/>
+          <p:cNvPr id="34" name="Shape 32"/>
           <p:cNvSpPr/>
           <p:nvPr/>
         </p:nvSpPr>
@@ -5737,7 +5939,7 @@
       </p:sp>
       <p:sp>
         <p:nvSpPr>
-          <p:cNvPr id="34" name="Text 32"/>
+          <p:cNvPr id="35" name="Text 33"/>
           <p:cNvSpPr/>
           <p:nvPr/>
         </p:nvSpPr>
@@ -5775,7 +5977,7 @@
       </p:sp>
       <p:sp>
         <p:nvSpPr>
-          <p:cNvPr id="35" name="Text 33"/>
+          <p:cNvPr id="36" name="Text 34"/>
           <p:cNvSpPr/>
           <p:nvPr/>
         </p:nvSpPr>
@@ -5975,6 +6177,47 @@
         </p:nvSpPr>
         <p:spPr>
           <a:xfrm>
+            <a:off x="3749040" y="6254496"/>
+            <a:ext cx="7772400" cy="164592"/>
+          </a:xfrm>
+          <a:prstGeom prst="rect">
+            <a:avLst/>
+          </a:prstGeom>
+          <a:noFill/>
+          <a:ln/>
+        </p:spPr>
+        <p:txBody>
+          <a:bodyPr wrap="square" lIns="0" tIns="0" rIns="0" bIns="0" rtlCol="0" anchor="ctr">
+            <a:normAutofit/>
+          </a:bodyPr>
+          <a:lstStyle/>
+          <a:p>
+            <a:pPr algn="r" indent="0" marL="0">
+              <a:buNone/>
+            </a:pPr>
+            <a:r>
+              <a:rPr lang="en-US" sz="730" b="1" spc="35" kern="0" dirty="0">
+                <a:solidFill>
+                  <a:srgbClr val="5E6470"/>
+                </a:solidFill>
+                <a:latin typeface="Arial" pitchFamily="34" charset="0"/>
+                <a:ea typeface="Arial" pitchFamily="34" charset="-122"/>
+                <a:cs typeface="Arial" pitchFamily="34" charset="-120"/>
+              </a:rPr>
+              <a:t>DESIGN PATENT SIMILARITY WITH ARCFACE METRIC LEARNING  ·  HUI-CHING CHUANG  ·  YUEH-HENG WU</a:t>
+            </a:r>
+            <a:endParaRPr lang="en-US" sz="730" dirty="0"/>
+          </a:p>
+        </p:txBody>
+      </p:sp>
+      <p:sp>
+        <p:nvSpPr>
+          <p:cNvPr id="5" name="Text 3"/>
+          <p:cNvSpPr/>
+          <p:nvPr/>
+        </p:nvSpPr>
+        <p:spPr>
+          <a:xfrm>
             <a:off x="685800" y="1508760"/>
             <a:ext cx="4937760" cy="365760"/>
           </a:xfrm>
@@ -6005,7 +6248,7 @@
       </p:sp>
       <p:sp>
         <p:nvSpPr>
-          <p:cNvPr id="5" name="Text 3"/>
+          <p:cNvPr id="6" name="Text 4"/>
           <p:cNvSpPr/>
           <p:nvPr/>
         </p:nvSpPr>
@@ -6041,7 +6284,7 @@
       </p:sp>
       <p:sp>
         <p:nvSpPr>
-          <p:cNvPr id="6" name="Shape 4"/>
+          <p:cNvPr id="7" name="Shape 5"/>
           <p:cNvSpPr/>
           <p:nvPr/>
         </p:nvSpPr>
@@ -6068,7 +6311,7 @@
       </p:sp>
       <p:sp>
         <p:nvSpPr>
-          <p:cNvPr id="7" name="Text 5"/>
+          <p:cNvPr id="8" name="Text 6"/>
           <p:cNvSpPr/>
           <p:nvPr/>
         </p:nvSpPr>
@@ -6104,7 +6347,7 @@
       </p:sp>
       <p:sp>
         <p:nvSpPr>
-          <p:cNvPr id="8" name="Shape 6"/>
+          <p:cNvPr id="9" name="Shape 7"/>
           <p:cNvSpPr/>
           <p:nvPr/>
         </p:nvSpPr>
@@ -6129,7 +6372,7 @@
       </p:sp>
       <p:sp>
         <p:nvSpPr>
-          <p:cNvPr id="9" name="Text 7"/>
+          <p:cNvPr id="10" name="Text 8"/>
           <p:cNvSpPr/>
           <p:nvPr/>
         </p:nvSpPr>
@@ -6165,7 +6408,7 @@
       </p:sp>
       <p:sp>
         <p:nvSpPr>
-          <p:cNvPr id="10" name="Text 8"/>
+          <p:cNvPr id="11" name="Text 9"/>
           <p:cNvSpPr/>
           <p:nvPr/>
         </p:nvSpPr>
@@ -6201,7 +6444,7 @@
       </p:sp>
       <p:sp>
         <p:nvSpPr>
-          <p:cNvPr id="11" name="Shape 9"/>
+          <p:cNvPr id="12" name="Shape 10"/>
           <p:cNvSpPr/>
           <p:nvPr/>
         </p:nvSpPr>
@@ -6226,7 +6469,7 @@
       </p:sp>
       <p:sp>
         <p:nvSpPr>
-          <p:cNvPr id="12" name="Text 10"/>
+          <p:cNvPr id="13" name="Text 11"/>
           <p:cNvSpPr/>
           <p:nvPr/>
         </p:nvSpPr>
@@ -6262,7 +6505,7 @@
       </p:sp>
       <p:sp>
         <p:nvSpPr>
-          <p:cNvPr id="13" name="Text 11"/>
+          <p:cNvPr id="14" name="Text 12"/>
           <p:cNvSpPr/>
           <p:nvPr/>
         </p:nvSpPr>
@@ -6298,7 +6541,7 @@
       </p:sp>
       <p:sp>
         <p:nvSpPr>
-          <p:cNvPr id="14" name="Shape 12"/>
+          <p:cNvPr id="15" name="Shape 13"/>
           <p:cNvSpPr/>
           <p:nvPr/>
         </p:nvSpPr>
@@ -6325,7 +6568,7 @@
       </p:sp>
       <p:sp>
         <p:nvSpPr>
-          <p:cNvPr id="15" name="Text 13"/>
+          <p:cNvPr id="16" name="Text 14"/>
           <p:cNvSpPr/>
           <p:nvPr/>
         </p:nvSpPr>
@@ -6361,7 +6604,7 @@
       </p:sp>
       <p:sp>
         <p:nvSpPr>
-          <p:cNvPr id="16" name="Shape 14"/>
+          <p:cNvPr id="17" name="Shape 15"/>
           <p:cNvSpPr/>
           <p:nvPr/>
         </p:nvSpPr>
@@ -6386,7 +6629,7 @@
       </p:sp>
       <p:sp>
         <p:nvSpPr>
-          <p:cNvPr id="17" name="Text 15"/>
+          <p:cNvPr id="18" name="Text 16"/>
           <p:cNvSpPr/>
           <p:nvPr/>
         </p:nvSpPr>
@@ -6422,7 +6665,7 @@
       </p:sp>
       <p:sp>
         <p:nvSpPr>
-          <p:cNvPr id="18" name="Text 16"/>
+          <p:cNvPr id="19" name="Text 17"/>
           <p:cNvSpPr/>
           <p:nvPr/>
         </p:nvSpPr>
@@ -6458,7 +6701,7 @@
       </p:sp>
       <p:sp>
         <p:nvSpPr>
-          <p:cNvPr id="19" name="Shape 17"/>
+          <p:cNvPr id="20" name="Shape 18"/>
           <p:cNvSpPr/>
           <p:nvPr/>
         </p:nvSpPr>
@@ -6483,7 +6726,7 @@
       </p:sp>
       <p:sp>
         <p:nvSpPr>
-          <p:cNvPr id="20" name="Text 18"/>
+          <p:cNvPr id="21" name="Text 19"/>
           <p:cNvSpPr/>
           <p:nvPr/>
         </p:nvSpPr>
@@ -6519,7 +6762,7 @@
       </p:sp>
       <p:sp>
         <p:nvSpPr>
-          <p:cNvPr id="21" name="Text 19"/>
+          <p:cNvPr id="22" name="Text 20"/>
           <p:cNvSpPr/>
           <p:nvPr/>
         </p:nvSpPr>
@@ -6555,7 +6798,7 @@
       </p:sp>
       <p:sp>
         <p:nvSpPr>
-          <p:cNvPr id="22" name="Text 20"/>
+          <p:cNvPr id="23" name="Text 21"/>
           <p:cNvSpPr/>
           <p:nvPr/>
         </p:nvSpPr>
@@ -6591,7 +6834,7 @@
       </p:sp>
       <p:sp>
         <p:nvSpPr>
-          <p:cNvPr id="23" name="Text 21"/>
+          <p:cNvPr id="24" name="Text 22"/>
           <p:cNvSpPr/>
           <p:nvPr/>
         </p:nvSpPr>
@@ -6627,7 +6870,7 @@
       </p:sp>
       <p:sp>
         <p:nvSpPr>
-          <p:cNvPr id="24" name="Text 22"/>
+          <p:cNvPr id="25" name="Text 23"/>
           <p:cNvSpPr/>
           <p:nvPr/>
         </p:nvSpPr>
@@ -6663,7 +6906,7 @@
       </p:sp>
       <p:sp>
         <p:nvSpPr>
-          <p:cNvPr id="25" name="Text 23"/>
+          <p:cNvPr id="26" name="Text 24"/>
           <p:cNvSpPr/>
           <p:nvPr/>
         </p:nvSpPr>
@@ -6699,7 +6942,7 @@
       </p:sp>
       <p:sp>
         <p:nvSpPr>
-          <p:cNvPr id="26" name="Text 24"/>
+          <p:cNvPr id="27" name="Text 25"/>
           <p:cNvSpPr/>
           <p:nvPr/>
         </p:nvSpPr>
@@ -6891,9 +7134,50 @@
           </a:p>
         </p:txBody>
       </p:sp>
+      <p:sp>
+        <p:nvSpPr>
+          <p:cNvPr id="4" name="Text 2"/>
+          <p:cNvSpPr/>
+          <p:nvPr/>
+        </p:nvSpPr>
+        <p:spPr>
+          <a:xfrm>
+            <a:off x="3749040" y="6254496"/>
+            <a:ext cx="7772400" cy="164592"/>
+          </a:xfrm>
+          <a:prstGeom prst="rect">
+            <a:avLst/>
+          </a:prstGeom>
+          <a:noFill/>
+          <a:ln/>
+        </p:spPr>
+        <p:txBody>
+          <a:bodyPr wrap="square" lIns="0" tIns="0" rIns="0" bIns="0" rtlCol="0" anchor="ctr">
+            <a:normAutofit/>
+          </a:bodyPr>
+          <a:lstStyle/>
+          <a:p>
+            <a:pPr algn="r" indent="0" marL="0">
+              <a:buNone/>
+            </a:pPr>
+            <a:r>
+              <a:rPr lang="en-US" sz="730" b="1" spc="35" kern="0" dirty="0">
+                <a:solidFill>
+                  <a:srgbClr val="5E6470"/>
+                </a:solidFill>
+                <a:latin typeface="Arial" pitchFamily="34" charset="0"/>
+                <a:ea typeface="Arial" pitchFamily="34" charset="-122"/>
+                <a:cs typeface="Arial" pitchFamily="34" charset="-120"/>
+              </a:rPr>
+              <a:t>DESIGN PATENT SIMILARITY WITH ARCFACE METRIC LEARNING  ·  HUI-CHING CHUANG  ·  YUEH-HENG WU</a:t>
+            </a:r>
+            <a:endParaRPr lang="en-US" sz="730" dirty="0"/>
+          </a:p>
+        </p:txBody>
+      </p:sp>
       <p:pic>
         <p:nvPicPr>
-          <p:cNvPr id="4" name="Image 0" descr="C:\Dropbox\Apps\Overleaf\ACM Conference Proceedings Primary Article Template\figure\Hierarchical_Cosine_Distribution.png">    </p:cNvPr>
+          <p:cNvPr id="5" name="Image 0" descr="C:\Dropbox\Apps\Overleaf\ACM Conference Proceedings Primary Article Template\figure\Hierarchical_Cosine_Distribution.png">    </p:cNvPr>
           <p:cNvPicPr>
             <a:picLocks noChangeAspect="1"/>
           </p:cNvPicPr>
@@ -6917,7 +7201,7 @@
       </p:pic>
       <p:sp>
         <p:nvSpPr>
-          <p:cNvPr id="5" name="Shape 2"/>
+          <p:cNvPr id="6" name="Shape 3"/>
           <p:cNvSpPr/>
           <p:nvPr/>
         </p:nvSpPr>
@@ -6944,7 +7228,7 @@
       </p:sp>
       <p:sp>
         <p:nvSpPr>
-          <p:cNvPr id="6" name="Shape 3"/>
+          <p:cNvPr id="7" name="Shape 4"/>
           <p:cNvSpPr/>
           <p:nvPr/>
         </p:nvSpPr>
@@ -6971,7 +7255,7 @@
       </p:sp>
       <p:sp>
         <p:nvSpPr>
-          <p:cNvPr id="7" name="Shape 4"/>
+          <p:cNvPr id="8" name="Shape 5"/>
           <p:cNvSpPr/>
           <p:nvPr/>
         </p:nvSpPr>
@@ -6996,7 +7280,7 @@
       </p:sp>
       <p:sp>
         <p:nvSpPr>
-          <p:cNvPr id="8" name="Text 5"/>
+          <p:cNvPr id="9" name="Text 6"/>
           <p:cNvSpPr/>
           <p:nvPr/>
         </p:nvSpPr>
@@ -7034,7 +7318,7 @@
       </p:sp>
       <p:sp>
         <p:nvSpPr>
-          <p:cNvPr id="9" name="Text 6"/>
+          <p:cNvPr id="10" name="Text 7"/>
           <p:cNvSpPr/>
           <p:nvPr/>
         </p:nvSpPr>
@@ -7072,7 +7356,7 @@
       </p:sp>
       <p:sp>
         <p:nvSpPr>
-          <p:cNvPr id="10" name="Shape 7"/>
+          <p:cNvPr id="11" name="Shape 8"/>
           <p:cNvSpPr/>
           <p:nvPr/>
         </p:nvSpPr>
@@ -7099,7 +7383,7 @@
       </p:sp>
       <p:sp>
         <p:nvSpPr>
-          <p:cNvPr id="11" name="Shape 8"/>
+          <p:cNvPr id="12" name="Shape 9"/>
           <p:cNvSpPr/>
           <p:nvPr/>
         </p:nvSpPr>
@@ -7124,7 +7408,7 @@
       </p:sp>
       <p:sp>
         <p:nvSpPr>
-          <p:cNvPr id="12" name="Text 9"/>
+          <p:cNvPr id="13" name="Text 10"/>
           <p:cNvSpPr/>
           <p:nvPr/>
         </p:nvSpPr>
@@ -7162,7 +7446,7 @@
       </p:sp>
       <p:sp>
         <p:nvSpPr>
-          <p:cNvPr id="13" name="Text 10"/>
+          <p:cNvPr id="14" name="Text 11"/>
           <p:cNvSpPr/>
           <p:nvPr/>
         </p:nvSpPr>
@@ -7200,7 +7484,7 @@
       </p:sp>
       <p:sp>
         <p:nvSpPr>
-          <p:cNvPr id="14" name="Shape 11"/>
+          <p:cNvPr id="15" name="Shape 12"/>
           <p:cNvSpPr/>
           <p:nvPr/>
         </p:nvSpPr>
@@ -7227,7 +7511,7 @@
       </p:sp>
       <p:sp>
         <p:nvSpPr>
-          <p:cNvPr id="15" name="Shape 12"/>
+          <p:cNvPr id="16" name="Shape 13"/>
           <p:cNvSpPr/>
           <p:nvPr/>
         </p:nvSpPr>
@@ -7252,7 +7536,7 @@
       </p:sp>
       <p:sp>
         <p:nvSpPr>
-          <p:cNvPr id="16" name="Text 13"/>
+          <p:cNvPr id="17" name="Text 14"/>
           <p:cNvSpPr/>
           <p:nvPr/>
         </p:nvSpPr>
@@ -7290,7 +7574,7 @@
       </p:sp>
       <p:sp>
         <p:nvSpPr>
-          <p:cNvPr id="17" name="Text 14"/>
+          <p:cNvPr id="18" name="Text 15"/>
           <p:cNvSpPr/>
           <p:nvPr/>
         </p:nvSpPr>
@@ -7328,7 +7612,7 @@
       </p:sp>
       <p:sp>
         <p:nvSpPr>
-          <p:cNvPr id="18" name="Text 15"/>
+          <p:cNvPr id="19" name="Text 16"/>
           <p:cNvSpPr/>
           <p:nvPr/>
         </p:nvSpPr>
@@ -7520,9 +7804,50 @@
           </a:p>
         </p:txBody>
       </p:sp>
+      <p:sp>
+        <p:nvSpPr>
+          <p:cNvPr id="4" name="Text 2"/>
+          <p:cNvSpPr/>
+          <p:nvPr/>
+        </p:nvSpPr>
+        <p:spPr>
+          <a:xfrm>
+            <a:off x="3749040" y="6254496"/>
+            <a:ext cx="7772400" cy="164592"/>
+          </a:xfrm>
+          <a:prstGeom prst="rect">
+            <a:avLst/>
+          </a:prstGeom>
+          <a:noFill/>
+          <a:ln/>
+        </p:spPr>
+        <p:txBody>
+          <a:bodyPr wrap="square" lIns="0" tIns="0" rIns="0" bIns="0" rtlCol="0" anchor="ctr">
+            <a:normAutofit/>
+          </a:bodyPr>
+          <a:lstStyle/>
+          <a:p>
+            <a:pPr algn="r" indent="0" marL="0">
+              <a:buNone/>
+            </a:pPr>
+            <a:r>
+              <a:rPr lang="en-US" sz="730" b="1" spc="35" kern="0" dirty="0">
+                <a:solidFill>
+                  <a:srgbClr val="5E6470"/>
+                </a:solidFill>
+                <a:latin typeface="Arial" pitchFamily="34" charset="0"/>
+                <a:ea typeface="Arial" pitchFamily="34" charset="-122"/>
+                <a:cs typeface="Arial" pitchFamily="34" charset="-120"/>
+              </a:rPr>
+              <a:t>DESIGN PATENT SIMILARITY WITH ARCFACE METRIC LEARNING  ·  HUI-CHING CHUANG  ·  YUEH-HENG WU</a:t>
+            </a:r>
+            <a:endParaRPr lang="en-US" sz="730" dirty="0"/>
+          </a:p>
+        </p:txBody>
+      </p:sp>
       <p:pic>
         <p:nvPicPr>
-          <p:cNvPr id="4" name="Image 0" descr="C:\Dropbox\Apps\Overleaf\ACM Conference Proceedings Primary Article Template\figure\QE_Success_D0823510.png">    </p:cNvPr>
+          <p:cNvPr id="5" name="Image 0" descr="C:\Dropbox\Apps\Overleaf\ACM Conference Proceedings Primary Article Template\figure\QE_Success_D0823510.png">    </p:cNvPr>
           <p:cNvPicPr>
             <a:picLocks noChangeAspect="1"/>
           </p:cNvPicPr>
@@ -7546,7 +7871,7 @@
       </p:pic>
       <p:sp>
         <p:nvSpPr>
-          <p:cNvPr id="5" name="Shape 2"/>
+          <p:cNvPr id="6" name="Shape 3"/>
           <p:cNvSpPr/>
           <p:nvPr/>
         </p:nvSpPr>
@@ -7573,7 +7898,7 @@
       </p:sp>
       <p:sp>
         <p:nvSpPr>
-          <p:cNvPr id="6" name="Shape 3"/>
+          <p:cNvPr id="7" name="Shape 4"/>
           <p:cNvSpPr/>
           <p:nvPr/>
         </p:nvSpPr>
@@ -7600,7 +7925,7 @@
       </p:sp>
       <p:sp>
         <p:nvSpPr>
-          <p:cNvPr id="7" name="Shape 4"/>
+          <p:cNvPr id="8" name="Shape 5"/>
           <p:cNvSpPr/>
           <p:nvPr/>
         </p:nvSpPr>
@@ -7625,7 +7950,7 @@
       </p:sp>
       <p:sp>
         <p:nvSpPr>
-          <p:cNvPr id="8" name="Text 5"/>
+          <p:cNvPr id="9" name="Text 6"/>
           <p:cNvSpPr/>
           <p:nvPr/>
         </p:nvSpPr>
@@ -7663,7 +7988,7 @@
       </p:sp>
       <p:sp>
         <p:nvSpPr>
-          <p:cNvPr id="9" name="Text 6"/>
+          <p:cNvPr id="10" name="Text 7"/>
           <p:cNvSpPr/>
           <p:nvPr/>
         </p:nvSpPr>
@@ -7701,7 +8026,7 @@
       </p:sp>
       <p:sp>
         <p:nvSpPr>
-          <p:cNvPr id="10" name="Shape 7"/>
+          <p:cNvPr id="11" name="Shape 8"/>
           <p:cNvSpPr/>
           <p:nvPr/>
         </p:nvSpPr>
@@ -7728,7 +8053,7 @@
       </p:sp>
       <p:sp>
         <p:nvSpPr>
-          <p:cNvPr id="11" name="Shape 8"/>
+          <p:cNvPr id="12" name="Shape 9"/>
           <p:cNvSpPr/>
           <p:nvPr/>
         </p:nvSpPr>
@@ -7753,7 +8078,7 @@
       </p:sp>
       <p:sp>
         <p:nvSpPr>
-          <p:cNvPr id="12" name="Text 9"/>
+          <p:cNvPr id="13" name="Text 10"/>
           <p:cNvSpPr/>
           <p:nvPr/>
         </p:nvSpPr>
@@ -7791,7 +8116,7 @@
       </p:sp>
       <p:sp>
         <p:nvSpPr>
-          <p:cNvPr id="13" name="Text 10"/>
+          <p:cNvPr id="14" name="Text 11"/>
           <p:cNvSpPr/>
           <p:nvPr/>
         </p:nvSpPr>
@@ -7829,7 +8154,7 @@
       </p:sp>
       <p:sp>
         <p:nvSpPr>
-          <p:cNvPr id="14" name="Shape 11"/>
+          <p:cNvPr id="15" name="Shape 12"/>
           <p:cNvSpPr/>
           <p:nvPr/>
         </p:nvSpPr>
@@ -7856,7 +8181,7 @@
       </p:sp>
       <p:sp>
         <p:nvSpPr>
-          <p:cNvPr id="15" name="Shape 12"/>
+          <p:cNvPr id="16" name="Shape 13"/>
           <p:cNvSpPr/>
           <p:nvPr/>
         </p:nvSpPr>
@@ -7881,7 +8206,7 @@
       </p:sp>
       <p:sp>
         <p:nvSpPr>
-          <p:cNvPr id="16" name="Text 13"/>
+          <p:cNvPr id="17" name="Text 14"/>
           <p:cNvSpPr/>
           <p:nvPr/>
         </p:nvSpPr>
@@ -7919,7 +8244,7 @@
       </p:sp>
       <p:sp>
         <p:nvSpPr>
-          <p:cNvPr id="17" name="Text 14"/>
+          <p:cNvPr id="18" name="Text 15"/>
           <p:cNvSpPr/>
           <p:nvPr/>
         </p:nvSpPr>
@@ -7971,7 +8296,7 @@
       </p:sp>
       <p:sp>
         <p:nvSpPr>
-          <p:cNvPr id="18" name="Text 15"/>
+          <p:cNvPr id="19" name="Text 16"/>
           <p:cNvSpPr/>
           <p:nvPr/>
         </p:nvSpPr>
@@ -8165,7 +8490,48 @@
       </p:sp>
       <p:sp>
         <p:nvSpPr>
-          <p:cNvPr id="4" name="Shape 2"/>
+          <p:cNvPr id="4" name="Text 2"/>
+          <p:cNvSpPr/>
+          <p:nvPr/>
+        </p:nvSpPr>
+        <p:spPr>
+          <a:xfrm>
+            <a:off x="3749040" y="6254496"/>
+            <a:ext cx="7772400" cy="164592"/>
+          </a:xfrm>
+          <a:prstGeom prst="rect">
+            <a:avLst/>
+          </a:prstGeom>
+          <a:noFill/>
+          <a:ln/>
+        </p:spPr>
+        <p:txBody>
+          <a:bodyPr wrap="square" lIns="0" tIns="0" rIns="0" bIns="0" rtlCol="0" anchor="ctr">
+            <a:normAutofit/>
+          </a:bodyPr>
+          <a:lstStyle/>
+          <a:p>
+            <a:pPr algn="r" indent="0" marL="0">
+              <a:buNone/>
+            </a:pPr>
+            <a:r>
+              <a:rPr lang="en-US" sz="730" b="1" spc="35" kern="0" dirty="0">
+                <a:solidFill>
+                  <a:srgbClr val="5E6470"/>
+                </a:solidFill>
+                <a:latin typeface="Arial" pitchFamily="34" charset="0"/>
+                <a:ea typeface="Arial" pitchFamily="34" charset="-122"/>
+                <a:cs typeface="Arial" pitchFamily="34" charset="-120"/>
+              </a:rPr>
+              <a:t>DESIGN PATENT SIMILARITY WITH ARCFACE METRIC LEARNING  ·  HUI-CHING CHUANG  ·  YUEH-HENG WU</a:t>
+            </a:r>
+            <a:endParaRPr lang="en-US" sz="730" dirty="0"/>
+          </a:p>
+        </p:txBody>
+      </p:sp>
+      <p:sp>
+        <p:nvSpPr>
+          <p:cNvPr id="5" name="Shape 3"/>
           <p:cNvSpPr/>
           <p:nvPr/>
         </p:nvSpPr>
@@ -8192,7 +8558,7 @@
       </p:sp>
       <p:sp>
         <p:nvSpPr>
-          <p:cNvPr id="5" name="Shape 3"/>
+          <p:cNvPr id="6" name="Shape 4"/>
           <p:cNvSpPr/>
           <p:nvPr/>
         </p:nvSpPr>
@@ -8217,7 +8583,7 @@
       </p:sp>
       <p:sp>
         <p:nvSpPr>
-          <p:cNvPr id="6" name="Text 4"/>
+          <p:cNvPr id="7" name="Text 5"/>
           <p:cNvSpPr/>
           <p:nvPr/>
         </p:nvSpPr>
@@ -8255,7 +8621,7 @@
       </p:sp>
       <p:sp>
         <p:nvSpPr>
-          <p:cNvPr id="7" name="Text 5"/>
+          <p:cNvPr id="8" name="Text 6"/>
           <p:cNvSpPr/>
           <p:nvPr/>
         </p:nvSpPr>
@@ -8293,7 +8659,7 @@
       </p:sp>
       <p:sp>
         <p:nvSpPr>
-          <p:cNvPr id="8" name="Shape 6"/>
+          <p:cNvPr id="9" name="Shape 7"/>
           <p:cNvSpPr/>
           <p:nvPr/>
         </p:nvSpPr>
@@ -8320,7 +8686,7 @@
       </p:sp>
       <p:sp>
         <p:nvSpPr>
-          <p:cNvPr id="9" name="Shape 7"/>
+          <p:cNvPr id="10" name="Shape 8"/>
           <p:cNvSpPr/>
           <p:nvPr/>
         </p:nvSpPr>
@@ -8345,7 +8711,7 @@
       </p:sp>
       <p:sp>
         <p:nvSpPr>
-          <p:cNvPr id="10" name="Text 8"/>
+          <p:cNvPr id="11" name="Text 9"/>
           <p:cNvSpPr/>
           <p:nvPr/>
         </p:nvSpPr>
@@ -8383,7 +8749,7 @@
       </p:sp>
       <p:sp>
         <p:nvSpPr>
-          <p:cNvPr id="11" name="Text 9"/>
+          <p:cNvPr id="12" name="Text 10"/>
           <p:cNvSpPr/>
           <p:nvPr/>
         </p:nvSpPr>
@@ -8421,7 +8787,7 @@
       </p:sp>
       <p:sp>
         <p:nvSpPr>
-          <p:cNvPr id="12" name="Shape 10"/>
+          <p:cNvPr id="13" name="Shape 11"/>
           <p:cNvSpPr/>
           <p:nvPr/>
         </p:nvSpPr>
@@ -8448,7 +8814,7 @@
       </p:sp>
       <p:sp>
         <p:nvSpPr>
-          <p:cNvPr id="13" name="Shape 11"/>
+          <p:cNvPr id="14" name="Shape 12"/>
           <p:cNvSpPr/>
           <p:nvPr/>
         </p:nvSpPr>
@@ -8473,7 +8839,7 @@
       </p:sp>
       <p:sp>
         <p:nvSpPr>
-          <p:cNvPr id="14" name="Text 12"/>
+          <p:cNvPr id="15" name="Text 13"/>
           <p:cNvSpPr/>
           <p:nvPr/>
         </p:nvSpPr>
@@ -8511,7 +8877,7 @@
       </p:sp>
       <p:sp>
         <p:nvSpPr>
-          <p:cNvPr id="15" name="Text 13"/>
+          <p:cNvPr id="16" name="Text 14"/>
           <p:cNvSpPr/>
           <p:nvPr/>
         </p:nvSpPr>
@@ -8549,7 +8915,7 @@
       </p:sp>
       <p:sp>
         <p:nvSpPr>
-          <p:cNvPr id="16" name="Text 14"/>
+          <p:cNvPr id="17" name="Text 15"/>
           <p:cNvSpPr/>
           <p:nvPr/>
         </p:nvSpPr>
@@ -8587,7 +8953,7 @@
       </p:sp>
       <p:sp>
         <p:nvSpPr>
-          <p:cNvPr id="17" name="Text 15"/>
+          <p:cNvPr id="18" name="Text 16"/>
           <p:cNvSpPr/>
           <p:nvPr/>
         </p:nvSpPr>

--- a/files/DesignPatent_15min_Slides.pptx
+++ b/files/DesignPatent_15min_Slides.pptx
@@ -2156,7 +2156,7 @@
                 <a:ea typeface="Arial" pitchFamily="34" charset="-122"/>
                 <a:cs typeface="Arial" pitchFamily="34" charset="-120"/>
               </a:rPr>
-              <a:t>MOTIVATION</a:t>
+              <a:t>EXPERIMENTAL RESULTS</a:t>
             </a:r>
             <a:endParaRPr lang="en-US" sz="900" dirty="0"/>
           </a:p>
@@ -2197,7 +2197,7 @@
                 <a:ea typeface="Arial" pitchFamily="34" charset="-122"/>
                 <a:cs typeface="Arial" pitchFamily="34" charset="-120"/>
               </a:rPr>
-              <a:t>Prior-art search is a near-duplicate problem</a:t>
+              <a:t>Three retrieval examples show success and hard negatives</a:t>
             </a:r>
             <a:endParaRPr lang="en-US" sz="2800" dirty="0"/>
           </a:p>
@@ -2260,8 +2260,8 @@
         </p:blipFill>
         <p:spPr>
           <a:xfrm>
-            <a:off x="594360" y="1417320"/>
-            <a:ext cx="6903720" cy="4434840"/>
+            <a:off x="695647" y="1298448"/>
+            <a:ext cx="7524105" cy="1389888"/>
           </a:xfrm>
           <a:prstGeom prst="rect">
             <a:avLst/>
@@ -2276,8 +2276,8 @@
         </p:nvSpPr>
         <p:spPr>
           <a:xfrm>
-            <a:off x="594360" y="1417320"/>
-            <a:ext cx="6903720" cy="4434840"/>
+            <a:off x="695647" y="1298448"/>
+            <a:ext cx="7524105" cy="1389888"/>
           </a:xfrm>
           <a:prstGeom prst="rect">
             <a:avLst/>
@@ -2303,12 +2303,12 @@
         </p:nvSpPr>
         <p:spPr>
           <a:xfrm>
-            <a:off x="7818120" y="1417320"/>
-            <a:ext cx="3703320" cy="1280160"/>
+            <a:off x="8549640" y="1298448"/>
+            <a:ext cx="2971800" cy="1389888"/>
           </a:xfrm>
           <a:prstGeom prst="roundRect">
             <a:avLst>
-              <a:gd name="adj" fmla="val 3571"/>
+              <a:gd name="adj" fmla="val 3289"/>
             </a:avLst>
           </a:prstGeom>
           <a:solidFill>
@@ -2330,8 +2330,8 @@
         </p:nvSpPr>
         <p:spPr>
           <a:xfrm>
-            <a:off x="7818120" y="1417320"/>
-            <a:ext cx="64008" cy="1280160"/>
+            <a:off x="8549640" y="1298448"/>
+            <a:ext cx="64008" cy="1389888"/>
           </a:xfrm>
           <a:prstGeom prst="rect">
             <a:avLst/>
@@ -2355,8 +2355,8 @@
         </p:nvSpPr>
         <p:spPr>
           <a:xfrm>
-            <a:off x="8019288" y="1572768"/>
-            <a:ext cx="3374136" cy="274320"/>
+            <a:off x="8750808" y="1453896"/>
+            <a:ext cx="2642616" cy="274320"/>
           </a:xfrm>
           <a:prstGeom prst="rect">
             <a:avLst/>
@@ -2379,7 +2379,7 @@
                   <a:srgbClr val="111111"/>
                 </a:solidFill>
               </a:rPr>
-              <a:t>The retrieval challenge</a:t>
+              <a:t>Example 1 · exact recovery</a:t>
             </a:r>
             <a:endParaRPr lang="en-US" sz="1400" dirty="0"/>
           </a:p>
@@ -2393,8 +2393,8 @@
         </p:nvSpPr>
         <p:spPr>
           <a:xfrm>
-            <a:off x="8019288" y="1947672"/>
-            <a:ext cx="3374136" cy="621792"/>
+            <a:off x="8750808" y="1828800"/>
+            <a:ext cx="2642616" cy="731520"/>
           </a:xfrm>
           <a:prstGeom prst="rect">
             <a:avLst/>
@@ -2417,26 +2417,77 @@
                   <a:srgbClr val="5E6470"/>
                 </a:solidFill>
               </a:rPr>
-              <a:t>Multiple views can depict one design, while category similarity is too coarse for prior-art search.</a:t>
+              <a:t>Query D0807117: all five retrieved views share the query patent ID.</a:t>
             </a:r>
             <a:endParaRPr lang="en-US" sz="1150" dirty="0"/>
           </a:p>
         </p:txBody>
       </p:sp>
-      <p:sp>
-        <p:nvSpPr>
-          <p:cNvPr id="11" name="Shape 8"/>
-          <p:cNvSpPr/>
-          <p:nvPr/>
-        </p:nvSpPr>
-        <p:spPr>
-          <a:xfrm>
-            <a:off x="7818120" y="2926080"/>
-            <a:ext cx="3703320" cy="1280160"/>
+      <p:pic>
+        <p:nvPicPr>
+          <p:cNvPr id="11" name="Image 1" descr="C:\Dropbox\Apps\Overleaf\ACM Conference Proceedings Primary Article Template\figure\Compare_D0806975_313.png">    </p:cNvPr>
+          <p:cNvPicPr>
+            <a:picLocks noChangeAspect="1"/>
+          </p:cNvPicPr>
+          <p:nvPr/>
+        </p:nvPicPr>
+        <p:blipFill>
+          <a:blip r:embed="rId2"/>
+          <a:stretch>
+            <a:fillRect/>
+          </a:stretch>
+        </p:blipFill>
+        <p:spPr>
+          <a:xfrm>
+            <a:off x="690473" y="2889504"/>
+            <a:ext cx="7534455" cy="1389888"/>
+          </a:xfrm>
+          <a:prstGeom prst="rect">
+            <a:avLst/>
+          </a:prstGeom>
+        </p:spPr>
+      </p:pic>
+      <p:sp>
+        <p:nvSpPr>
+          <p:cNvPr id="12" name="Shape 8"/>
+          <p:cNvSpPr/>
+          <p:nvPr/>
+        </p:nvSpPr>
+        <p:spPr>
+          <a:xfrm>
+            <a:off x="690473" y="2889504"/>
+            <a:ext cx="7534455" cy="1389888"/>
+          </a:xfrm>
+          <a:prstGeom prst="rect">
+            <a:avLst/>
+          </a:prstGeom>
+          <a:solidFill>
+            <a:srgbClr val="FFFFFF">
+              <a:alpha val="0"/>
+            </a:srgbClr>
+          </a:solidFill>
+          <a:ln w="10160">
+            <a:solidFill>
+              <a:srgbClr val="C9CDD3"/>
+            </a:solidFill>
+            <a:prstDash val="solid"/>
+          </a:ln>
+        </p:spPr>
+      </p:sp>
+      <p:sp>
+        <p:nvSpPr>
+          <p:cNvPr id="13" name="Shape 9"/>
+          <p:cNvSpPr/>
+          <p:nvPr/>
+        </p:nvSpPr>
+        <p:spPr>
+          <a:xfrm>
+            <a:off x="8549640" y="2889504"/>
+            <a:ext cx="2971800" cy="1389888"/>
           </a:xfrm>
           <a:prstGeom prst="roundRect">
             <a:avLst>
-              <a:gd name="adj" fmla="val 3571"/>
+              <a:gd name="adj" fmla="val 3289"/>
             </a:avLst>
           </a:prstGeom>
           <a:solidFill>
@@ -2452,14 +2503,14 @@
       </p:sp>
       <p:sp>
         <p:nvSpPr>
-          <p:cNvPr id="12" name="Shape 9"/>
-          <p:cNvSpPr/>
-          <p:nvPr/>
-        </p:nvSpPr>
-        <p:spPr>
-          <a:xfrm>
-            <a:off x="7818120" y="2926080"/>
-            <a:ext cx="64008" cy="1280160"/>
+          <p:cNvPr id="14" name="Shape 10"/>
+          <p:cNvSpPr/>
+          <p:nvPr/>
+        </p:nvSpPr>
+        <p:spPr>
+          <a:xfrm>
+            <a:off x="8549640" y="2889504"/>
+            <a:ext cx="64008" cy="1389888"/>
           </a:xfrm>
           <a:prstGeom prst="rect">
             <a:avLst/>
@@ -2477,14 +2528,14 @@
       </p:sp>
       <p:sp>
         <p:nvSpPr>
-          <p:cNvPr id="13" name="Text 10"/>
-          <p:cNvSpPr/>
-          <p:nvPr/>
-        </p:nvSpPr>
-        <p:spPr>
-          <a:xfrm>
-            <a:off x="8019288" y="3081528"/>
-            <a:ext cx="3374136" cy="274320"/>
+          <p:cNvPr id="15" name="Text 11"/>
+          <p:cNvSpPr/>
+          <p:nvPr/>
+        </p:nvSpPr>
+        <p:spPr>
+          <a:xfrm>
+            <a:off x="8750808" y="3044952"/>
+            <a:ext cx="2642616" cy="274320"/>
           </a:xfrm>
           <a:prstGeom prst="rect">
             <a:avLst/>
@@ -2507,7 +2558,7 @@
                   <a:srgbClr val="111111"/>
                 </a:solidFill>
               </a:rPr>
-              <a:t>The research question</a:t>
+              <a:t>Example 2 · exact recovery</a:t>
             </a:r>
             <a:endParaRPr lang="en-US" sz="1400" dirty="0"/>
           </a:p>
@@ -2515,14 +2566,14 @@
       </p:sp>
       <p:sp>
         <p:nvSpPr>
-          <p:cNvPr id="14" name="Text 11"/>
-          <p:cNvSpPr/>
-          <p:nvPr/>
-        </p:nvSpPr>
-        <p:spPr>
-          <a:xfrm>
-            <a:off x="8019288" y="3456432"/>
-            <a:ext cx="3374136" cy="621792"/>
+          <p:cNvPr id="16" name="Text 12"/>
+          <p:cNvSpPr/>
+          <p:nvPr/>
+        </p:nvSpPr>
+        <p:spPr>
+          <a:xfrm>
+            <a:off x="8750808" y="3419856"/>
+            <a:ext cx="2642616" cy="731520"/>
           </a:xfrm>
           <a:prstGeom prst="rect">
             <a:avLst/>
@@ -2545,26 +2596,77 @@
                   <a:srgbClr val="5E6470"/>
                 </a:solidFill>
               </a:rPr>
-              <a:t>Can metric learning organize drawings around patent identity at national scale?</a:t>
+              <a:t>Query D0806975: all five retrieved views share the query patent ID.</a:t>
             </a:r>
             <a:endParaRPr lang="en-US" sz="1150" dirty="0"/>
           </a:p>
         </p:txBody>
       </p:sp>
-      <p:sp>
-        <p:nvSpPr>
-          <p:cNvPr id="15" name="Shape 12"/>
-          <p:cNvSpPr/>
-          <p:nvPr/>
-        </p:nvSpPr>
-        <p:spPr>
-          <a:xfrm>
-            <a:off x="7818120" y="4434840"/>
-            <a:ext cx="3703320" cy="1280160"/>
+      <p:pic>
+        <p:nvPicPr>
+          <p:cNvPr id="17" name="Image 2" descr="C:\Dropbox\Apps\Overleaf\ACM Conference Proceedings Primary Article Template\figure\Compare_D0808886_4704.png">    </p:cNvPr>
+          <p:cNvPicPr>
+            <a:picLocks noChangeAspect="1"/>
+          </p:cNvPicPr>
+          <p:nvPr/>
+        </p:nvPicPr>
+        <p:blipFill>
+          <a:blip r:embed="rId3"/>
+          <a:stretch>
+            <a:fillRect/>
+          </a:stretch>
+        </p:blipFill>
+        <p:spPr>
+          <a:xfrm>
+            <a:off x="741588" y="4480560"/>
+            <a:ext cx="7432223" cy="1389888"/>
+          </a:xfrm>
+          <a:prstGeom prst="rect">
+            <a:avLst/>
+          </a:prstGeom>
+        </p:spPr>
+      </p:pic>
+      <p:sp>
+        <p:nvSpPr>
+          <p:cNvPr id="18" name="Shape 13"/>
+          <p:cNvSpPr/>
+          <p:nvPr/>
+        </p:nvSpPr>
+        <p:spPr>
+          <a:xfrm>
+            <a:off x="741588" y="4480560"/>
+            <a:ext cx="7432223" cy="1389888"/>
+          </a:xfrm>
+          <a:prstGeom prst="rect">
+            <a:avLst/>
+          </a:prstGeom>
+          <a:solidFill>
+            <a:srgbClr val="FFFFFF">
+              <a:alpha val="0"/>
+            </a:srgbClr>
+          </a:solidFill>
+          <a:ln w="10160">
+            <a:solidFill>
+              <a:srgbClr val="C9CDD3"/>
+            </a:solidFill>
+            <a:prstDash val="solid"/>
+          </a:ln>
+        </p:spPr>
+      </p:sp>
+      <p:sp>
+        <p:nvSpPr>
+          <p:cNvPr id="19" name="Shape 14"/>
+          <p:cNvSpPr/>
+          <p:nvPr/>
+        </p:nvSpPr>
+        <p:spPr>
+          <a:xfrm>
+            <a:off x="8549640" y="4480560"/>
+            <a:ext cx="2971800" cy="1389888"/>
           </a:xfrm>
           <a:prstGeom prst="roundRect">
             <a:avLst>
-              <a:gd name="adj" fmla="val 3571"/>
+              <a:gd name="adj" fmla="val 3289"/>
             </a:avLst>
           </a:prstGeom>
           <a:solidFill>
@@ -2580,14 +2682,14 @@
       </p:sp>
       <p:sp>
         <p:nvSpPr>
-          <p:cNvPr id="16" name="Shape 13"/>
-          <p:cNvSpPr/>
-          <p:nvPr/>
-        </p:nvSpPr>
-        <p:spPr>
-          <a:xfrm>
-            <a:off x="7818120" y="4434840"/>
-            <a:ext cx="64008" cy="1280160"/>
+          <p:cNvPr id="20" name="Shape 15"/>
+          <p:cNvSpPr/>
+          <p:nvPr/>
+        </p:nvSpPr>
+        <p:spPr>
+          <a:xfrm>
+            <a:off x="8549640" y="4480560"/>
+            <a:ext cx="64008" cy="1389888"/>
           </a:xfrm>
           <a:prstGeom prst="rect">
             <a:avLst/>
@@ -2605,14 +2707,14 @@
       </p:sp>
       <p:sp>
         <p:nvSpPr>
-          <p:cNvPr id="17" name="Text 14"/>
-          <p:cNvSpPr/>
-          <p:nvPr/>
-        </p:nvSpPr>
-        <p:spPr>
-          <a:xfrm>
-            <a:off x="8019288" y="4590288"/>
-            <a:ext cx="3374136" cy="274320"/>
+          <p:cNvPr id="21" name="Text 16"/>
+          <p:cNvSpPr/>
+          <p:nvPr/>
+        </p:nvSpPr>
+        <p:spPr>
+          <a:xfrm>
+            <a:off x="8750808" y="4636008"/>
+            <a:ext cx="2642616" cy="274320"/>
           </a:xfrm>
           <a:prstGeom prst="rect">
             <a:avLst/>
@@ -2635,7 +2737,7 @@
                   <a:srgbClr val="111111"/>
                 </a:solidFill>
               </a:rPr>
-              <a:t>Experimental results</a:t>
+              <a:t>Example 3 · hard negative</a:t>
             </a:r>
             <a:endParaRPr lang="en-US" sz="1400" dirty="0"/>
           </a:p>
@@ -2643,14 +2745,14 @@
       </p:sp>
       <p:sp>
         <p:nvSpPr>
-          <p:cNvPr id="18" name="Text 15"/>
-          <p:cNvSpPr/>
-          <p:nvPr/>
-        </p:nvSpPr>
-        <p:spPr>
-          <a:xfrm>
-            <a:off x="8019288" y="4965192"/>
-            <a:ext cx="3374136" cy="621792"/>
+          <p:cNvPr id="22" name="Text 17"/>
+          <p:cNvSpPr/>
+          <p:nvPr/>
+        </p:nvSpPr>
+        <p:spPr>
+          <a:xfrm>
+            <a:off x="8750808" y="5010912"/>
+            <a:ext cx="2642616" cy="731520"/>
           </a:xfrm>
           <a:prstGeom prst="rect">
             <a:avLst/>
@@ -2673,7 +2775,7 @@
                   <a:srgbClr val="5E6470"/>
                 </a:solidFill>
               </a:rPr>
-              <a:t>Best mAP: 0.8193 Standard / 0.6493 Extended. Acc@1: 0.9312 / 0.8088.</a:t>
+              <a:t>Query D0808886: visually close panels rank highly despite different patent IDs.</a:t>
             </a:r>
             <a:endParaRPr lang="en-US" sz="1150" dirty="0"/>
           </a:p>
@@ -2681,7 +2783,7 @@
       </p:sp>
       <p:sp>
         <p:nvSpPr>
-          <p:cNvPr id="19" name="Text 16"/>
+          <p:cNvPr id="23" name="Text 18"/>
           <p:cNvSpPr/>
           <p:nvPr/>
         </p:nvSpPr>
@@ -2714,7 +2816,7 @@
                 <a:ea typeface="Arial" pitchFamily="34" charset="-122"/>
                 <a:cs typeface="Arial" pitchFamily="34" charset="-120"/>
               </a:rPr>
-              <a:t>Source: Design Patent Similarity with ArcFace Metric Learning</a:t>
+              <a:t>Extended Gallery qualitative retrieval results</a:t>
             </a:r>
             <a:endParaRPr lang="en-US" sz="750" dirty="0"/>
           </a:p>
@@ -7191,8 +7293,8 @@
         </p:blipFill>
         <p:spPr>
           <a:xfrm>
-            <a:off x="548640" y="1371600"/>
-            <a:ext cx="7452360" cy="4526280"/>
+            <a:off x="862237" y="1371600"/>
+            <a:ext cx="6825166" cy="4526280"/>
           </a:xfrm>
           <a:prstGeom prst="rect">
             <a:avLst/>
@@ -7207,8 +7309,8 @@
         </p:nvSpPr>
         <p:spPr>
           <a:xfrm>
-            <a:off x="548640" y="1371600"/>
-            <a:ext cx="7452360" cy="4526280"/>
+            <a:off x="862237" y="1371600"/>
+            <a:ext cx="6825166" cy="4526280"/>
           </a:xfrm>
           <a:prstGeom prst="rect">
             <a:avLst/>
@@ -7861,8 +7963,8 @@
         </p:blipFill>
         <p:spPr>
           <a:xfrm>
-            <a:off x="594360" y="1371600"/>
-            <a:ext cx="7726680" cy="4526280"/>
+            <a:off x="594360" y="2217234"/>
+            <a:ext cx="7726680" cy="2835011"/>
           </a:xfrm>
           <a:prstGeom prst="rect">
             <a:avLst/>
@@ -7877,8 +7979,8 @@
         </p:nvSpPr>
         <p:spPr>
           <a:xfrm>
-            <a:off x="594360" y="1371600"/>
-            <a:ext cx="7726680" cy="4526280"/>
+            <a:off x="594360" y="2217234"/>
+            <a:ext cx="7726680" cy="2835011"/>
           </a:xfrm>
           <a:prstGeom prst="rect">
             <a:avLst/>

--- a/files/DesignPatent_15min_Slides.pptx
+++ b/files/DesignPatent_15min_Slides.pptx
@@ -14,9 +14,10 @@
     <p:sldId id="262" r:id="rId8"/>
     <p:sldId id="263" r:id="rId9"/>
     <p:sldId id="264" r:id="rId10"/>
+    <p:sldId id="265" r:id="rId11"/>
   </p:sldIdLst>
   <p:notesMasterIdLst>
-    <p:notesMasterId r:id="rId11"/>
+    <p:notesMasterId r:id="rId12"/>
   </p:notesMasterIdLst>
   <p:sldSz cx="12192000" cy="6858000"/>
   <p:notesSz cx="6858000" cy="12192000"/>
@@ -534,6 +535,94 @@
             <a:fld id="{F7021451-1387-4CA6-816F-3879F97B5CBC}" type="slidenum">
               <a:rPr lang="en-US"/>
               <a:t>1</a:t>
+            </a:fld>
+            <a:endParaRPr lang="en-US"/>
+          </a:p>
+        </p:txBody>
+      </p:sp>
+    </p:spTree>
+    <p:extLst>
+      <p:ext uri="{BB962C8B-B14F-4D97-AF65-F5344CB8AC3E}">
+        <p14:creationId xmlns:p14="http://schemas.microsoft.com/office/powerpoint/2010/main" val="1024086991"/>
+      </p:ext>
+    </p:extLst>
+  </p:cSld>
+  <p:clrMapOvr>
+    <a:masterClrMapping/>
+  </p:clrMapOvr>
+</p:notes>
+</file>
+
+<file path=ppt/notesSlides/notesSlide10.xml><?xml version="1.0" encoding="utf-8"?>
+<p:notes xmlns:a="http://schemas.openxmlformats.org/drawingml/2006/main" xmlns:r="http://schemas.openxmlformats.org/officeDocument/2006/relationships" xmlns:p="http://schemas.openxmlformats.org/presentationml/2006/main">
+  <p:cSld>
+    <p:spTree>
+      <p:nvGrpSpPr>
+        <p:cNvPr id="1" name=""/>
+        <p:cNvGrpSpPr/>
+        <p:nvPr/>
+      </p:nvGrpSpPr>
+      <p:grpSpPr>
+        <a:xfrm>
+          <a:off x="0" y="0"/>
+          <a:ext cx="0" cy="0"/>
+          <a:chOff x="0" y="0"/>
+          <a:chExt cx="0" cy="0"/>
+        </a:xfrm>
+      </p:grpSpPr>
+      <p:sp>
+        <p:nvSpPr>
+          <p:cNvPr id="2" name="Slide Image Placeholder 1"/>
+          <p:cNvSpPr>
+            <a:spLocks noGrp="1" noRot="1" noChangeAspect="1"/>
+          </p:cNvSpPr>
+          <p:nvPr>
+            <p:ph type="sldImg"/>
+          </p:nvPr>
+        </p:nvSpPr>
+        <p:spPr/>
+      </p:sp>
+      <p:sp>
+        <p:nvSpPr>
+          <p:cNvPr id="3" name="Notes Placeholder 2"/>
+          <p:cNvSpPr>
+            <a:spLocks noGrp="1"/>
+          </p:cNvSpPr>
+          <p:nvPr>
+            <p:ph type="body" idx="1"/>
+          </p:nvPr>
+        </p:nvSpPr>
+        <p:spPr/>
+        <p:txBody>
+          <a:bodyPr/>
+          <a:lstStyle/>
+          <a:p>
+            <a:r>
+              <a:rPr lang="en-US" dirty="0"/>
+              <a:t/>
+            </a:r>
+            <a:endParaRPr lang="en-US" dirty="0"/>
+          </a:p>
+        </p:txBody>
+      </p:sp>
+      <p:sp>
+        <p:nvSpPr>
+          <p:cNvPr id="4" name="Slide Number Placeholder 3"/>
+          <p:cNvSpPr>
+            <a:spLocks noGrp="1"/>
+          </p:cNvSpPr>
+          <p:nvPr>
+            <p:ph type="sldNum" sz="quarter" idx="10"/>
+          </p:nvPr>
+        </p:nvSpPr>
+        <p:spPr/>
+        <p:txBody>
+          <a:bodyPr/>
+          <a:lstStyle/>
+          <a:p>
+            <a:fld id="{F7021451-1387-4CA6-816F-3879F97B5CBC}" type="slidenum">
+              <a:rPr lang="en-US"/>
+              <a:t>10</a:t>
             </a:fld>
             <a:endParaRPr lang="en-US"/>
           </a:p>
@@ -2106,6 +2195,663 @@
 </p:sld>
 </file>
 
+<file path=ppt/slides/slide10.xml><?xml version="1.0" encoding="utf-8"?>
+<p:sld xmlns:a="http://schemas.openxmlformats.org/drawingml/2006/main" xmlns:r="http://schemas.openxmlformats.org/officeDocument/2006/relationships" xmlns:p="http://schemas.openxmlformats.org/presentationml/2006/main">
+  <p:cSld name="Slide 10">
+    <p:spTree>
+      <p:nvGrpSpPr>
+        <p:cNvPr id="1" name=""/>
+        <p:cNvGrpSpPr/>
+        <p:nvPr/>
+      </p:nvGrpSpPr>
+      <p:grpSpPr>
+        <a:xfrm>
+          <a:off x="0" y="0"/>
+          <a:ext cx="0" cy="0"/>
+          <a:chOff x="0" y="0"/>
+          <a:chExt cx="0" cy="0"/>
+        </a:xfrm>
+      </p:grpSpPr>
+      <p:sp>
+        <p:nvSpPr>
+          <p:cNvPr id="2" name="Text 0"/>
+          <p:cNvSpPr/>
+          <p:nvPr/>
+        </p:nvSpPr>
+        <p:spPr>
+          <a:xfrm>
+            <a:off x="566928" y="274320"/>
+            <a:ext cx="3840480" cy="201168"/>
+          </a:xfrm>
+          <a:prstGeom prst="rect">
+            <a:avLst/>
+          </a:prstGeom>
+          <a:noFill/>
+          <a:ln/>
+        </p:spPr>
+        <p:txBody>
+          <a:bodyPr wrap="square" lIns="0" tIns="0" rIns="0" bIns="0" rtlCol="0" anchor="ctr"/>
+          <a:lstStyle/>
+          <a:p>
+            <a:pPr indent="0" marL="0">
+              <a:buNone/>
+            </a:pPr>
+            <a:r>
+              <a:rPr lang="en-US" sz="900" b="1" spc="140" kern="0" dirty="0">
+                <a:solidFill>
+                  <a:srgbClr val="FF6B35"/>
+                </a:solidFill>
+                <a:latin typeface="Arial" pitchFamily="34" charset="0"/>
+                <a:ea typeface="Arial" pitchFamily="34" charset="-122"/>
+                <a:cs typeface="Arial" pitchFamily="34" charset="-120"/>
+              </a:rPr>
+              <a:t>TAKEAWAYS</a:t>
+            </a:r>
+            <a:endParaRPr lang="en-US" sz="900" dirty="0"/>
+          </a:p>
+        </p:txBody>
+      </p:sp>
+      <p:sp>
+        <p:nvSpPr>
+          <p:cNvPr id="3" name="Text 1"/>
+          <p:cNvSpPr/>
+          <p:nvPr/>
+        </p:nvSpPr>
+        <p:spPr>
+          <a:xfrm>
+            <a:off x="548640" y="694944"/>
+            <a:ext cx="10972800" cy="530352"/>
+          </a:xfrm>
+          <a:prstGeom prst="rect">
+            <a:avLst/>
+          </a:prstGeom>
+          <a:noFill/>
+          <a:ln/>
+        </p:spPr>
+        <p:txBody>
+          <a:bodyPr wrap="square" lIns="0" tIns="0" rIns="0" bIns="0" rtlCol="0" anchor="ctr">
+            <a:normAutofit/>
+          </a:bodyPr>
+          <a:lstStyle/>
+          <a:p>
+            <a:pPr indent="0" marL="0">
+              <a:buNone/>
+            </a:pPr>
+            <a:r>
+              <a:rPr lang="en-US" sz="2800" b="1" dirty="0">
+                <a:solidFill>
+                  <a:srgbClr val="111111"/>
+                </a:solidFill>
+                <a:latin typeface="Arial" pitchFamily="34" charset="0"/>
+                <a:ea typeface="Arial" pitchFamily="34" charset="-122"/>
+                <a:cs typeface="Arial" pitchFamily="34" charset="-120"/>
+              </a:rPr>
+              <a:t>A deployable retrieval layer—with clear limits</a:t>
+            </a:r>
+            <a:endParaRPr lang="en-US" sz="2800" dirty="0"/>
+          </a:p>
+        </p:txBody>
+      </p:sp>
+      <p:sp>
+        <p:nvSpPr>
+          <p:cNvPr id="4" name="Text 2"/>
+          <p:cNvSpPr/>
+          <p:nvPr/>
+        </p:nvSpPr>
+        <p:spPr>
+          <a:xfrm>
+            <a:off x="3749040" y="6254496"/>
+            <a:ext cx="7772400" cy="164592"/>
+          </a:xfrm>
+          <a:prstGeom prst="rect">
+            <a:avLst/>
+          </a:prstGeom>
+          <a:noFill/>
+          <a:ln/>
+        </p:spPr>
+        <p:txBody>
+          <a:bodyPr wrap="square" lIns="0" tIns="0" rIns="0" bIns="0" rtlCol="0" anchor="ctr">
+            <a:normAutofit/>
+          </a:bodyPr>
+          <a:lstStyle/>
+          <a:p>
+            <a:pPr algn="r" indent="0" marL="0">
+              <a:buNone/>
+            </a:pPr>
+            <a:r>
+              <a:rPr lang="en-US" sz="730" b="1" spc="35" kern="0" dirty="0">
+                <a:solidFill>
+                  <a:srgbClr val="5E6470"/>
+                </a:solidFill>
+                <a:latin typeface="Arial" pitchFamily="34" charset="0"/>
+                <a:ea typeface="Arial" pitchFamily="34" charset="-122"/>
+                <a:cs typeface="Arial" pitchFamily="34" charset="-120"/>
+              </a:rPr>
+              <a:t>DESIGN PATENT SIMILARITY WITH ARCFACE METRIC LEARNING  ·  HUI-CHING CHUANG  ·  YUEH-HENG WU</a:t>
+            </a:r>
+            <a:endParaRPr lang="en-US" sz="730" dirty="0"/>
+          </a:p>
+        </p:txBody>
+      </p:sp>
+      <p:sp>
+        <p:nvSpPr>
+          <p:cNvPr id="5" name="Shape 3"/>
+          <p:cNvSpPr/>
+          <p:nvPr/>
+        </p:nvSpPr>
+        <p:spPr>
+          <a:xfrm>
+            <a:off x="640080" y="1417320"/>
+            <a:ext cx="3429000" cy="3520440"/>
+          </a:xfrm>
+          <a:prstGeom prst="roundRect">
+            <a:avLst>
+              <a:gd name="adj" fmla="val 1333"/>
+            </a:avLst>
+          </a:prstGeom>
+          <a:solidFill>
+            <a:srgbClr val="FFFFFF"/>
+          </a:solidFill>
+          <a:ln w="12700">
+            <a:solidFill>
+              <a:srgbClr val="C9CDD3"/>
+            </a:solidFill>
+            <a:prstDash val="solid"/>
+          </a:ln>
+        </p:spPr>
+      </p:sp>
+      <p:sp>
+        <p:nvSpPr>
+          <p:cNvPr id="6" name="Shape 4"/>
+          <p:cNvSpPr/>
+          <p:nvPr/>
+        </p:nvSpPr>
+        <p:spPr>
+          <a:xfrm>
+            <a:off x="640080" y="1417320"/>
+            <a:ext cx="64008" cy="3520440"/>
+          </a:xfrm>
+          <a:prstGeom prst="rect">
+            <a:avLst/>
+          </a:prstGeom>
+          <a:solidFill>
+            <a:srgbClr val="FF6B35"/>
+          </a:solidFill>
+          <a:ln w="12700">
+            <a:solidFill>
+              <a:srgbClr val="FF6B35"/>
+            </a:solidFill>
+            <a:prstDash val="solid"/>
+          </a:ln>
+        </p:spPr>
+      </p:sp>
+      <p:sp>
+        <p:nvSpPr>
+          <p:cNvPr id="7" name="Text 5"/>
+          <p:cNvSpPr/>
+          <p:nvPr/>
+        </p:nvSpPr>
+        <p:spPr>
+          <a:xfrm>
+            <a:off x="841248" y="1572768"/>
+            <a:ext cx="3099816" cy="274320"/>
+          </a:xfrm>
+          <a:prstGeom prst="rect">
+            <a:avLst/>
+          </a:prstGeom>
+          <a:noFill/>
+          <a:ln/>
+        </p:spPr>
+        <p:txBody>
+          <a:bodyPr wrap="square" lIns="0" tIns="0" rIns="0" bIns="0" rtlCol="0" anchor="ctr">
+            <a:normAutofit/>
+          </a:bodyPr>
+          <a:lstStyle/>
+          <a:p>
+            <a:pPr indent="0" marL="0">
+              <a:buNone/>
+            </a:pPr>
+            <a:r>
+              <a:rPr lang="en-US" sz="1400" b="1" dirty="0">
+                <a:solidFill>
+                  <a:srgbClr val="111111"/>
+                </a:solidFill>
+              </a:rPr>
+              <a:t>1 · Supervision</a:t>
+            </a:r>
+            <a:endParaRPr lang="en-US" sz="1400" dirty="0"/>
+          </a:p>
+        </p:txBody>
+      </p:sp>
+      <p:sp>
+        <p:nvSpPr>
+          <p:cNvPr id="8" name="Text 6"/>
+          <p:cNvSpPr/>
+          <p:nvPr/>
+        </p:nvSpPr>
+        <p:spPr>
+          <a:xfrm>
+            <a:off x="841248" y="1947672"/>
+            <a:ext cx="3099816" cy="2862072"/>
+          </a:xfrm>
+          <a:prstGeom prst="rect">
+            <a:avLst/>
+          </a:prstGeom>
+          <a:noFill/>
+          <a:ln/>
+        </p:spPr>
+        <p:txBody>
+          <a:bodyPr wrap="square" lIns="254" tIns="254" rIns="254" bIns="254" rtlCol="0" anchor="t">
+            <a:normAutofit/>
+          </a:bodyPr>
+          <a:lstStyle/>
+          <a:p>
+            <a:pPr indent="0" marL="0">
+              <a:buNone/>
+            </a:pPr>
+            <a:r>
+              <a:rPr lang="en-US" sz="1150" dirty="0">
+                <a:solidFill>
+                  <a:srgbClr val="5E6470"/>
+                </a:solidFill>
+              </a:rPr>
+              <a:t>Patent identity turns multi-view drawings into strong positive pairs and avoids category-only shortcuts.</a:t>
+            </a:r>
+            <a:endParaRPr lang="en-US" sz="1150" dirty="0"/>
+          </a:p>
+        </p:txBody>
+      </p:sp>
+      <p:sp>
+        <p:nvSpPr>
+          <p:cNvPr id="9" name="Shape 7"/>
+          <p:cNvSpPr/>
+          <p:nvPr/>
+        </p:nvSpPr>
+        <p:spPr>
+          <a:xfrm>
+            <a:off x="4389120" y="1417320"/>
+            <a:ext cx="3429000" cy="3520440"/>
+          </a:xfrm>
+          <a:prstGeom prst="roundRect">
+            <a:avLst>
+              <a:gd name="adj" fmla="val 1333"/>
+            </a:avLst>
+          </a:prstGeom>
+          <a:solidFill>
+            <a:srgbClr val="FFFFFF"/>
+          </a:solidFill>
+          <a:ln w="12700">
+            <a:solidFill>
+              <a:srgbClr val="C9CDD3"/>
+            </a:solidFill>
+            <a:prstDash val="solid"/>
+          </a:ln>
+        </p:spPr>
+      </p:sp>
+      <p:sp>
+        <p:nvSpPr>
+          <p:cNvPr id="10" name="Shape 8"/>
+          <p:cNvSpPr/>
+          <p:nvPr/>
+        </p:nvSpPr>
+        <p:spPr>
+          <a:xfrm>
+            <a:off x="4389120" y="1417320"/>
+            <a:ext cx="64008" cy="3520440"/>
+          </a:xfrm>
+          <a:prstGeom prst="rect">
+            <a:avLst/>
+          </a:prstGeom>
+          <a:solidFill>
+            <a:srgbClr val="2166AC"/>
+          </a:solidFill>
+          <a:ln w="12700">
+            <a:solidFill>
+              <a:srgbClr val="2166AC"/>
+            </a:solidFill>
+            <a:prstDash val="solid"/>
+          </a:ln>
+        </p:spPr>
+      </p:sp>
+      <p:sp>
+        <p:nvSpPr>
+          <p:cNvPr id="11" name="Text 9"/>
+          <p:cNvSpPr/>
+          <p:nvPr/>
+        </p:nvSpPr>
+        <p:spPr>
+          <a:xfrm>
+            <a:off x="4590288" y="1572768"/>
+            <a:ext cx="3099816" cy="274320"/>
+          </a:xfrm>
+          <a:prstGeom prst="rect">
+            <a:avLst/>
+          </a:prstGeom>
+          <a:noFill/>
+          <a:ln/>
+        </p:spPr>
+        <p:txBody>
+          <a:bodyPr wrap="square" lIns="0" tIns="0" rIns="0" bIns="0" rtlCol="0" anchor="ctr">
+            <a:normAutofit/>
+          </a:bodyPr>
+          <a:lstStyle/>
+          <a:p>
+            <a:pPr indent="0" marL="0">
+              <a:buNone/>
+            </a:pPr>
+            <a:r>
+              <a:rPr lang="en-US" sz="1400" b="1" dirty="0">
+                <a:solidFill>
+                  <a:srgbClr val="111111"/>
+                </a:solidFill>
+              </a:rPr>
+              <a:t>2 · Scale</a:t>
+            </a:r>
+            <a:endParaRPr lang="en-US" sz="1400" dirty="0"/>
+          </a:p>
+        </p:txBody>
+      </p:sp>
+      <p:sp>
+        <p:nvSpPr>
+          <p:cNvPr id="12" name="Text 10"/>
+          <p:cNvSpPr/>
+          <p:nvPr/>
+        </p:nvSpPr>
+        <p:spPr>
+          <a:xfrm>
+            <a:off x="4590288" y="1947672"/>
+            <a:ext cx="3099816" cy="2862072"/>
+          </a:xfrm>
+          <a:prstGeom prst="rect">
+            <a:avLst/>
+          </a:prstGeom>
+          <a:noFill/>
+          <a:ln/>
+        </p:spPr>
+        <p:txBody>
+          <a:bodyPr wrap="square" lIns="254" tIns="254" rIns="254" bIns="254" rtlCol="0" anchor="t">
+            <a:normAutofit/>
+          </a:bodyPr>
+          <a:lstStyle/>
+          <a:p>
+            <a:pPr indent="0" marL="0">
+              <a:buNone/>
+            </a:pPr>
+            <a:r>
+              <a:rPr lang="en-US" sz="1150" dirty="0">
+                <a:solidFill>
+                  <a:srgbClr val="5E6470"/>
+                </a:solidFill>
+              </a:rPr>
+              <a:t>High-resolution ConvNeXt features maintain useful precision in a 338k-image extended gallery.</a:t>
+            </a:r>
+            <a:endParaRPr lang="en-US" sz="1150" dirty="0"/>
+          </a:p>
+        </p:txBody>
+      </p:sp>
+      <p:sp>
+        <p:nvSpPr>
+          <p:cNvPr id="13" name="Shape 11"/>
+          <p:cNvSpPr/>
+          <p:nvPr/>
+        </p:nvSpPr>
+        <p:spPr>
+          <a:xfrm>
+            <a:off x="8138160" y="1417320"/>
+            <a:ext cx="3429000" cy="3520440"/>
+          </a:xfrm>
+          <a:prstGeom prst="roundRect">
+            <a:avLst>
+              <a:gd name="adj" fmla="val 1333"/>
+            </a:avLst>
+          </a:prstGeom>
+          <a:solidFill>
+            <a:srgbClr val="FFFFFF"/>
+          </a:solidFill>
+          <a:ln w="12700">
+            <a:solidFill>
+              <a:srgbClr val="C9CDD3"/>
+            </a:solidFill>
+            <a:prstDash val="solid"/>
+          </a:ln>
+        </p:spPr>
+      </p:sp>
+      <p:sp>
+        <p:nvSpPr>
+          <p:cNvPr id="14" name="Shape 12"/>
+          <p:cNvSpPr/>
+          <p:nvPr/>
+        </p:nvSpPr>
+        <p:spPr>
+          <a:xfrm>
+            <a:off x="8138160" y="1417320"/>
+            <a:ext cx="64008" cy="3520440"/>
+          </a:xfrm>
+          <a:prstGeom prst="rect">
+            <a:avLst/>
+          </a:prstGeom>
+          <a:solidFill>
+            <a:srgbClr val="188977"/>
+          </a:solidFill>
+          <a:ln w="12700">
+            <a:solidFill>
+              <a:srgbClr val="188977"/>
+            </a:solidFill>
+            <a:prstDash val="solid"/>
+          </a:ln>
+        </p:spPr>
+      </p:sp>
+      <p:sp>
+        <p:nvSpPr>
+          <p:cNvPr id="15" name="Text 13"/>
+          <p:cNvSpPr/>
+          <p:nvPr/>
+        </p:nvSpPr>
+        <p:spPr>
+          <a:xfrm>
+            <a:off x="8339328" y="1572768"/>
+            <a:ext cx="3099816" cy="274320"/>
+          </a:xfrm>
+          <a:prstGeom prst="rect">
+            <a:avLst/>
+          </a:prstGeom>
+          <a:noFill/>
+          <a:ln/>
+        </p:spPr>
+        <p:txBody>
+          <a:bodyPr wrap="square" lIns="0" tIns="0" rIns="0" bIns="0" rtlCol="0" anchor="ctr">
+            <a:normAutofit/>
+          </a:bodyPr>
+          <a:lstStyle/>
+          <a:p>
+            <a:pPr indent="0" marL="0">
+              <a:buNone/>
+            </a:pPr>
+            <a:r>
+              <a:rPr lang="en-US" sz="1400" b="1" dirty="0">
+                <a:solidFill>
+                  <a:srgbClr val="111111"/>
+                </a:solidFill>
+              </a:rPr>
+              <a:t>3 · Next step</a:t>
+            </a:r>
+            <a:endParaRPr lang="en-US" sz="1400" dirty="0"/>
+          </a:p>
+        </p:txBody>
+      </p:sp>
+      <p:sp>
+        <p:nvSpPr>
+          <p:cNvPr id="16" name="Text 14"/>
+          <p:cNvSpPr/>
+          <p:nvPr/>
+        </p:nvSpPr>
+        <p:spPr>
+          <a:xfrm>
+            <a:off x="8339328" y="1947672"/>
+            <a:ext cx="3099816" cy="2862072"/>
+          </a:xfrm>
+          <a:prstGeom prst="rect">
+            <a:avLst/>
+          </a:prstGeom>
+          <a:noFill/>
+          <a:ln/>
+        </p:spPr>
+        <p:txBody>
+          <a:bodyPr wrap="square" lIns="254" tIns="254" rIns="254" bIns="254" rtlCol="0" anchor="t">
+            <a:normAutofit/>
+          </a:bodyPr>
+          <a:lstStyle/>
+          <a:p>
+            <a:pPr indent="0" marL="0">
+              <a:buNone/>
+            </a:pPr>
+            <a:r>
+              <a:rPr lang="en-US" sz="1150" dirty="0">
+                <a:solidFill>
+                  <a:srgbClr val="5E6470"/>
+                </a:solidFill>
+              </a:rPr>
+              <a:t>Hard negatives, domain filtering, and examiner-centered evaluation remain essential.</a:t>
+            </a:r>
+            <a:endParaRPr lang="en-US" sz="1150" dirty="0"/>
+          </a:p>
+        </p:txBody>
+      </p:sp>
+      <p:sp>
+        <p:nvSpPr>
+          <p:cNvPr id="17" name="Text 15"/>
+          <p:cNvSpPr/>
+          <p:nvPr/>
+        </p:nvSpPr>
+        <p:spPr>
+          <a:xfrm>
+            <a:off x="685800" y="5321808"/>
+            <a:ext cx="10789920" cy="502920"/>
+          </a:xfrm>
+          <a:prstGeom prst="rect">
+            <a:avLst/>
+          </a:prstGeom>
+          <a:noFill/>
+          <a:ln/>
+        </p:spPr>
+        <p:txBody>
+          <a:bodyPr wrap="square" lIns="0" tIns="0" rIns="0" bIns="0" rtlCol="0" anchor="ctr">
+            <a:normAutofit/>
+          </a:bodyPr>
+          <a:lstStyle/>
+          <a:p>
+            <a:pPr algn="ctr" indent="0" marL="0">
+              <a:buNone/>
+            </a:pPr>
+            <a:r>
+              <a:rPr lang="en-US" sz="2100" b="1" dirty="0">
+                <a:solidFill>
+                  <a:srgbClr val="111111"/>
+                </a:solidFill>
+              </a:rPr>
+              <a:t>Bottom line: metric learning can narrow prior art; it does not replace legal judgment.</a:t>
+            </a:r>
+            <a:endParaRPr lang="en-US" sz="2100" dirty="0"/>
+          </a:p>
+        </p:txBody>
+      </p:sp>
+      <p:sp>
+        <p:nvSpPr>
+          <p:cNvPr id="18" name="Text 16"/>
+          <p:cNvSpPr/>
+          <p:nvPr/>
+        </p:nvSpPr>
+        <p:spPr>
+          <a:xfrm>
+            <a:off x="2377440" y="6510528"/>
+            <a:ext cx="8229600" cy="164592"/>
+          </a:xfrm>
+          <a:prstGeom prst="rect">
+            <a:avLst/>
+          </a:prstGeom>
+          <a:noFill/>
+          <a:ln/>
+        </p:spPr>
+        <p:txBody>
+          <a:bodyPr wrap="square" lIns="0" tIns="0" rIns="0" bIns="0" rtlCol="0" anchor="ctr">
+            <a:normAutofit/>
+          </a:bodyPr>
+          <a:lstStyle/>
+          <a:p>
+            <a:pPr algn="ctr" indent="0" marL="0">
+              <a:buNone/>
+            </a:pPr>
+            <a:r>
+              <a:rPr lang="en-US" sz="750" dirty="0">
+                <a:solidFill>
+                  <a:srgbClr val="5E6470"/>
+                </a:solidFill>
+                <a:latin typeface="Arial" pitchFamily="34" charset="0"/>
+                <a:ea typeface="Arial" pitchFamily="34" charset="-122"/>
+                <a:cs typeface="Arial" pitchFamily="34" charset="-120"/>
+              </a:rPr>
+              <a:t>Design Patent Similarity with ArcFace Metric Learning</a:t>
+            </a:r>
+            <a:endParaRPr lang="en-US" sz="750" dirty="0"/>
+          </a:p>
+        </p:txBody>
+      </p:sp>
+      <p:sp>
+        <p:nvSpPr>
+          <p:cNvPr id="25" name="Slide Number Placeholder 0"/>
+          <p:cNvSpPr>
+            <a:spLocks noGrp="1"/>
+          </p:cNvSpPr>
+          <p:nvPr>
+            <p:ph type="sldNum" sz="quarter" idx="4294967295"/>
+          </p:nvPr>
+        </p:nvSpPr>
+        <p:spPr>
+          <a:xfrm>
+            <a:off x="11201400" y="6492240"/>
+            <a:ext cx="411480" cy="182880"/>
+          </a:xfrm>
+          <a:prstGeom prst="rect">
+            <a:avLst/>
+          </a:prstGeom>
+          <a:extLst>
+            <a:ext uri="{C572A759-6A51-4108-AA02-DFA0A04FC94B}">
+              <ma14:wrappingTextBoxFlag xmlns:ma14="http://schemas.microsoft.com/office/mac/drawingml/2011/main" val="0"/>
+            </a:ext>
+          </a:extLst>
+        </p:spPr>
+        <p:txBody>
+          <a:bodyPr lIns="0" tIns="0" rIns="0" bIns="0"/>
+          <a:lstStyle>
+            <a:lvl1pPr>
+              <a:defRPr sz="800">
+                <a:solidFill>
+                  <a:srgbClr val="5E6470"/>
+                </a:solidFill>
+                <a:latin typeface="Arial"/>
+                <a:ea typeface="Arial"/>
+                <a:cs typeface="Arial"/>
+              </a:defRPr>
+            </a:lvl1pPr>
+          </a:lstStyle>
+          <a:p>
+            <a:pPr algn="r"/>
+            <a:fld id="{F7021451-1387-4CA6-816F-3879F97B5CBC}" type="slidenum">
+              <a:rPr b="0" lang="en-US"/>
+              <a:t>10</a:t>
+            </a:fld>
+            <a:endParaRPr lang="en-US"/>
+          </a:p>
+        </p:txBody>
+      </p:sp>
+    </p:spTree>
+  </p:cSld>
+  <p:clrMapOvr>
+    <a:masterClrMapping/>
+  </p:clrMapOvr>
+</p:sld>
+</file>
+
 <file path=ppt/slides/slide2.xml><?xml version="1.0" encoding="utf-8"?>
 <p:sld xmlns:a="http://schemas.openxmlformats.org/drawingml/2006/main" xmlns:r="http://schemas.openxmlformats.org/officeDocument/2006/relationships" xmlns:p="http://schemas.openxmlformats.org/presentationml/2006/main">
   <p:cSld name="Slide 2">
@@ -3936,7 +4682,7 @@
                 <a:ea typeface="Arial" pitchFamily="34" charset="-122"/>
                 <a:cs typeface="Arial" pitchFamily="34" charset="-120"/>
               </a:rPr>
-              <a:t>METHOD</a:t>
+              <a:t>DATA QUALITY</a:t>
             </a:r>
             <a:endParaRPr lang="en-US" sz="900" dirty="0"/>
           </a:p>
@@ -3977,7 +4723,7 @@
                 <a:ea typeface="Arial" pitchFamily="34" charset="-122"/>
                 <a:cs typeface="Arial" pitchFamily="34" charset="-120"/>
               </a:rPr>
-              <a:t>Patent IDs become the metric-learning signal</a:t>
+              <a:t>PhotoLike filtering removes photographs before training</a:t>
             </a:r>
             <a:endParaRPr lang="en-US" sz="2800" dirty="0"/>
           </a:p>
@@ -4026,99 +4772,84 @@
       </p:sp>
       <p:sp>
         <p:nvSpPr>
-          <p:cNvPr id="5" name="Shape 3"/>
-          <p:cNvSpPr/>
-          <p:nvPr/>
-        </p:nvSpPr>
-        <p:spPr>
-          <a:xfrm>
-            <a:off x="2542032" y="2788920"/>
-            <a:ext cx="256032" cy="310896"/>
-          </a:xfrm>
-          <a:prstGeom prst="chevron">
+          <p:cNvPr id="5" name="Text 3"/>
+          <p:cNvSpPr/>
+          <p:nvPr/>
+        </p:nvSpPr>
+        <p:spPr>
+          <a:xfrm>
+            <a:off x="621792" y="1298448"/>
+            <a:ext cx="3794760" cy="256032"/>
+          </a:xfrm>
+          <a:prstGeom prst="rect">
+            <a:avLst/>
+          </a:prstGeom>
+          <a:noFill/>
+          <a:ln/>
+        </p:spPr>
+        <p:txBody>
+          <a:bodyPr wrap="square" lIns="0" tIns="0" rIns="0" bIns="0" rtlCol="0" anchor="ctr"/>
+          <a:lstStyle/>
+          <a:p>
+            <a:pPr indent="0" marL="0">
+              <a:buNone/>
+            </a:pPr>
+            <a:r>
+              <a:rPr lang="en-US" sz="1400" b="1" dirty="0">
+                <a:solidFill>
+                  <a:srgbClr val="111111"/>
+                </a:solidFill>
+              </a:rPr>
+              <a:t>Representative photographic-style patents</a:t>
+            </a:r>
+            <a:endParaRPr lang="en-US" sz="1400" dirty="0"/>
+          </a:p>
+        </p:txBody>
+      </p:sp>
+      <p:pic>
+        <p:nvPicPr>
+          <p:cNvPr id="6" name="Image 0" descr="C:\Dropbox\Apps\Overleaf\ACM Conference Proceedings Primary Article Template\figure\photolike_sample1.png">    </p:cNvPr>
+          <p:cNvPicPr>
+            <a:picLocks noChangeAspect="1"/>
+          </p:cNvPicPr>
+          <p:nvPr/>
+        </p:nvPicPr>
+        <p:blipFill>
+          <a:blip r:embed="rId1"/>
+          <a:stretch>
+            <a:fillRect/>
+          </a:stretch>
+        </p:blipFill>
+        <p:spPr>
+          <a:xfrm>
+            <a:off x="621792" y="1691640"/>
+            <a:ext cx="1060704" cy="1060704"/>
+          </a:xfrm>
+          <a:prstGeom prst="rect">
+            <a:avLst/>
+          </a:prstGeom>
+        </p:spPr>
+      </p:pic>
+      <p:sp>
+        <p:nvSpPr>
+          <p:cNvPr id="7" name="Shape 4"/>
+          <p:cNvSpPr/>
+          <p:nvPr/>
+        </p:nvSpPr>
+        <p:spPr>
+          <a:xfrm>
+            <a:off x="621792" y="1691640"/>
+            <a:ext cx="1060704" cy="1060704"/>
+          </a:xfrm>
+          <a:prstGeom prst="rect">
             <a:avLst/>
           </a:prstGeom>
           <a:solidFill>
-            <a:srgbClr val="5E6470"/>
+            <a:srgbClr val="FFFFFF">
+              <a:alpha val="0"/>
+            </a:srgbClr>
           </a:solidFill>
-          <a:ln w="12700">
-            <a:solidFill>
-              <a:srgbClr val="5E6470"/>
-            </a:solidFill>
-            <a:prstDash val="solid"/>
-          </a:ln>
-        </p:spPr>
-      </p:sp>
-      <p:sp>
-        <p:nvSpPr>
-          <p:cNvPr id="6" name="Shape 4"/>
-          <p:cNvSpPr/>
-          <p:nvPr/>
-        </p:nvSpPr>
-        <p:spPr>
-          <a:xfrm>
-            <a:off x="5148072" y="2788920"/>
-            <a:ext cx="256032" cy="310896"/>
-          </a:xfrm>
-          <a:prstGeom prst="chevron">
-            <a:avLst/>
-          </a:prstGeom>
-          <a:solidFill>
-            <a:srgbClr val="5E6470"/>
-          </a:solidFill>
-          <a:ln w="12700">
-            <a:solidFill>
-              <a:srgbClr val="5E6470"/>
-            </a:solidFill>
-            <a:prstDash val="solid"/>
-          </a:ln>
-        </p:spPr>
-      </p:sp>
-      <p:sp>
-        <p:nvSpPr>
-          <p:cNvPr id="7" name="Shape 5"/>
-          <p:cNvSpPr/>
-          <p:nvPr/>
-        </p:nvSpPr>
-        <p:spPr>
-          <a:xfrm>
-            <a:off x="7662672" y="2788920"/>
-            <a:ext cx="256032" cy="310896"/>
-          </a:xfrm>
-          <a:prstGeom prst="chevron">
-            <a:avLst/>
-          </a:prstGeom>
-          <a:solidFill>
-            <a:srgbClr val="5E6470"/>
-          </a:solidFill>
-          <a:ln w="12700">
-            <a:solidFill>
-              <a:srgbClr val="5E6470"/>
-            </a:solidFill>
-            <a:prstDash val="solid"/>
-          </a:ln>
-        </p:spPr>
-      </p:sp>
-      <p:sp>
-        <p:nvSpPr>
-          <p:cNvPr id="8" name="Shape 6"/>
-          <p:cNvSpPr/>
-          <p:nvPr/>
-        </p:nvSpPr>
-        <p:spPr>
-          <a:xfrm>
-            <a:off x="594360" y="2057400"/>
-            <a:ext cx="1874520" cy="1783080"/>
-          </a:xfrm>
-          <a:prstGeom prst="roundRect">
-            <a:avLst>
-              <a:gd name="adj" fmla="val 4103"/>
-            </a:avLst>
-          </a:prstGeom>
-          <a:solidFill>
-            <a:srgbClr val="F2F3F5"/>
-          </a:solidFill>
-          <a:ln w="15240">
+          <a:ln w="10160">
             <a:solidFill>
               <a:srgbClr val="C9CDD3"/>
             </a:solidFill>
@@ -4126,102 +4857,50 @@
           </a:ln>
         </p:spPr>
       </p:sp>
-      <p:sp>
-        <p:nvSpPr>
-          <p:cNvPr id="9" name="Text 7"/>
-          <p:cNvSpPr/>
-          <p:nvPr/>
-        </p:nvSpPr>
-        <p:spPr>
-          <a:xfrm>
-            <a:off x="722376" y="2395728"/>
-            <a:ext cx="1618488" cy="320040"/>
-          </a:xfrm>
-          <a:prstGeom prst="rect">
-            <a:avLst/>
-          </a:prstGeom>
-          <a:noFill/>
-          <a:ln/>
-        </p:spPr>
-        <p:txBody>
-          <a:bodyPr wrap="square" lIns="0" tIns="0" rIns="0" bIns="0" rtlCol="0" anchor="ctr">
-            <a:normAutofit/>
-          </a:bodyPr>
-          <a:lstStyle/>
-          <a:p>
-            <a:pPr algn="ctr" indent="0" marL="0">
-              <a:buNone/>
-            </a:pPr>
-            <a:r>
-              <a:rPr lang="en-US" sz="1700" b="1" dirty="0">
-                <a:solidFill>
-                  <a:srgbClr val="111111"/>
-                </a:solidFill>
-              </a:rPr>
-              <a:t>Patent drawing</a:t>
-            </a:r>
-            <a:endParaRPr lang="en-US" sz="1700" dirty="0"/>
-          </a:p>
-        </p:txBody>
-      </p:sp>
-      <p:sp>
-        <p:nvSpPr>
-          <p:cNvPr id="10" name="Text 8"/>
-          <p:cNvSpPr/>
-          <p:nvPr/>
-        </p:nvSpPr>
-        <p:spPr>
-          <a:xfrm>
-            <a:off x="722376" y="2953512"/>
-            <a:ext cx="1618488" cy="502920"/>
-          </a:xfrm>
-          <a:prstGeom prst="rect">
-            <a:avLst/>
-          </a:prstGeom>
-          <a:noFill/>
-          <a:ln/>
-        </p:spPr>
-        <p:txBody>
-          <a:bodyPr wrap="square" lIns="0" tIns="0" rIns="0" bIns="0" rtlCol="0" anchor="ctr">
-            <a:normAutofit/>
-          </a:bodyPr>
-          <a:lstStyle/>
-          <a:p>
-            <a:pPr algn="ctr" indent="0" marL="0">
-              <a:buNone/>
-            </a:pPr>
-            <a:r>
-              <a:rPr lang="en-US" sz="1150" dirty="0">
-                <a:solidFill>
-                  <a:srgbClr val="5E6470"/>
-                </a:solidFill>
-              </a:rPr>
-              <a:t>multiple views</a:t>
-            </a:r>
-            <a:endParaRPr lang="en-US" sz="1150" dirty="0"/>
-          </a:p>
-        </p:txBody>
-      </p:sp>
-      <p:sp>
-        <p:nvSpPr>
-          <p:cNvPr id="11" name="Shape 9"/>
-          <p:cNvSpPr/>
-          <p:nvPr/>
-        </p:nvSpPr>
-        <p:spPr>
-          <a:xfrm>
-            <a:off x="2926080" y="2057400"/>
-            <a:ext cx="2057400" cy="1783080"/>
-          </a:xfrm>
-          <a:prstGeom prst="roundRect">
-            <a:avLst>
-              <a:gd name="adj" fmla="val 4103"/>
-            </a:avLst>
+      <p:pic>
+        <p:nvPicPr>
+          <p:cNvPr id="8" name="Image 1" descr="C:\Dropbox\Apps\Overleaf\ACM Conference Proceedings Primary Article Template\figure\photolike_sample2.png">    </p:cNvPr>
+          <p:cNvPicPr>
+            <a:picLocks noChangeAspect="1"/>
+          </p:cNvPicPr>
+          <p:nvPr/>
+        </p:nvPicPr>
+        <p:blipFill>
+          <a:blip r:embed="rId2"/>
+          <a:stretch>
+            <a:fillRect/>
+          </a:stretch>
+        </p:blipFill>
+        <p:spPr>
+          <a:xfrm>
+            <a:off x="1865376" y="1691640"/>
+            <a:ext cx="1060704" cy="1060704"/>
+          </a:xfrm>
+          <a:prstGeom prst="rect">
+            <a:avLst/>
+          </a:prstGeom>
+        </p:spPr>
+      </p:pic>
+      <p:sp>
+        <p:nvSpPr>
+          <p:cNvPr id="9" name="Shape 5"/>
+          <p:cNvSpPr/>
+          <p:nvPr/>
+        </p:nvSpPr>
+        <p:spPr>
+          <a:xfrm>
+            <a:off x="1865376" y="1691640"/>
+            <a:ext cx="1060704" cy="1060704"/>
+          </a:xfrm>
+          <a:prstGeom prst="rect">
+            <a:avLst/>
           </a:prstGeom>
           <a:solidFill>
-            <a:srgbClr val="F2F3F5"/>
+            <a:srgbClr val="FFFFFF">
+              <a:alpha val="0"/>
+            </a:srgbClr>
           </a:solidFill>
-          <a:ln w="15240">
+          <a:ln w="10160">
             <a:solidFill>
               <a:srgbClr val="C9CDD3"/>
             </a:solidFill>
@@ -4229,102 +4908,50 @@
           </a:ln>
         </p:spPr>
       </p:sp>
-      <p:sp>
-        <p:nvSpPr>
-          <p:cNvPr id="12" name="Text 10"/>
-          <p:cNvSpPr/>
-          <p:nvPr/>
-        </p:nvSpPr>
-        <p:spPr>
-          <a:xfrm>
-            <a:off x="3054096" y="2395728"/>
-            <a:ext cx="1801368" cy="320040"/>
-          </a:xfrm>
-          <a:prstGeom prst="rect">
-            <a:avLst/>
-          </a:prstGeom>
-          <a:noFill/>
-          <a:ln/>
-        </p:spPr>
-        <p:txBody>
-          <a:bodyPr wrap="square" lIns="0" tIns="0" rIns="0" bIns="0" rtlCol="0" anchor="ctr">
-            <a:normAutofit/>
-          </a:bodyPr>
-          <a:lstStyle/>
-          <a:p>
-            <a:pPr algn="ctr" indent="0" marL="0">
-              <a:buNone/>
-            </a:pPr>
-            <a:r>
-              <a:rPr lang="en-US" sz="1700" b="1" dirty="0">
-                <a:solidFill>
-                  <a:srgbClr val="111111"/>
-                </a:solidFill>
-              </a:rPr>
-              <a:t>ConvNeXtV2</a:t>
-            </a:r>
-            <a:endParaRPr lang="en-US" sz="1700" dirty="0"/>
-          </a:p>
-        </p:txBody>
-      </p:sp>
-      <p:sp>
-        <p:nvSpPr>
-          <p:cNvPr id="13" name="Text 11"/>
-          <p:cNvSpPr/>
-          <p:nvPr/>
-        </p:nvSpPr>
-        <p:spPr>
-          <a:xfrm>
-            <a:off x="3054096" y="2953512"/>
-            <a:ext cx="1801368" cy="502920"/>
-          </a:xfrm>
-          <a:prstGeom prst="rect">
-            <a:avLst/>
-          </a:prstGeom>
-          <a:noFill/>
-          <a:ln/>
-        </p:spPr>
-        <p:txBody>
-          <a:bodyPr wrap="square" lIns="0" tIns="0" rIns="0" bIns="0" rtlCol="0" anchor="ctr">
-            <a:normAutofit/>
-          </a:bodyPr>
-          <a:lstStyle/>
-          <a:p>
-            <a:pPr algn="ctr" indent="0" marL="0">
-              <a:buNone/>
-            </a:pPr>
-            <a:r>
-              <a:rPr lang="en-US" sz="1150" dirty="0">
-                <a:solidFill>
-                  <a:srgbClr val="5E6470"/>
-                </a:solidFill>
-              </a:rPr>
-              <a:t>visual backbone</a:t>
-            </a:r>
-            <a:endParaRPr lang="en-US" sz="1150" dirty="0"/>
-          </a:p>
-        </p:txBody>
-      </p:sp>
-      <p:sp>
-        <p:nvSpPr>
-          <p:cNvPr id="14" name="Shape 12"/>
-          <p:cNvSpPr/>
-          <p:nvPr/>
-        </p:nvSpPr>
-        <p:spPr>
-          <a:xfrm>
-            <a:off x="5532120" y="2057400"/>
-            <a:ext cx="1965960" cy="1783080"/>
-          </a:xfrm>
-          <a:prstGeom prst="roundRect">
-            <a:avLst>
-              <a:gd name="adj" fmla="val 4103"/>
-            </a:avLst>
+      <p:pic>
+        <p:nvPicPr>
+          <p:cNvPr id="10" name="Image 2" descr="C:\Dropbox\Apps\Overleaf\ACM Conference Proceedings Primary Article Template\figure\photolike_sample3.png">    </p:cNvPr>
+          <p:cNvPicPr>
+            <a:picLocks noChangeAspect="1"/>
+          </p:cNvPicPr>
+          <p:nvPr/>
+        </p:nvPicPr>
+        <p:blipFill>
+          <a:blip r:embed="rId3"/>
+          <a:stretch>
+            <a:fillRect/>
+          </a:stretch>
+        </p:blipFill>
+        <p:spPr>
+          <a:xfrm>
+            <a:off x="3108960" y="1691640"/>
+            <a:ext cx="1060704" cy="1060704"/>
+          </a:xfrm>
+          <a:prstGeom prst="rect">
+            <a:avLst/>
+          </a:prstGeom>
+        </p:spPr>
+      </p:pic>
+      <p:sp>
+        <p:nvSpPr>
+          <p:cNvPr id="11" name="Shape 6"/>
+          <p:cNvSpPr/>
+          <p:nvPr/>
+        </p:nvSpPr>
+        <p:spPr>
+          <a:xfrm>
+            <a:off x="3108960" y="1691640"/>
+            <a:ext cx="1060704" cy="1060704"/>
+          </a:xfrm>
+          <a:prstGeom prst="rect">
+            <a:avLst/>
           </a:prstGeom>
           <a:solidFill>
-            <a:srgbClr val="F2F3F5"/>
+            <a:srgbClr val="FFFFFF">
+              <a:alpha val="0"/>
+            </a:srgbClr>
           </a:solidFill>
-          <a:ln w="15240">
+          <a:ln w="10160">
             <a:solidFill>
               <a:srgbClr val="C9CDD3"/>
             </a:solidFill>
@@ -4332,16 +4959,229 @@
           </a:ln>
         </p:spPr>
       </p:sp>
-      <p:sp>
-        <p:nvSpPr>
-          <p:cNvPr id="15" name="Text 13"/>
-          <p:cNvSpPr/>
-          <p:nvPr/>
-        </p:nvSpPr>
-        <p:spPr>
-          <a:xfrm>
-            <a:off x="5660136" y="2395728"/>
-            <a:ext cx="1709928" cy="320040"/>
+      <p:pic>
+        <p:nvPicPr>
+          <p:cNvPr id="12" name="Image 3" descr="C:\Dropbox\Apps\Overleaf\ACM Conference Proceedings Primary Article Template\figure\photolike_sample4.png">    </p:cNvPr>
+          <p:cNvPicPr>
+            <a:picLocks noChangeAspect="1"/>
+          </p:cNvPicPr>
+          <p:nvPr/>
+        </p:nvPicPr>
+        <p:blipFill>
+          <a:blip r:embed="rId4"/>
+          <a:stretch>
+            <a:fillRect/>
+          </a:stretch>
+        </p:blipFill>
+        <p:spPr>
+          <a:xfrm>
+            <a:off x="621792" y="3063240"/>
+            <a:ext cx="1060704" cy="1060704"/>
+          </a:xfrm>
+          <a:prstGeom prst="rect">
+            <a:avLst/>
+          </a:prstGeom>
+        </p:spPr>
+      </p:pic>
+      <p:sp>
+        <p:nvSpPr>
+          <p:cNvPr id="13" name="Shape 7"/>
+          <p:cNvSpPr/>
+          <p:nvPr/>
+        </p:nvSpPr>
+        <p:spPr>
+          <a:xfrm>
+            <a:off x="621792" y="3063240"/>
+            <a:ext cx="1060704" cy="1060704"/>
+          </a:xfrm>
+          <a:prstGeom prst="rect">
+            <a:avLst/>
+          </a:prstGeom>
+          <a:solidFill>
+            <a:srgbClr val="FFFFFF">
+              <a:alpha val="0"/>
+            </a:srgbClr>
+          </a:solidFill>
+          <a:ln w="10160">
+            <a:solidFill>
+              <a:srgbClr val="C9CDD3"/>
+            </a:solidFill>
+            <a:prstDash val="solid"/>
+          </a:ln>
+        </p:spPr>
+      </p:sp>
+      <p:pic>
+        <p:nvPicPr>
+          <p:cNvPr id="14" name="Image 4" descr="C:\Dropbox\Apps\Overleaf\ACM Conference Proceedings Primary Article Template\figure\photolike_sample5.png">    </p:cNvPr>
+          <p:cNvPicPr>
+            <a:picLocks noChangeAspect="1"/>
+          </p:cNvPicPr>
+          <p:nvPr/>
+        </p:nvPicPr>
+        <p:blipFill>
+          <a:blip r:embed="rId5"/>
+          <a:stretch>
+            <a:fillRect/>
+          </a:stretch>
+        </p:blipFill>
+        <p:spPr>
+          <a:xfrm>
+            <a:off x="1865376" y="3063240"/>
+            <a:ext cx="1060704" cy="1060704"/>
+          </a:xfrm>
+          <a:prstGeom prst="rect">
+            <a:avLst/>
+          </a:prstGeom>
+        </p:spPr>
+      </p:pic>
+      <p:sp>
+        <p:nvSpPr>
+          <p:cNvPr id="15" name="Shape 8"/>
+          <p:cNvSpPr/>
+          <p:nvPr/>
+        </p:nvSpPr>
+        <p:spPr>
+          <a:xfrm>
+            <a:off x="1865376" y="3063240"/>
+            <a:ext cx="1060704" cy="1060704"/>
+          </a:xfrm>
+          <a:prstGeom prst="rect">
+            <a:avLst/>
+          </a:prstGeom>
+          <a:solidFill>
+            <a:srgbClr val="FFFFFF">
+              <a:alpha val="0"/>
+            </a:srgbClr>
+          </a:solidFill>
+          <a:ln w="10160">
+            <a:solidFill>
+              <a:srgbClr val="C9CDD3"/>
+            </a:solidFill>
+            <a:prstDash val="solid"/>
+          </a:ln>
+        </p:spPr>
+      </p:sp>
+      <p:pic>
+        <p:nvPicPr>
+          <p:cNvPr id="16" name="Image 5" descr="C:\Dropbox\Apps\Overleaf\ACM Conference Proceedings Primary Article Template\figure\photolike_sample6.png">    </p:cNvPr>
+          <p:cNvPicPr>
+            <a:picLocks noChangeAspect="1"/>
+          </p:cNvPicPr>
+          <p:nvPr/>
+        </p:nvPicPr>
+        <p:blipFill>
+          <a:blip r:embed="rId6"/>
+          <a:stretch>
+            <a:fillRect/>
+          </a:stretch>
+        </p:blipFill>
+        <p:spPr>
+          <a:xfrm>
+            <a:off x="3108960" y="3063240"/>
+            <a:ext cx="1060704" cy="1060704"/>
+          </a:xfrm>
+          <a:prstGeom prst="rect">
+            <a:avLst/>
+          </a:prstGeom>
+        </p:spPr>
+      </p:pic>
+      <p:sp>
+        <p:nvSpPr>
+          <p:cNvPr id="17" name="Shape 9"/>
+          <p:cNvSpPr/>
+          <p:nvPr/>
+        </p:nvSpPr>
+        <p:spPr>
+          <a:xfrm>
+            <a:off x="3108960" y="3063240"/>
+            <a:ext cx="1060704" cy="1060704"/>
+          </a:xfrm>
+          <a:prstGeom prst="rect">
+            <a:avLst/>
+          </a:prstGeom>
+          <a:solidFill>
+            <a:srgbClr val="FFFFFF">
+              <a:alpha val="0"/>
+            </a:srgbClr>
+          </a:solidFill>
+          <a:ln w="10160">
+            <a:solidFill>
+              <a:srgbClr val="C9CDD3"/>
+            </a:solidFill>
+            <a:prstDash val="solid"/>
+          </a:ln>
+        </p:spPr>
+      </p:sp>
+      <p:sp>
+        <p:nvSpPr>
+          <p:cNvPr id="18" name="Text 10"/>
+          <p:cNvSpPr/>
+          <p:nvPr/>
+        </p:nvSpPr>
+        <p:spPr>
+          <a:xfrm>
+            <a:off x="4572000" y="1298448"/>
+            <a:ext cx="6967728" cy="256032"/>
+          </a:xfrm>
+          <a:prstGeom prst="rect">
+            <a:avLst/>
+          </a:prstGeom>
+          <a:noFill/>
+          <a:ln/>
+        </p:spPr>
+        <p:txBody>
+          <a:bodyPr wrap="square" lIns="0" tIns="0" rIns="0" bIns="0" rtlCol="0" anchor="ctr"/>
+          <a:lstStyle/>
+          <a:p>
+            <a:pPr indent="0" marL="0">
+              <a:buNone/>
+            </a:pPr>
+            <a:r>
+              <a:rPr lang="en-US" sz="1400" b="1" dirty="0">
+                <a:solidFill>
+                  <a:srgbClr val="111111"/>
+                </a:solidFill>
+              </a:rPr>
+              <a:t>Pixel-intensity entropy separates the domains</a:t>
+            </a:r>
+            <a:endParaRPr lang="en-US" sz="1400" dirty="0"/>
+          </a:p>
+        </p:txBody>
+      </p:sp>
+      <p:pic>
+        <p:nvPicPr>
+          <p:cNvPr id="19" name="Image 6" descr="C:\Dropbox\Apps\Overleaf\ACM Conference Proceedings Primary Article Template\figure\entropy_distribution.png">    </p:cNvPr>
+          <p:cNvPicPr>
+            <a:picLocks noChangeAspect="1"/>
+          </p:cNvPicPr>
+          <p:nvPr/>
+        </p:nvPicPr>
+        <p:blipFill>
+          <a:blip r:embed="rId7"/>
+          <a:stretch>
+            <a:fillRect/>
+          </a:stretch>
+        </p:blipFill>
+        <p:spPr>
+          <a:xfrm>
+            <a:off x="5102321" y="1627632"/>
+            <a:ext cx="5897942" cy="2798064"/>
+          </a:xfrm>
+          <a:prstGeom prst="rect">
+            <a:avLst/>
+          </a:prstGeom>
+        </p:spPr>
+      </p:pic>
+      <p:sp>
+        <p:nvSpPr>
+          <p:cNvPr id="20" name="Text 11"/>
+          <p:cNvSpPr/>
+          <p:nvPr/>
+        </p:nvSpPr>
+        <p:spPr>
+          <a:xfrm>
+            <a:off x="640080" y="4617720"/>
+            <a:ext cx="4572000" cy="438912"/>
           </a:xfrm>
           <a:prstGeom prst="rect">
             <a:avLst/>
@@ -4355,190 +5195,35 @@
           </a:bodyPr>
           <a:lstStyle/>
           <a:p>
-            <a:pPr algn="ctr" indent="0" marL="0">
-              <a:buNone/>
-            </a:pPr>
-            <a:r>
-              <a:rPr lang="en-US" sz="1700" b="1" dirty="0">
+            <a:pPr indent="0" marL="0">
+              <a:buNone/>
+            </a:pPr>
+            <a:r>
+              <a:rPr lang="en-US" sz="1500" dirty="0">
                 <a:solidFill>
                   <a:srgbClr val="111111"/>
                 </a:solidFill>
               </a:rPr>
-              <a:t>L2 embedding</a:t>
-            </a:r>
-            <a:endParaRPr lang="en-US" sz="1700" dirty="0"/>
-          </a:p>
-        </p:txBody>
-      </p:sp>
-      <p:sp>
-        <p:nvSpPr>
-          <p:cNvPr id="16" name="Text 14"/>
-          <p:cNvSpPr/>
-          <p:nvPr/>
-        </p:nvSpPr>
-        <p:spPr>
-          <a:xfrm>
-            <a:off x="5660136" y="2953512"/>
-            <a:ext cx="1709928" cy="502920"/>
-          </a:xfrm>
-          <a:prstGeom prst="rect">
-            <a:avLst/>
-          </a:prstGeom>
-          <a:noFill/>
-          <a:ln/>
-        </p:spPr>
-        <p:txBody>
-          <a:bodyPr wrap="square" lIns="0" tIns="0" rIns="0" bIns="0" rtlCol="0" anchor="ctr">
-            <a:normAutofit/>
-          </a:bodyPr>
-          <a:lstStyle/>
-          <a:p>
-            <a:pPr algn="ctr" indent="0" marL="0">
-              <a:buNone/>
-            </a:pPr>
-            <a:r>
-              <a:rPr lang="en-US" sz="1150" dirty="0">
-                <a:solidFill>
-                  <a:srgbClr val="5E6470"/>
-                </a:solidFill>
-              </a:rPr>
-              <a:t>64–256 dimensions</a:t>
-            </a:r>
-            <a:endParaRPr lang="en-US" sz="1150" dirty="0"/>
-          </a:p>
-        </p:txBody>
-      </p:sp>
-      <p:sp>
-        <p:nvSpPr>
-          <p:cNvPr id="17" name="Shape 15"/>
-          <p:cNvSpPr/>
-          <p:nvPr/>
-        </p:nvSpPr>
-        <p:spPr>
-          <a:xfrm>
-            <a:off x="8046720" y="2057400"/>
-            <a:ext cx="3474720" cy="1783080"/>
+              <a:t>Line drawings are sparse and low-entropy; photographs contain richer shading and texture.</a:t>
+            </a:r>
+            <a:endParaRPr lang="en-US" sz="1500" dirty="0"/>
+          </a:p>
+        </p:txBody>
+      </p:sp>
+      <p:sp>
+        <p:nvSpPr>
+          <p:cNvPr id="21" name="Shape 12"/>
+          <p:cNvSpPr/>
+          <p:nvPr/>
+        </p:nvSpPr>
+        <p:spPr>
+          <a:xfrm>
+            <a:off x="5468112" y="4590288"/>
+            <a:ext cx="1828800" cy="932688"/>
           </a:xfrm>
           <a:prstGeom prst="roundRect">
             <a:avLst>
-              <a:gd name="adj" fmla="val 4103"/>
-            </a:avLst>
-          </a:prstGeom>
-          <a:solidFill>
-            <a:srgbClr val="FFF1EB"/>
-          </a:solidFill>
-          <a:ln w="15240">
-            <a:solidFill>
-              <a:srgbClr val="FF6B35"/>
-            </a:solidFill>
-            <a:prstDash val="solid"/>
-          </a:ln>
-        </p:spPr>
-      </p:sp>
-      <p:sp>
-        <p:nvSpPr>
-          <p:cNvPr id="18" name="Text 16"/>
-          <p:cNvSpPr/>
-          <p:nvPr/>
-        </p:nvSpPr>
-        <p:spPr>
-          <a:xfrm>
-            <a:off x="8174736" y="2395728"/>
-            <a:ext cx="3218688" cy="320040"/>
-          </a:xfrm>
-          <a:prstGeom prst="rect">
-            <a:avLst/>
-          </a:prstGeom>
-          <a:noFill/>
-          <a:ln/>
-        </p:spPr>
-        <p:txBody>
-          <a:bodyPr wrap="square" lIns="0" tIns="0" rIns="0" bIns="0" rtlCol="0" anchor="ctr">
-            <a:normAutofit/>
-          </a:bodyPr>
-          <a:lstStyle/>
-          <a:p>
-            <a:pPr algn="ctr" indent="0" marL="0">
-              <a:buNone/>
-            </a:pPr>
-            <a:r>
-              <a:rPr lang="en-US" sz="1700" b="1" dirty="0">
-                <a:solidFill>
-                  <a:srgbClr val="111111"/>
-                </a:solidFill>
-              </a:rPr>
-              <a:t>ArcFace objective</a:t>
-            </a:r>
-            <a:endParaRPr lang="en-US" sz="1700" dirty="0"/>
-          </a:p>
-        </p:txBody>
-      </p:sp>
-      <p:sp>
-        <p:nvSpPr>
-          <p:cNvPr id="19" name="Text 17"/>
-          <p:cNvSpPr/>
-          <p:nvPr/>
-        </p:nvSpPr>
-        <p:spPr>
-          <a:xfrm>
-            <a:off x="8174736" y="2953512"/>
-            <a:ext cx="3218688" cy="502920"/>
-          </a:xfrm>
-          <a:prstGeom prst="rect">
-            <a:avLst/>
-          </a:prstGeom>
-          <a:noFill/>
-          <a:ln/>
-        </p:spPr>
-        <p:txBody>
-          <a:bodyPr wrap="square" lIns="0" tIns="0" rIns="0" bIns="0" rtlCol="0" anchor="ctr">
-            <a:normAutofit/>
-          </a:bodyPr>
-          <a:lstStyle/>
-          <a:p>
-            <a:pPr algn="ctr" indent="0" marL="0">
-              <a:buNone/>
-            </a:pPr>
-            <a:r>
-              <a:rPr lang="en-US" sz="1150" dirty="0">
-                <a:solidFill>
-                  <a:srgbClr val="5E6470"/>
-                </a:solidFill>
-              </a:rPr>
-              <a:t>pull same-patent views together</a:t>
-            </a:r>
-            <a:endParaRPr lang="en-US" sz="1150" dirty="0"/>
-          </a:p>
-          <a:p>
-            <a:pPr algn="ctr" indent="0" marL="0">
-              <a:buNone/>
-            </a:pPr>
-            <a:r>
-              <a:rPr lang="en-US" sz="1150" dirty="0">
-                <a:solidFill>
-                  <a:srgbClr val="5E6470"/>
-                </a:solidFill>
-              </a:rPr>
-              <a:t>push different patents apart</a:t>
-            </a:r>
-            <a:endParaRPr lang="en-US" sz="1150" dirty="0"/>
-          </a:p>
-        </p:txBody>
-      </p:sp>
-      <p:sp>
-        <p:nvSpPr>
-          <p:cNvPr id="20" name="Shape 18"/>
-          <p:cNvSpPr/>
-          <p:nvPr/>
-        </p:nvSpPr>
-        <p:spPr>
-          <a:xfrm>
-            <a:off x="1097280" y="4663440"/>
-            <a:ext cx="4800600" cy="960120"/>
-          </a:xfrm>
-          <a:prstGeom prst="roundRect">
-            <a:avLst>
-              <a:gd name="adj" fmla="val 4762"/>
+              <a:gd name="adj" fmla="val 4902"/>
             </a:avLst>
           </a:prstGeom>
           <a:solidFill>
@@ -4554,24 +5239,24 @@
       </p:sp>
       <p:sp>
         <p:nvSpPr>
-          <p:cNvPr id="21" name="Shape 19"/>
-          <p:cNvSpPr/>
-          <p:nvPr/>
-        </p:nvSpPr>
-        <p:spPr>
-          <a:xfrm>
-            <a:off x="1097280" y="4663440"/>
-            <a:ext cx="64008" cy="960120"/>
+          <p:cNvPr id="22" name="Shape 13"/>
+          <p:cNvSpPr/>
+          <p:nvPr/>
+        </p:nvSpPr>
+        <p:spPr>
+          <a:xfrm>
+            <a:off x="5468112" y="4590288"/>
+            <a:ext cx="64008" cy="932688"/>
           </a:xfrm>
           <a:prstGeom prst="rect">
             <a:avLst/>
           </a:prstGeom>
           <a:solidFill>
-            <a:srgbClr val="2166AC"/>
+            <a:srgbClr val="B23A48"/>
           </a:solidFill>
           <a:ln w="12700">
             <a:solidFill>
-              <a:srgbClr val="2166AC"/>
+              <a:srgbClr val="B23A48"/>
             </a:solidFill>
             <a:prstDash val="solid"/>
           </a:ln>
@@ -4579,14 +5264,14 @@
       </p:sp>
       <p:sp>
         <p:nvSpPr>
-          <p:cNvPr id="22" name="Text 20"/>
-          <p:cNvSpPr/>
-          <p:nvPr/>
-        </p:nvSpPr>
-        <p:spPr>
-          <a:xfrm>
-            <a:off x="1298448" y="4818888"/>
-            <a:ext cx="4471416" cy="274320"/>
+          <p:cNvPr id="23" name="Text 14"/>
+          <p:cNvSpPr/>
+          <p:nvPr/>
+        </p:nvSpPr>
+        <p:spPr>
+          <a:xfrm>
+            <a:off x="5669280" y="4745736"/>
+            <a:ext cx="1499616" cy="274320"/>
           </a:xfrm>
           <a:prstGeom prst="rect">
             <a:avLst/>
@@ -4609,7 +5294,7 @@
                   <a:srgbClr val="111111"/>
                 </a:solidFill>
               </a:rPr>
-              <a:t>Training</a:t>
+              <a:t>Threshold</a:t>
             </a:r>
             <a:endParaRPr lang="en-US" sz="1400" dirty="0"/>
           </a:p>
@@ -4617,14 +5302,14 @@
       </p:sp>
       <p:sp>
         <p:nvSpPr>
-          <p:cNvPr id="23" name="Text 21"/>
-          <p:cNvSpPr/>
-          <p:nvPr/>
-        </p:nvSpPr>
-        <p:spPr>
-          <a:xfrm>
-            <a:off x="1298448" y="5193792"/>
-            <a:ext cx="4471416" cy="301752"/>
+          <p:cNvPr id="24" name="Text 15"/>
+          <p:cNvSpPr/>
+          <p:nvPr/>
+        </p:nvSpPr>
+        <p:spPr>
+          <a:xfrm>
+            <a:off x="5669280" y="5120640"/>
+            <a:ext cx="1499616" cy="274320"/>
           </a:xfrm>
           <a:prstGeom prst="rect">
             <a:avLst/>
@@ -4647,26 +5332,40 @@
                   <a:srgbClr val="5E6470"/>
                 </a:solidFill>
               </a:rPr>
-              <a:t>Scale 30 · angular margin 0.50 · 30 epochs · effective batch ≈512</a:t>
+              <a:t>τ = 0.724</a:t>
             </a:r>
             <a:endParaRPr lang="en-US" sz="1150" dirty="0"/>
           </a:p>
-        </p:txBody>
-      </p:sp>
-      <p:sp>
-        <p:nvSpPr>
-          <p:cNvPr id="24" name="Shape 22"/>
-          <p:cNvSpPr/>
-          <p:nvPr/>
-        </p:nvSpPr>
-        <p:spPr>
-          <a:xfrm>
-            <a:off x="6309360" y="4663440"/>
-            <a:ext cx="4800600" cy="960120"/>
+          <a:p>
+            <a:pPr indent="0" marL="0">
+              <a:buNone/>
+            </a:pPr>
+            <a:r>
+              <a:rPr lang="en-US" sz="1150" dirty="0">
+                <a:solidFill>
+                  <a:srgbClr val="5E6470"/>
+                </a:solidFill>
+              </a:rPr>
+              <a:t>99% target recall</a:t>
+            </a:r>
+            <a:endParaRPr lang="en-US" sz="1150" dirty="0"/>
+          </a:p>
+        </p:txBody>
+      </p:sp>
+      <p:sp>
+        <p:nvSpPr>
+          <p:cNvPr id="25" name="Shape 16"/>
+          <p:cNvSpPr/>
+          <p:nvPr/>
+        </p:nvSpPr>
+        <p:spPr>
+          <a:xfrm>
+            <a:off x="7498080" y="4590288"/>
+            <a:ext cx="1828800" cy="932688"/>
           </a:xfrm>
           <a:prstGeom prst="roundRect">
             <a:avLst>
-              <a:gd name="adj" fmla="val 4762"/>
+              <a:gd name="adj" fmla="val 4902"/>
             </a:avLst>
           </a:prstGeom>
           <a:solidFill>
@@ -4682,14 +5381,156 @@
       </p:sp>
       <p:sp>
         <p:nvSpPr>
-          <p:cNvPr id="25" name="Shape 23"/>
-          <p:cNvSpPr/>
-          <p:nvPr/>
-        </p:nvSpPr>
-        <p:spPr>
-          <a:xfrm>
-            <a:off x="6309360" y="4663440"/>
-            <a:ext cx="64008" cy="960120"/>
+          <p:cNvPr id="26" name="Shape 17"/>
+          <p:cNvSpPr/>
+          <p:nvPr/>
+        </p:nvSpPr>
+        <p:spPr>
+          <a:xfrm>
+            <a:off x="7498080" y="4590288"/>
+            <a:ext cx="64008" cy="932688"/>
+          </a:xfrm>
+          <a:prstGeom prst="rect">
+            <a:avLst/>
+          </a:prstGeom>
+          <a:solidFill>
+            <a:srgbClr val="FF6B35"/>
+          </a:solidFill>
+          <a:ln w="12700">
+            <a:solidFill>
+              <a:srgbClr val="FF6B35"/>
+            </a:solidFill>
+            <a:prstDash val="solid"/>
+          </a:ln>
+        </p:spPr>
+      </p:sp>
+      <p:sp>
+        <p:nvSpPr>
+          <p:cNvPr id="27" name="Text 18"/>
+          <p:cNvSpPr/>
+          <p:nvPr/>
+        </p:nvSpPr>
+        <p:spPr>
+          <a:xfrm>
+            <a:off x="7699248" y="4745736"/>
+            <a:ext cx="1499616" cy="274320"/>
+          </a:xfrm>
+          <a:prstGeom prst="rect">
+            <a:avLst/>
+          </a:prstGeom>
+          <a:noFill/>
+          <a:ln/>
+        </p:spPr>
+        <p:txBody>
+          <a:bodyPr wrap="square" lIns="0" tIns="0" rIns="0" bIns="0" rtlCol="0" anchor="ctr">
+            <a:normAutofit/>
+          </a:bodyPr>
+          <a:lstStyle/>
+          <a:p>
+            <a:pPr indent="0" marL="0">
+              <a:buNone/>
+            </a:pPr>
+            <a:r>
+              <a:rPr lang="en-US" sz="1400" b="1" dirty="0">
+                <a:solidFill>
+                  <a:srgbClr val="111111"/>
+                </a:solidFill>
+              </a:rPr>
+              <a:t>Flagged</a:t>
+            </a:r>
+            <a:endParaRPr lang="en-US" sz="1400" dirty="0"/>
+          </a:p>
+        </p:txBody>
+      </p:sp>
+      <p:sp>
+        <p:nvSpPr>
+          <p:cNvPr id="28" name="Text 19"/>
+          <p:cNvSpPr/>
+          <p:nvPr/>
+        </p:nvSpPr>
+        <p:spPr>
+          <a:xfrm>
+            <a:off x="7699248" y="5120640"/>
+            <a:ext cx="1499616" cy="274320"/>
+          </a:xfrm>
+          <a:prstGeom prst="rect">
+            <a:avLst/>
+          </a:prstGeom>
+          <a:noFill/>
+          <a:ln/>
+        </p:spPr>
+        <p:txBody>
+          <a:bodyPr wrap="square" lIns="254" tIns="254" rIns="254" bIns="254" rtlCol="0" anchor="t">
+            <a:normAutofit/>
+          </a:bodyPr>
+          <a:lstStyle/>
+          <a:p>
+            <a:pPr indent="0" marL="0">
+              <a:buNone/>
+            </a:pPr>
+            <a:r>
+              <a:rPr lang="en-US" sz="1150" dirty="0">
+                <a:solidFill>
+                  <a:srgbClr val="5E6470"/>
+                </a:solidFill>
+              </a:rPr>
+              <a:t>28,717</a:t>
+            </a:r>
+            <a:endParaRPr lang="en-US" sz="1150" dirty="0"/>
+          </a:p>
+          <a:p>
+            <a:pPr indent="0" marL="0">
+              <a:buNone/>
+            </a:pPr>
+            <a:r>
+              <a:rPr lang="en-US" sz="1150" dirty="0">
+                <a:solidFill>
+                  <a:srgbClr val="5E6470"/>
+                </a:solidFill>
+              </a:rPr>
+              <a:t>candidates</a:t>
+            </a:r>
+            <a:endParaRPr lang="en-US" sz="1150" dirty="0"/>
+          </a:p>
+        </p:txBody>
+      </p:sp>
+      <p:sp>
+        <p:nvSpPr>
+          <p:cNvPr id="29" name="Shape 20"/>
+          <p:cNvSpPr/>
+          <p:nvPr/>
+        </p:nvSpPr>
+        <p:spPr>
+          <a:xfrm>
+            <a:off x="9528048" y="4590288"/>
+            <a:ext cx="1828800" cy="932688"/>
+          </a:xfrm>
+          <a:prstGeom prst="roundRect">
+            <a:avLst>
+              <a:gd name="adj" fmla="val 4902"/>
+            </a:avLst>
+          </a:prstGeom>
+          <a:solidFill>
+            <a:srgbClr val="FFFFFF"/>
+          </a:solidFill>
+          <a:ln w="12700">
+            <a:solidFill>
+              <a:srgbClr val="C9CDD3"/>
+            </a:solidFill>
+            <a:prstDash val="solid"/>
+          </a:ln>
+        </p:spPr>
+      </p:sp>
+      <p:sp>
+        <p:nvSpPr>
+          <p:cNvPr id="30" name="Shape 21"/>
+          <p:cNvSpPr/>
+          <p:nvPr/>
+        </p:nvSpPr>
+        <p:spPr>
+          <a:xfrm>
+            <a:off x="9528048" y="4590288"/>
+            <a:ext cx="64008" cy="932688"/>
           </a:xfrm>
           <a:prstGeom prst="rect">
             <a:avLst/>
@@ -4707,14 +5548,14 @@
       </p:sp>
       <p:sp>
         <p:nvSpPr>
-          <p:cNvPr id="26" name="Text 24"/>
-          <p:cNvSpPr/>
-          <p:nvPr/>
-        </p:nvSpPr>
-        <p:spPr>
-          <a:xfrm>
-            <a:off x="6510528" y="4818888"/>
-            <a:ext cx="4471416" cy="274320"/>
+          <p:cNvPr id="31" name="Text 22"/>
+          <p:cNvSpPr/>
+          <p:nvPr/>
+        </p:nvSpPr>
+        <p:spPr>
+          <a:xfrm>
+            <a:off x="9729216" y="4745736"/>
+            <a:ext cx="1499616" cy="274320"/>
           </a:xfrm>
           <a:prstGeom prst="rect">
             <a:avLst/>
@@ -4737,7 +5578,7 @@
                   <a:srgbClr val="111111"/>
                 </a:solidFill>
               </a:rPr>
-              <a:t>Retrieval</a:t>
+              <a:t>Excluded</a:t>
             </a:r>
             <a:endParaRPr lang="en-US" sz="1400" dirty="0"/>
           </a:p>
@@ -4745,14 +5586,14 @@
       </p:sp>
       <p:sp>
         <p:nvSpPr>
-          <p:cNvPr id="27" name="Text 25"/>
-          <p:cNvSpPr/>
-          <p:nvPr/>
-        </p:nvSpPr>
-        <p:spPr>
-          <a:xfrm>
-            <a:off x="6510528" y="5193792"/>
-            <a:ext cx="4471416" cy="301752"/>
+          <p:cNvPr id="32" name="Text 23"/>
+          <p:cNvSpPr/>
+          <p:nvPr/>
+        </p:nvSpPr>
+        <p:spPr>
+          <a:xfrm>
+            <a:off x="9729216" y="5120640"/>
+            <a:ext cx="1499616" cy="274320"/>
           </a:xfrm>
           <a:prstGeom prst="rect">
             <a:avLst/>
@@ -4775,15 +5616,29 @@
                   <a:srgbClr val="5E6470"/>
                 </a:solidFill>
               </a:rPr>
-              <a:t>Cosine search, then optional query expansion or graph diffusion</a:t>
+              <a:t>25,448</a:t>
             </a:r>
             <a:endParaRPr lang="en-US" sz="1150" dirty="0"/>
           </a:p>
-        </p:txBody>
-      </p:sp>
-      <p:sp>
-        <p:nvSpPr>
-          <p:cNvPr id="28" name="Text 26"/>
+          <a:p>
+            <a:pPr indent="0" marL="0">
+              <a:buNone/>
+            </a:pPr>
+            <a:r>
+              <a:rPr lang="en-US" sz="1150" dirty="0">
+                <a:solidFill>
+                  <a:srgbClr val="5E6470"/>
+                </a:solidFill>
+              </a:rPr>
+              <a:t>verified patents</a:t>
+            </a:r>
+            <a:endParaRPr lang="en-US" sz="1150" dirty="0"/>
+          </a:p>
+        </p:txBody>
+      </p:sp>
+      <p:sp>
+        <p:nvSpPr>
+          <p:cNvPr id="33" name="Text 24"/>
           <p:cNvSpPr/>
           <p:nvPr/>
         </p:nvSpPr>
@@ -4816,7 +5671,7 @@
                 <a:ea typeface="Arial" pitchFamily="34" charset="-122"/>
                 <a:cs typeface="Arial" pitchFamily="34" charset="-120"/>
               </a:rPr>
-              <a:t>Model architecture and training protocol from the paper</a:t>
+              <a:t>Entropy filter calibrated on 2,504 labeled photographs and 25,000 line-drawing patents</a:t>
             </a:r>
             <a:endParaRPr lang="en-US" sz="750" dirty="0"/>
           </a:p>
@@ -4928,7 +5783,7 @@
                 <a:ea typeface="Arial" pitchFamily="34" charset="-122"/>
                 <a:cs typeface="Arial" pitchFamily="34" charset="-120"/>
               </a:rPr>
-              <a:t>MODEL SELECTION</a:t>
+              <a:t>METHOD</a:t>
             </a:r>
             <a:endParaRPr lang="en-US" sz="900" dirty="0"/>
           </a:p>
@@ -4969,7 +5824,7 @@
                 <a:ea typeface="Arial" pitchFamily="34" charset="-122"/>
                 <a:cs typeface="Arial" pitchFamily="34" charset="-120"/>
               </a:rPr>
-              <a:t>Resolution and backbone capacity both matter</a:t>
+              <a:t>Patent IDs become the metric-learning signal</a:t>
             </a:r>
             <a:endParaRPr lang="en-US" sz="2800" dirty="0"/>
           </a:p>
@@ -5024,16 +5879,18 @@
         </p:nvSpPr>
         <p:spPr>
           <a:xfrm>
-            <a:off x="777240" y="5623560"/>
-            <a:ext cx="10241280" cy="0"/>
-          </a:xfrm>
-          <a:prstGeom prst="line">
-            <a:avLst/>
-          </a:prstGeom>
-          <a:noFill/>
+            <a:off x="2542032" y="2788920"/>
+            <a:ext cx="256032" cy="310896"/>
+          </a:xfrm>
+          <a:prstGeom prst="chevron">
+            <a:avLst/>
+          </a:prstGeom>
+          <a:solidFill>
+            <a:srgbClr val="5E6470"/>
+          </a:solidFill>
           <a:ln w="12700">
             <a:solidFill>
-              <a:srgbClr val="111111"/>
+              <a:srgbClr val="5E6470"/>
             </a:solidFill>
             <a:prstDash val="solid"/>
           </a:ln>
@@ -5047,14 +5904,68 @@
         </p:nvSpPr>
         <p:spPr>
           <a:xfrm>
-            <a:off x="777240" y="5623560"/>
-            <a:ext cx="10241280" cy="0"/>
-          </a:xfrm>
-          <a:prstGeom prst="line">
-            <a:avLst/>
-          </a:prstGeom>
-          <a:noFill/>
-          <a:ln w="6350">
+            <a:off x="5148072" y="2788920"/>
+            <a:ext cx="256032" cy="310896"/>
+          </a:xfrm>
+          <a:prstGeom prst="chevron">
+            <a:avLst/>
+          </a:prstGeom>
+          <a:solidFill>
+            <a:srgbClr val="5E6470"/>
+          </a:solidFill>
+          <a:ln w="12700">
+            <a:solidFill>
+              <a:srgbClr val="5E6470"/>
+            </a:solidFill>
+            <a:prstDash val="solid"/>
+          </a:ln>
+        </p:spPr>
+      </p:sp>
+      <p:sp>
+        <p:nvSpPr>
+          <p:cNvPr id="7" name="Shape 5"/>
+          <p:cNvSpPr/>
+          <p:nvPr/>
+        </p:nvSpPr>
+        <p:spPr>
+          <a:xfrm>
+            <a:off x="7662672" y="2788920"/>
+            <a:ext cx="256032" cy="310896"/>
+          </a:xfrm>
+          <a:prstGeom prst="chevron">
+            <a:avLst/>
+          </a:prstGeom>
+          <a:solidFill>
+            <a:srgbClr val="5E6470"/>
+          </a:solidFill>
+          <a:ln w="12700">
+            <a:solidFill>
+              <a:srgbClr val="5E6470"/>
+            </a:solidFill>
+            <a:prstDash val="solid"/>
+          </a:ln>
+        </p:spPr>
+      </p:sp>
+      <p:sp>
+        <p:nvSpPr>
+          <p:cNvPr id="8" name="Shape 6"/>
+          <p:cNvSpPr/>
+          <p:nvPr/>
+        </p:nvSpPr>
+        <p:spPr>
+          <a:xfrm>
+            <a:off x="594360" y="2057400"/>
+            <a:ext cx="1874520" cy="1783080"/>
+          </a:xfrm>
+          <a:prstGeom prst="roundRect">
+            <a:avLst>
+              <a:gd name="adj" fmla="val 4103"/>
+            </a:avLst>
+          </a:prstGeom>
+          <a:solidFill>
+            <a:srgbClr val="F2F3F5"/>
+          </a:solidFill>
+          <a:ln w="15240">
             <a:solidFill>
               <a:srgbClr val="C9CDD3"/>
             </a:solidFill>
@@ -5064,56 +5975,100 @@
       </p:sp>
       <p:sp>
         <p:nvSpPr>
-          <p:cNvPr id="7" name="Text 5"/>
-          <p:cNvSpPr/>
-          <p:nvPr/>
-        </p:nvSpPr>
-        <p:spPr>
-          <a:xfrm>
-            <a:off x="320040" y="5532120"/>
-            <a:ext cx="365760" cy="182880"/>
-          </a:xfrm>
-          <a:prstGeom prst="rect">
-            <a:avLst/>
-          </a:prstGeom>
-          <a:noFill/>
-          <a:ln/>
-        </p:spPr>
-        <p:txBody>
-          <a:bodyPr wrap="square" lIns="0" tIns="0" rIns="0" bIns="0" rtlCol="0" anchor="ctr"/>
-          <a:lstStyle/>
-          <a:p>
-            <a:pPr algn="r" indent="0" marL="0">
-              <a:buNone/>
-            </a:pPr>
-            <a:r>
-              <a:rPr lang="en-US" sz="900" dirty="0">
+          <p:cNvPr id="9" name="Text 7"/>
+          <p:cNvSpPr/>
+          <p:nvPr/>
+        </p:nvSpPr>
+        <p:spPr>
+          <a:xfrm>
+            <a:off x="722376" y="2395728"/>
+            <a:ext cx="1618488" cy="320040"/>
+          </a:xfrm>
+          <a:prstGeom prst="rect">
+            <a:avLst/>
+          </a:prstGeom>
+          <a:noFill/>
+          <a:ln/>
+        </p:spPr>
+        <p:txBody>
+          <a:bodyPr wrap="square" lIns="0" tIns="0" rIns="0" bIns="0" rtlCol="0" anchor="ctr">
+            <a:normAutofit/>
+          </a:bodyPr>
+          <a:lstStyle/>
+          <a:p>
+            <a:pPr algn="ctr" indent="0" marL="0">
+              <a:buNone/>
+            </a:pPr>
+            <a:r>
+              <a:rPr lang="en-US" sz="1700" b="1" dirty="0">
+                <a:solidFill>
+                  <a:srgbClr val="111111"/>
+                </a:solidFill>
+              </a:rPr>
+              <a:t>Patent drawing</a:t>
+            </a:r>
+            <a:endParaRPr lang="en-US" sz="1700" dirty="0"/>
+          </a:p>
+        </p:txBody>
+      </p:sp>
+      <p:sp>
+        <p:nvSpPr>
+          <p:cNvPr id="10" name="Text 8"/>
+          <p:cNvSpPr/>
+          <p:nvPr/>
+        </p:nvSpPr>
+        <p:spPr>
+          <a:xfrm>
+            <a:off x="722376" y="2953512"/>
+            <a:ext cx="1618488" cy="502920"/>
+          </a:xfrm>
+          <a:prstGeom prst="rect">
+            <a:avLst/>
+          </a:prstGeom>
+          <a:noFill/>
+          <a:ln/>
+        </p:spPr>
+        <p:txBody>
+          <a:bodyPr wrap="square" lIns="0" tIns="0" rIns="0" bIns="0" rtlCol="0" anchor="ctr">
+            <a:normAutofit/>
+          </a:bodyPr>
+          <a:lstStyle/>
+          <a:p>
+            <a:pPr algn="ctr" indent="0" marL="0">
+              <a:buNone/>
+            </a:pPr>
+            <a:r>
+              <a:rPr lang="en-US" sz="1150" dirty="0">
                 <a:solidFill>
                   <a:srgbClr val="5E6470"/>
                 </a:solidFill>
               </a:rPr>
-              <a:t>0.0</a:t>
-            </a:r>
-            <a:endParaRPr lang="en-US" sz="900" dirty="0"/>
-          </a:p>
-        </p:txBody>
-      </p:sp>
-      <p:sp>
-        <p:nvSpPr>
-          <p:cNvPr id="8" name="Shape 6"/>
-          <p:cNvSpPr/>
-          <p:nvPr/>
-        </p:nvSpPr>
-        <p:spPr>
-          <a:xfrm>
-            <a:off x="777240" y="4759960"/>
-            <a:ext cx="10241280" cy="0"/>
-          </a:xfrm>
-          <a:prstGeom prst="line">
-            <a:avLst/>
-          </a:prstGeom>
-          <a:noFill/>
-          <a:ln w="6350">
+              <a:t>multiple views</a:t>
+            </a:r>
+            <a:endParaRPr lang="en-US" sz="1150" dirty="0"/>
+          </a:p>
+        </p:txBody>
+      </p:sp>
+      <p:sp>
+        <p:nvSpPr>
+          <p:cNvPr id="11" name="Shape 9"/>
+          <p:cNvSpPr/>
+          <p:nvPr/>
+        </p:nvSpPr>
+        <p:spPr>
+          <a:xfrm>
+            <a:off x="2926080" y="2057400"/>
+            <a:ext cx="2057400" cy="1783080"/>
+          </a:xfrm>
+          <a:prstGeom prst="roundRect">
+            <a:avLst>
+              <a:gd name="adj" fmla="val 4103"/>
+            </a:avLst>
+          </a:prstGeom>
+          <a:solidFill>
+            <a:srgbClr val="F2F3F5"/>
+          </a:solidFill>
+          <a:ln w="15240">
             <a:solidFill>
               <a:srgbClr val="C9CDD3"/>
             </a:solidFill>
@@ -5123,56 +6078,100 @@
       </p:sp>
       <p:sp>
         <p:nvSpPr>
-          <p:cNvPr id="9" name="Text 7"/>
-          <p:cNvSpPr/>
-          <p:nvPr/>
-        </p:nvSpPr>
-        <p:spPr>
-          <a:xfrm>
-            <a:off x="320040" y="4668520"/>
-            <a:ext cx="365760" cy="182880"/>
-          </a:xfrm>
-          <a:prstGeom prst="rect">
-            <a:avLst/>
-          </a:prstGeom>
-          <a:noFill/>
-          <a:ln/>
-        </p:spPr>
-        <p:txBody>
-          <a:bodyPr wrap="square" lIns="0" tIns="0" rIns="0" bIns="0" rtlCol="0" anchor="ctr"/>
-          <a:lstStyle/>
-          <a:p>
-            <a:pPr algn="r" indent="0" marL="0">
-              <a:buNone/>
-            </a:pPr>
-            <a:r>
-              <a:rPr lang="en-US" sz="900" dirty="0">
+          <p:cNvPr id="12" name="Text 10"/>
+          <p:cNvSpPr/>
+          <p:nvPr/>
+        </p:nvSpPr>
+        <p:spPr>
+          <a:xfrm>
+            <a:off x="3054096" y="2395728"/>
+            <a:ext cx="1801368" cy="320040"/>
+          </a:xfrm>
+          <a:prstGeom prst="rect">
+            <a:avLst/>
+          </a:prstGeom>
+          <a:noFill/>
+          <a:ln/>
+        </p:spPr>
+        <p:txBody>
+          <a:bodyPr wrap="square" lIns="0" tIns="0" rIns="0" bIns="0" rtlCol="0" anchor="ctr">
+            <a:normAutofit/>
+          </a:bodyPr>
+          <a:lstStyle/>
+          <a:p>
+            <a:pPr algn="ctr" indent="0" marL="0">
+              <a:buNone/>
+            </a:pPr>
+            <a:r>
+              <a:rPr lang="en-US" sz="1700" b="1" dirty="0">
+                <a:solidFill>
+                  <a:srgbClr val="111111"/>
+                </a:solidFill>
+              </a:rPr>
+              <a:t>ConvNeXtV2</a:t>
+            </a:r>
+            <a:endParaRPr lang="en-US" sz="1700" dirty="0"/>
+          </a:p>
+        </p:txBody>
+      </p:sp>
+      <p:sp>
+        <p:nvSpPr>
+          <p:cNvPr id="13" name="Text 11"/>
+          <p:cNvSpPr/>
+          <p:nvPr/>
+        </p:nvSpPr>
+        <p:spPr>
+          <a:xfrm>
+            <a:off x="3054096" y="2953512"/>
+            <a:ext cx="1801368" cy="502920"/>
+          </a:xfrm>
+          <a:prstGeom prst="rect">
+            <a:avLst/>
+          </a:prstGeom>
+          <a:noFill/>
+          <a:ln/>
+        </p:spPr>
+        <p:txBody>
+          <a:bodyPr wrap="square" lIns="0" tIns="0" rIns="0" bIns="0" rtlCol="0" anchor="ctr">
+            <a:normAutofit/>
+          </a:bodyPr>
+          <a:lstStyle/>
+          <a:p>
+            <a:pPr algn="ctr" indent="0" marL="0">
+              <a:buNone/>
+            </a:pPr>
+            <a:r>
+              <a:rPr lang="en-US" sz="1150" dirty="0">
                 <a:solidFill>
                   <a:srgbClr val="5E6470"/>
                 </a:solidFill>
               </a:rPr>
-              <a:t>0.2</a:t>
-            </a:r>
-            <a:endParaRPr lang="en-US" sz="900" dirty="0"/>
-          </a:p>
-        </p:txBody>
-      </p:sp>
-      <p:sp>
-        <p:nvSpPr>
-          <p:cNvPr id="10" name="Shape 8"/>
-          <p:cNvSpPr/>
-          <p:nvPr/>
-        </p:nvSpPr>
-        <p:spPr>
-          <a:xfrm>
-            <a:off x="777240" y="3896360"/>
-            <a:ext cx="10241280" cy="0"/>
-          </a:xfrm>
-          <a:prstGeom prst="line">
-            <a:avLst/>
-          </a:prstGeom>
-          <a:noFill/>
-          <a:ln w="6350">
+              <a:t>visual backbone</a:t>
+            </a:r>
+            <a:endParaRPr lang="en-US" sz="1150" dirty="0"/>
+          </a:p>
+        </p:txBody>
+      </p:sp>
+      <p:sp>
+        <p:nvSpPr>
+          <p:cNvPr id="14" name="Shape 12"/>
+          <p:cNvSpPr/>
+          <p:nvPr/>
+        </p:nvSpPr>
+        <p:spPr>
+          <a:xfrm>
+            <a:off x="5532120" y="2057400"/>
+            <a:ext cx="1965960" cy="1783080"/>
+          </a:xfrm>
+          <a:prstGeom prst="roundRect">
+            <a:avLst>
+              <a:gd name="adj" fmla="val 4103"/>
+            </a:avLst>
+          </a:prstGeom>
+          <a:solidFill>
+            <a:srgbClr val="F2F3F5"/>
+          </a:solidFill>
+          <a:ln w="15240">
             <a:solidFill>
               <a:srgbClr val="C9CDD3"/>
             </a:solidFill>
@@ -5182,56 +6181,217 @@
       </p:sp>
       <p:sp>
         <p:nvSpPr>
-          <p:cNvPr id="11" name="Text 9"/>
-          <p:cNvSpPr/>
-          <p:nvPr/>
-        </p:nvSpPr>
-        <p:spPr>
-          <a:xfrm>
-            <a:off x="320040" y="3804920"/>
-            <a:ext cx="365760" cy="182880"/>
-          </a:xfrm>
-          <a:prstGeom prst="rect">
-            <a:avLst/>
-          </a:prstGeom>
-          <a:noFill/>
-          <a:ln/>
-        </p:spPr>
-        <p:txBody>
-          <a:bodyPr wrap="square" lIns="0" tIns="0" rIns="0" bIns="0" rtlCol="0" anchor="ctr"/>
-          <a:lstStyle/>
-          <a:p>
-            <a:pPr algn="r" indent="0" marL="0">
-              <a:buNone/>
-            </a:pPr>
-            <a:r>
-              <a:rPr lang="en-US" sz="900" dirty="0">
+          <p:cNvPr id="15" name="Text 13"/>
+          <p:cNvSpPr/>
+          <p:nvPr/>
+        </p:nvSpPr>
+        <p:spPr>
+          <a:xfrm>
+            <a:off x="5660136" y="2395728"/>
+            <a:ext cx="1709928" cy="320040"/>
+          </a:xfrm>
+          <a:prstGeom prst="rect">
+            <a:avLst/>
+          </a:prstGeom>
+          <a:noFill/>
+          <a:ln/>
+        </p:spPr>
+        <p:txBody>
+          <a:bodyPr wrap="square" lIns="0" tIns="0" rIns="0" bIns="0" rtlCol="0" anchor="ctr">
+            <a:normAutofit/>
+          </a:bodyPr>
+          <a:lstStyle/>
+          <a:p>
+            <a:pPr algn="ctr" indent="0" marL="0">
+              <a:buNone/>
+            </a:pPr>
+            <a:r>
+              <a:rPr lang="en-US" sz="1700" b="1" dirty="0">
+                <a:solidFill>
+                  <a:srgbClr val="111111"/>
+                </a:solidFill>
+              </a:rPr>
+              <a:t>L2 embedding</a:t>
+            </a:r>
+            <a:endParaRPr lang="en-US" sz="1700" dirty="0"/>
+          </a:p>
+        </p:txBody>
+      </p:sp>
+      <p:sp>
+        <p:nvSpPr>
+          <p:cNvPr id="16" name="Text 14"/>
+          <p:cNvSpPr/>
+          <p:nvPr/>
+        </p:nvSpPr>
+        <p:spPr>
+          <a:xfrm>
+            <a:off x="5660136" y="2953512"/>
+            <a:ext cx="1709928" cy="502920"/>
+          </a:xfrm>
+          <a:prstGeom prst="rect">
+            <a:avLst/>
+          </a:prstGeom>
+          <a:noFill/>
+          <a:ln/>
+        </p:spPr>
+        <p:txBody>
+          <a:bodyPr wrap="square" lIns="0" tIns="0" rIns="0" bIns="0" rtlCol="0" anchor="ctr">
+            <a:normAutofit/>
+          </a:bodyPr>
+          <a:lstStyle/>
+          <a:p>
+            <a:pPr algn="ctr" indent="0" marL="0">
+              <a:buNone/>
+            </a:pPr>
+            <a:r>
+              <a:rPr lang="en-US" sz="1150" dirty="0">
                 <a:solidFill>
                   <a:srgbClr val="5E6470"/>
                 </a:solidFill>
               </a:rPr>
-              <a:t>0.4</a:t>
-            </a:r>
-            <a:endParaRPr lang="en-US" sz="900" dirty="0"/>
-          </a:p>
-        </p:txBody>
-      </p:sp>
-      <p:sp>
-        <p:nvSpPr>
-          <p:cNvPr id="12" name="Shape 10"/>
-          <p:cNvSpPr/>
-          <p:nvPr/>
-        </p:nvSpPr>
-        <p:spPr>
-          <a:xfrm>
-            <a:off x="777240" y="3032760"/>
-            <a:ext cx="10241280" cy="0"/>
-          </a:xfrm>
-          <a:prstGeom prst="line">
-            <a:avLst/>
-          </a:prstGeom>
-          <a:noFill/>
-          <a:ln w="6350">
+              <a:t>64–256 dimensions</a:t>
+            </a:r>
+            <a:endParaRPr lang="en-US" sz="1150" dirty="0"/>
+          </a:p>
+        </p:txBody>
+      </p:sp>
+      <p:sp>
+        <p:nvSpPr>
+          <p:cNvPr id="17" name="Shape 15"/>
+          <p:cNvSpPr/>
+          <p:nvPr/>
+        </p:nvSpPr>
+        <p:spPr>
+          <a:xfrm>
+            <a:off x="8046720" y="2057400"/>
+            <a:ext cx="3474720" cy="1783080"/>
+          </a:xfrm>
+          <a:prstGeom prst="roundRect">
+            <a:avLst>
+              <a:gd name="adj" fmla="val 4103"/>
+            </a:avLst>
+          </a:prstGeom>
+          <a:solidFill>
+            <a:srgbClr val="FFF1EB"/>
+          </a:solidFill>
+          <a:ln w="15240">
+            <a:solidFill>
+              <a:srgbClr val="FF6B35"/>
+            </a:solidFill>
+            <a:prstDash val="solid"/>
+          </a:ln>
+        </p:spPr>
+      </p:sp>
+      <p:sp>
+        <p:nvSpPr>
+          <p:cNvPr id="18" name="Text 16"/>
+          <p:cNvSpPr/>
+          <p:nvPr/>
+        </p:nvSpPr>
+        <p:spPr>
+          <a:xfrm>
+            <a:off x="8174736" y="2395728"/>
+            <a:ext cx="3218688" cy="320040"/>
+          </a:xfrm>
+          <a:prstGeom prst="rect">
+            <a:avLst/>
+          </a:prstGeom>
+          <a:noFill/>
+          <a:ln/>
+        </p:spPr>
+        <p:txBody>
+          <a:bodyPr wrap="square" lIns="0" tIns="0" rIns="0" bIns="0" rtlCol="0" anchor="ctr">
+            <a:normAutofit/>
+          </a:bodyPr>
+          <a:lstStyle/>
+          <a:p>
+            <a:pPr algn="ctr" indent="0" marL="0">
+              <a:buNone/>
+            </a:pPr>
+            <a:r>
+              <a:rPr lang="en-US" sz="1700" b="1" dirty="0">
+                <a:solidFill>
+                  <a:srgbClr val="111111"/>
+                </a:solidFill>
+              </a:rPr>
+              <a:t>ArcFace objective</a:t>
+            </a:r>
+            <a:endParaRPr lang="en-US" sz="1700" dirty="0"/>
+          </a:p>
+        </p:txBody>
+      </p:sp>
+      <p:sp>
+        <p:nvSpPr>
+          <p:cNvPr id="19" name="Text 17"/>
+          <p:cNvSpPr/>
+          <p:nvPr/>
+        </p:nvSpPr>
+        <p:spPr>
+          <a:xfrm>
+            <a:off x="8174736" y="2953512"/>
+            <a:ext cx="3218688" cy="502920"/>
+          </a:xfrm>
+          <a:prstGeom prst="rect">
+            <a:avLst/>
+          </a:prstGeom>
+          <a:noFill/>
+          <a:ln/>
+        </p:spPr>
+        <p:txBody>
+          <a:bodyPr wrap="square" lIns="0" tIns="0" rIns="0" bIns="0" rtlCol="0" anchor="ctr">
+            <a:normAutofit/>
+          </a:bodyPr>
+          <a:lstStyle/>
+          <a:p>
+            <a:pPr algn="ctr" indent="0" marL="0">
+              <a:buNone/>
+            </a:pPr>
+            <a:r>
+              <a:rPr lang="en-US" sz="1150" dirty="0">
+                <a:solidFill>
+                  <a:srgbClr val="5E6470"/>
+                </a:solidFill>
+              </a:rPr>
+              <a:t>pull same-patent views together</a:t>
+            </a:r>
+            <a:endParaRPr lang="en-US" sz="1150" dirty="0"/>
+          </a:p>
+          <a:p>
+            <a:pPr algn="ctr" indent="0" marL="0">
+              <a:buNone/>
+            </a:pPr>
+            <a:r>
+              <a:rPr lang="en-US" sz="1150" dirty="0">
+                <a:solidFill>
+                  <a:srgbClr val="5E6470"/>
+                </a:solidFill>
+              </a:rPr>
+              <a:t>push different patents apart</a:t>
+            </a:r>
+            <a:endParaRPr lang="en-US" sz="1150" dirty="0"/>
+          </a:p>
+        </p:txBody>
+      </p:sp>
+      <p:sp>
+        <p:nvSpPr>
+          <p:cNvPr id="20" name="Shape 18"/>
+          <p:cNvSpPr/>
+          <p:nvPr/>
+        </p:nvSpPr>
+        <p:spPr>
+          <a:xfrm>
+            <a:off x="1097280" y="4663440"/>
+            <a:ext cx="4800600" cy="960120"/>
+          </a:xfrm>
+          <a:prstGeom prst="roundRect">
+            <a:avLst>
+              <a:gd name="adj" fmla="val 4762"/>
+            </a:avLst>
+          </a:prstGeom>
+          <a:solidFill>
+            <a:srgbClr val="FFFFFF"/>
+          </a:solidFill>
+          <a:ln w="12700">
             <a:solidFill>
               <a:srgbClr val="C9CDD3"/>
             </a:solidFill>
@@ -5241,448 +6401,14 @@
       </p:sp>
       <p:sp>
         <p:nvSpPr>
-          <p:cNvPr id="13" name="Text 11"/>
-          <p:cNvSpPr/>
-          <p:nvPr/>
-        </p:nvSpPr>
-        <p:spPr>
-          <a:xfrm>
-            <a:off x="320040" y="2941320"/>
-            <a:ext cx="365760" cy="182880"/>
-          </a:xfrm>
-          <a:prstGeom prst="rect">
-            <a:avLst/>
-          </a:prstGeom>
-          <a:noFill/>
-          <a:ln/>
-        </p:spPr>
-        <p:txBody>
-          <a:bodyPr wrap="square" lIns="0" tIns="0" rIns="0" bIns="0" rtlCol="0" anchor="ctr"/>
-          <a:lstStyle/>
-          <a:p>
-            <a:pPr algn="r" indent="0" marL="0">
-              <a:buNone/>
-            </a:pPr>
-            <a:r>
-              <a:rPr lang="en-US" sz="900" dirty="0">
-                <a:solidFill>
-                  <a:srgbClr val="5E6470"/>
-                </a:solidFill>
-              </a:rPr>
-              <a:t>0.6</a:t>
-            </a:r>
-            <a:endParaRPr lang="en-US" sz="900" dirty="0"/>
-          </a:p>
-        </p:txBody>
-      </p:sp>
-      <p:sp>
-        <p:nvSpPr>
-          <p:cNvPr id="14" name="Shape 12"/>
-          <p:cNvSpPr/>
-          <p:nvPr/>
-        </p:nvSpPr>
-        <p:spPr>
-          <a:xfrm>
-            <a:off x="777240" y="2169160"/>
-            <a:ext cx="10241280" cy="0"/>
-          </a:xfrm>
-          <a:prstGeom prst="line">
-            <a:avLst/>
-          </a:prstGeom>
-          <a:noFill/>
-          <a:ln w="6350">
-            <a:solidFill>
-              <a:srgbClr val="C9CDD3"/>
-            </a:solidFill>
-            <a:prstDash val="solid"/>
-          </a:ln>
-        </p:spPr>
-      </p:sp>
-      <p:sp>
-        <p:nvSpPr>
-          <p:cNvPr id="15" name="Text 13"/>
-          <p:cNvSpPr/>
-          <p:nvPr/>
-        </p:nvSpPr>
-        <p:spPr>
-          <a:xfrm>
-            <a:off x="320040" y="2077720"/>
-            <a:ext cx="365760" cy="182880"/>
-          </a:xfrm>
-          <a:prstGeom prst="rect">
-            <a:avLst/>
-          </a:prstGeom>
-          <a:noFill/>
-          <a:ln/>
-        </p:spPr>
-        <p:txBody>
-          <a:bodyPr wrap="square" lIns="0" tIns="0" rIns="0" bIns="0" rtlCol="0" anchor="ctr"/>
-          <a:lstStyle/>
-          <a:p>
-            <a:pPr algn="r" indent="0" marL="0">
-              <a:buNone/>
-            </a:pPr>
-            <a:r>
-              <a:rPr lang="en-US" sz="900" dirty="0">
-                <a:solidFill>
-                  <a:srgbClr val="5E6470"/>
-                </a:solidFill>
-              </a:rPr>
-              <a:t>0.8</a:t>
-            </a:r>
-            <a:endParaRPr lang="en-US" sz="900" dirty="0"/>
-          </a:p>
-        </p:txBody>
-      </p:sp>
-      <p:sp>
-        <p:nvSpPr>
-          <p:cNvPr id="16" name="Shape 14"/>
-          <p:cNvSpPr/>
-          <p:nvPr/>
-        </p:nvSpPr>
-        <p:spPr>
-          <a:xfrm>
-            <a:off x="777240" y="3271545"/>
-            <a:ext cx="1143000" cy="2352015"/>
-          </a:xfrm>
-          <a:prstGeom prst="rect">
-            <a:avLst/>
-          </a:prstGeom>
-          <a:solidFill>
-            <a:srgbClr val="FF6B35"/>
-          </a:solidFill>
-          <a:ln w="12700">
-            <a:solidFill>
-              <a:srgbClr val="FF6B35"/>
-            </a:solidFill>
-            <a:prstDash val="solid"/>
-          </a:ln>
-        </p:spPr>
-      </p:sp>
-      <p:sp>
-        <p:nvSpPr>
-          <p:cNvPr id="17" name="Text 15"/>
-          <p:cNvSpPr/>
-          <p:nvPr/>
-        </p:nvSpPr>
-        <p:spPr>
-          <a:xfrm>
-            <a:off x="731520" y="3015513"/>
-            <a:ext cx="1234440" cy="201168"/>
-          </a:xfrm>
-          <a:prstGeom prst="rect">
-            <a:avLst/>
-          </a:prstGeom>
-          <a:noFill/>
-          <a:ln/>
-        </p:spPr>
-        <p:txBody>
-          <a:bodyPr wrap="square" lIns="0" tIns="0" rIns="0" bIns="0" rtlCol="0" anchor="ctr"/>
-          <a:lstStyle/>
-          <a:p>
-            <a:pPr algn="ctr" indent="0" marL="0">
-              <a:buNone/>
-            </a:pPr>
-            <a:r>
-              <a:rPr lang="en-US" sz="1000" b="1" dirty="0">
-                <a:solidFill>
-                  <a:srgbClr val="111111"/>
-                </a:solidFill>
-              </a:rPr>
-              <a:t>0.5447</a:t>
-            </a:r>
-            <a:endParaRPr lang="en-US" sz="1000" dirty="0"/>
-          </a:p>
-        </p:txBody>
-      </p:sp>
-      <p:sp>
-        <p:nvSpPr>
-          <p:cNvPr id="18" name="Text 16"/>
-          <p:cNvSpPr/>
-          <p:nvPr/>
-        </p:nvSpPr>
-        <p:spPr>
-          <a:xfrm>
-            <a:off x="612648" y="5715000"/>
-            <a:ext cx="1472184" cy="384048"/>
-          </a:xfrm>
-          <a:prstGeom prst="rect">
-            <a:avLst/>
-          </a:prstGeom>
-          <a:noFill/>
-          <a:ln/>
-        </p:spPr>
-        <p:txBody>
-          <a:bodyPr wrap="square" lIns="0" tIns="0" rIns="0" bIns="0" rtlCol="0" anchor="ctr">
-            <a:normAutofit/>
-          </a:bodyPr>
-          <a:lstStyle/>
-          <a:p>
-            <a:pPr algn="ctr" indent="0" marL="0">
-              <a:buNone/>
-            </a:pPr>
-            <a:r>
-              <a:rPr lang="en-US" sz="950" dirty="0">
-                <a:solidFill>
-                  <a:srgbClr val="5E6470"/>
-                </a:solidFill>
-              </a:rPr>
-              <a:t>ConvNeXt-T</a:t>
-            </a:r>
-            <a:endParaRPr lang="en-US" sz="950" dirty="0"/>
-          </a:p>
-          <a:p>
-            <a:pPr algn="ctr" indent="0" marL="0">
-              <a:buNone/>
-            </a:pPr>
-            <a:r>
-              <a:rPr lang="en-US" sz="950" dirty="0">
-                <a:solidFill>
-                  <a:srgbClr val="5E6470"/>
-                </a:solidFill>
-              </a:rPr>
-              <a:t>64px</a:t>
-            </a:r>
-            <a:endParaRPr lang="en-US" sz="950" dirty="0"/>
-          </a:p>
-        </p:txBody>
-      </p:sp>
-      <p:sp>
-        <p:nvSpPr>
-          <p:cNvPr id="19" name="Shape 17"/>
-          <p:cNvSpPr/>
-          <p:nvPr/>
-        </p:nvSpPr>
-        <p:spPr>
-          <a:xfrm>
-            <a:off x="2487168" y="2491283"/>
-            <a:ext cx="1143000" cy="3132277"/>
-          </a:xfrm>
-          <a:prstGeom prst="rect">
-            <a:avLst/>
-          </a:prstGeom>
-          <a:solidFill>
-            <a:srgbClr val="FF6B35"/>
-          </a:solidFill>
-          <a:ln w="12700">
-            <a:solidFill>
-              <a:srgbClr val="FF6B35"/>
-            </a:solidFill>
-            <a:prstDash val="solid"/>
-          </a:ln>
-        </p:spPr>
-      </p:sp>
-      <p:sp>
-        <p:nvSpPr>
-          <p:cNvPr id="20" name="Text 18"/>
-          <p:cNvSpPr/>
-          <p:nvPr/>
-        </p:nvSpPr>
-        <p:spPr>
-          <a:xfrm>
-            <a:off x="2441448" y="2235251"/>
-            <a:ext cx="1234440" cy="201168"/>
-          </a:xfrm>
-          <a:prstGeom prst="rect">
-            <a:avLst/>
-          </a:prstGeom>
-          <a:noFill/>
-          <a:ln/>
-        </p:spPr>
-        <p:txBody>
-          <a:bodyPr wrap="square" lIns="0" tIns="0" rIns="0" bIns="0" rtlCol="0" anchor="ctr"/>
-          <a:lstStyle/>
-          <a:p>
-            <a:pPr algn="ctr" indent="0" marL="0">
-              <a:buNone/>
-            </a:pPr>
-            <a:r>
-              <a:rPr lang="en-US" sz="1000" b="1" dirty="0">
-                <a:solidFill>
-                  <a:srgbClr val="111111"/>
-                </a:solidFill>
-              </a:rPr>
-              <a:t>0.7254</a:t>
-            </a:r>
-            <a:endParaRPr lang="en-US" sz="1000" dirty="0"/>
-          </a:p>
-        </p:txBody>
-      </p:sp>
-      <p:sp>
-        <p:nvSpPr>
-          <p:cNvPr id="21" name="Text 19"/>
-          <p:cNvSpPr/>
-          <p:nvPr/>
-        </p:nvSpPr>
-        <p:spPr>
-          <a:xfrm>
-            <a:off x="2322576" y="5715000"/>
-            <a:ext cx="1472184" cy="384048"/>
-          </a:xfrm>
-          <a:prstGeom prst="rect">
-            <a:avLst/>
-          </a:prstGeom>
-          <a:noFill/>
-          <a:ln/>
-        </p:spPr>
-        <p:txBody>
-          <a:bodyPr wrap="square" lIns="0" tIns="0" rIns="0" bIns="0" rtlCol="0" anchor="ctr">
-            <a:normAutofit/>
-          </a:bodyPr>
-          <a:lstStyle/>
-          <a:p>
-            <a:pPr algn="ctr" indent="0" marL="0">
-              <a:buNone/>
-            </a:pPr>
-            <a:r>
-              <a:rPr lang="en-US" sz="950" dirty="0">
-                <a:solidFill>
-                  <a:srgbClr val="5E6470"/>
-                </a:solidFill>
-              </a:rPr>
-              <a:t>ConvNeXt-T</a:t>
-            </a:r>
-            <a:endParaRPr lang="en-US" sz="950" dirty="0"/>
-          </a:p>
-          <a:p>
-            <a:pPr algn="ctr" indent="0" marL="0">
-              <a:buNone/>
-            </a:pPr>
-            <a:r>
-              <a:rPr lang="en-US" sz="950" dirty="0">
-                <a:solidFill>
-                  <a:srgbClr val="5E6470"/>
-                </a:solidFill>
-              </a:rPr>
-              <a:t>128px</a:t>
-            </a:r>
-            <a:endParaRPr lang="en-US" sz="950" dirty="0"/>
-          </a:p>
-        </p:txBody>
-      </p:sp>
-      <p:sp>
-        <p:nvSpPr>
-          <p:cNvPr id="22" name="Shape 20"/>
-          <p:cNvSpPr/>
-          <p:nvPr/>
-        </p:nvSpPr>
-        <p:spPr>
-          <a:xfrm>
-            <a:off x="4197096" y="2085823"/>
-            <a:ext cx="1143000" cy="3537737"/>
-          </a:xfrm>
-          <a:prstGeom prst="rect">
-            <a:avLst/>
-          </a:prstGeom>
-          <a:solidFill>
-            <a:srgbClr val="FF6B35"/>
-          </a:solidFill>
-          <a:ln w="12700">
-            <a:solidFill>
-              <a:srgbClr val="FF6B35"/>
-            </a:solidFill>
-            <a:prstDash val="solid"/>
-          </a:ln>
-        </p:spPr>
-      </p:sp>
-      <p:sp>
-        <p:nvSpPr>
-          <p:cNvPr id="23" name="Text 21"/>
-          <p:cNvSpPr/>
-          <p:nvPr/>
-        </p:nvSpPr>
-        <p:spPr>
-          <a:xfrm>
-            <a:off x="4151376" y="1829791"/>
-            <a:ext cx="1234440" cy="201168"/>
-          </a:xfrm>
-          <a:prstGeom prst="rect">
-            <a:avLst/>
-          </a:prstGeom>
-          <a:noFill/>
-          <a:ln/>
-        </p:spPr>
-        <p:txBody>
-          <a:bodyPr wrap="square" lIns="0" tIns="0" rIns="0" bIns="0" rtlCol="0" anchor="ctr"/>
-          <a:lstStyle/>
-          <a:p>
-            <a:pPr algn="ctr" indent="0" marL="0">
-              <a:buNone/>
-            </a:pPr>
-            <a:r>
-              <a:rPr lang="en-US" sz="1000" b="1" dirty="0">
-                <a:solidFill>
-                  <a:srgbClr val="111111"/>
-                </a:solidFill>
-              </a:rPr>
-              <a:t>0.8193</a:t>
-            </a:r>
-            <a:endParaRPr lang="en-US" sz="1000" dirty="0"/>
-          </a:p>
-        </p:txBody>
-      </p:sp>
-      <p:sp>
-        <p:nvSpPr>
-          <p:cNvPr id="24" name="Text 22"/>
-          <p:cNvSpPr/>
-          <p:nvPr/>
-        </p:nvSpPr>
-        <p:spPr>
-          <a:xfrm>
-            <a:off x="4032504" y="5715000"/>
-            <a:ext cx="1472184" cy="384048"/>
-          </a:xfrm>
-          <a:prstGeom prst="rect">
-            <a:avLst/>
-          </a:prstGeom>
-          <a:noFill/>
-          <a:ln/>
-        </p:spPr>
-        <p:txBody>
-          <a:bodyPr wrap="square" lIns="0" tIns="0" rIns="0" bIns="0" rtlCol="0" anchor="ctr">
-            <a:normAutofit/>
-          </a:bodyPr>
-          <a:lstStyle/>
-          <a:p>
-            <a:pPr algn="ctr" indent="0" marL="0">
-              <a:buNone/>
-            </a:pPr>
-            <a:r>
-              <a:rPr lang="en-US" sz="950" dirty="0">
-                <a:solidFill>
-                  <a:srgbClr val="5E6470"/>
-                </a:solidFill>
-              </a:rPr>
-              <a:t>ConvNeXt-T</a:t>
-            </a:r>
-            <a:endParaRPr lang="en-US" sz="950" dirty="0"/>
-          </a:p>
-          <a:p>
-            <a:pPr algn="ctr" indent="0" marL="0">
-              <a:buNone/>
-            </a:pPr>
-            <a:r>
-              <a:rPr lang="en-US" sz="950" dirty="0">
-                <a:solidFill>
-                  <a:srgbClr val="5E6470"/>
-                </a:solidFill>
-              </a:rPr>
-              <a:t>256px</a:t>
-            </a:r>
-            <a:endParaRPr lang="en-US" sz="950" dirty="0"/>
-          </a:p>
-        </p:txBody>
-      </p:sp>
-      <p:sp>
-        <p:nvSpPr>
-          <p:cNvPr id="25" name="Shape 23"/>
-          <p:cNvSpPr/>
-          <p:nvPr/>
-        </p:nvSpPr>
-        <p:spPr>
-          <a:xfrm>
-            <a:off x="5907024" y="4145940"/>
-            <a:ext cx="1143000" cy="1477620"/>
+          <p:cNvPr id="21" name="Shape 19"/>
+          <p:cNvSpPr/>
+          <p:nvPr/>
+        </p:nvSpPr>
+        <p:spPr>
+          <a:xfrm>
+            <a:off x="1097280" y="4663440"/>
+            <a:ext cx="64008" cy="960120"/>
           </a:xfrm>
           <a:prstGeom prst="rect">
             <a:avLst/>
@@ -5700,50 +6426,14 @@
       </p:sp>
       <p:sp>
         <p:nvSpPr>
-          <p:cNvPr id="26" name="Text 24"/>
-          <p:cNvSpPr/>
-          <p:nvPr/>
-        </p:nvSpPr>
-        <p:spPr>
-          <a:xfrm>
-            <a:off x="5861304" y="3889908"/>
-            <a:ext cx="1234440" cy="201168"/>
-          </a:xfrm>
-          <a:prstGeom prst="rect">
-            <a:avLst/>
-          </a:prstGeom>
-          <a:noFill/>
-          <a:ln/>
-        </p:spPr>
-        <p:txBody>
-          <a:bodyPr wrap="square" lIns="0" tIns="0" rIns="0" bIns="0" rtlCol="0" anchor="ctr"/>
-          <a:lstStyle/>
-          <a:p>
-            <a:pPr algn="ctr" indent="0" marL="0">
-              <a:buNone/>
-            </a:pPr>
-            <a:r>
-              <a:rPr lang="en-US" sz="1000" b="1" dirty="0">
-                <a:solidFill>
-                  <a:srgbClr val="111111"/>
-                </a:solidFill>
-              </a:rPr>
-              <a:t>0.3422</a:t>
-            </a:r>
-            <a:endParaRPr lang="en-US" sz="1000" dirty="0"/>
-          </a:p>
-        </p:txBody>
-      </p:sp>
-      <p:sp>
-        <p:nvSpPr>
-          <p:cNvPr id="27" name="Text 25"/>
-          <p:cNvSpPr/>
-          <p:nvPr/>
-        </p:nvSpPr>
-        <p:spPr>
-          <a:xfrm>
-            <a:off x="5742432" y="5715000"/>
-            <a:ext cx="1472184" cy="384048"/>
+          <p:cNvPr id="22" name="Text 20"/>
+          <p:cNvSpPr/>
+          <p:nvPr/>
+        </p:nvSpPr>
+        <p:spPr>
+          <a:xfrm>
+            <a:off x="1298448" y="4818888"/>
+            <a:ext cx="4471416" cy="274320"/>
           </a:xfrm>
           <a:prstGeom prst="rect">
             <a:avLst/>
@@ -5757,55 +6447,81 @@
           </a:bodyPr>
           <a:lstStyle/>
           <a:p>
-            <a:pPr algn="ctr" indent="0" marL="0">
-              <a:buNone/>
-            </a:pPr>
-            <a:r>
-              <a:rPr lang="en-US" sz="950" dirty="0">
+            <a:pPr indent="0" marL="0">
+              <a:buNone/>
+            </a:pPr>
+            <a:r>
+              <a:rPr lang="en-US" sz="1400" b="1" dirty="0">
+                <a:solidFill>
+                  <a:srgbClr val="111111"/>
+                </a:solidFill>
+              </a:rPr>
+              <a:t>Training</a:t>
+            </a:r>
+            <a:endParaRPr lang="en-US" sz="1400" dirty="0"/>
+          </a:p>
+        </p:txBody>
+      </p:sp>
+      <p:sp>
+        <p:nvSpPr>
+          <p:cNvPr id="23" name="Text 21"/>
+          <p:cNvSpPr/>
+          <p:nvPr/>
+        </p:nvSpPr>
+        <p:spPr>
+          <a:xfrm>
+            <a:off x="1298448" y="5193792"/>
+            <a:ext cx="4471416" cy="301752"/>
+          </a:xfrm>
+          <a:prstGeom prst="rect">
+            <a:avLst/>
+          </a:prstGeom>
+          <a:noFill/>
+          <a:ln/>
+        </p:spPr>
+        <p:txBody>
+          <a:bodyPr wrap="square" lIns="254" tIns="254" rIns="254" bIns="254" rtlCol="0" anchor="t">
+            <a:normAutofit/>
+          </a:bodyPr>
+          <a:lstStyle/>
+          <a:p>
+            <a:pPr indent="0" marL="0">
+              <a:buNone/>
+            </a:pPr>
+            <a:r>
+              <a:rPr lang="en-US" sz="1150" dirty="0">
                 <a:solidFill>
                   <a:srgbClr val="5E6470"/>
                 </a:solidFill>
               </a:rPr>
-              <a:t>ResNet-18</a:t>
-            </a:r>
-            <a:endParaRPr lang="en-US" sz="950" dirty="0"/>
-          </a:p>
-          <a:p>
-            <a:pPr algn="ctr" indent="0" marL="0">
-              <a:buNone/>
-            </a:pPr>
-            <a:r>
-              <a:rPr lang="en-US" sz="950" dirty="0">
-                <a:solidFill>
-                  <a:srgbClr val="5E6470"/>
-                </a:solidFill>
-              </a:rPr>
-              <a:t>256px</a:t>
-            </a:r>
-            <a:endParaRPr lang="en-US" sz="950" dirty="0"/>
-          </a:p>
-        </p:txBody>
-      </p:sp>
-      <p:sp>
-        <p:nvSpPr>
-          <p:cNvPr id="28" name="Shape 26"/>
-          <p:cNvSpPr/>
-          <p:nvPr/>
-        </p:nvSpPr>
-        <p:spPr>
-          <a:xfrm>
-            <a:off x="7616952" y="3958539"/>
-            <a:ext cx="1143000" cy="1665021"/>
-          </a:xfrm>
-          <a:prstGeom prst="rect">
-            <a:avLst/>
+              <a:t>Scale 30 · angular margin 0.50 · 30 epochs · effective batch ≈512</a:t>
+            </a:r>
+            <a:endParaRPr lang="en-US" sz="1150" dirty="0"/>
+          </a:p>
+        </p:txBody>
+      </p:sp>
+      <p:sp>
+        <p:nvSpPr>
+          <p:cNvPr id="24" name="Shape 22"/>
+          <p:cNvSpPr/>
+          <p:nvPr/>
+        </p:nvSpPr>
+        <p:spPr>
+          <a:xfrm>
+            <a:off x="6309360" y="4663440"/>
+            <a:ext cx="4800600" cy="960120"/>
+          </a:xfrm>
+          <a:prstGeom prst="roundRect">
+            <a:avLst>
+              <a:gd name="adj" fmla="val 4762"/>
+            </a:avLst>
           </a:prstGeom>
           <a:solidFill>
-            <a:srgbClr val="2166AC"/>
+            <a:srgbClr val="FFFFFF"/>
           </a:solidFill>
           <a:ln w="12700">
             <a:solidFill>
-              <a:srgbClr val="2166AC"/>
+              <a:srgbClr val="C9CDD3"/>
             </a:solidFill>
             <a:prstDash val="solid"/>
           </a:ln>
@@ -5813,50 +6529,39 @@
       </p:sp>
       <p:sp>
         <p:nvSpPr>
-          <p:cNvPr id="29" name="Text 27"/>
-          <p:cNvSpPr/>
-          <p:nvPr/>
-        </p:nvSpPr>
-        <p:spPr>
-          <a:xfrm>
-            <a:off x="7571232" y="3702507"/>
-            <a:ext cx="1234440" cy="201168"/>
-          </a:xfrm>
-          <a:prstGeom prst="rect">
-            <a:avLst/>
-          </a:prstGeom>
-          <a:noFill/>
-          <a:ln/>
-        </p:spPr>
-        <p:txBody>
-          <a:bodyPr wrap="square" lIns="0" tIns="0" rIns="0" bIns="0" rtlCol="0" anchor="ctr"/>
-          <a:lstStyle/>
-          <a:p>
-            <a:pPr algn="ctr" indent="0" marL="0">
-              <a:buNone/>
-            </a:pPr>
-            <a:r>
-              <a:rPr lang="en-US" sz="1000" b="1" dirty="0">
-                <a:solidFill>
-                  <a:srgbClr val="111111"/>
-                </a:solidFill>
-              </a:rPr>
-              <a:t>0.3856</a:t>
-            </a:r>
-            <a:endParaRPr lang="en-US" sz="1000" dirty="0"/>
-          </a:p>
-        </p:txBody>
-      </p:sp>
-      <p:sp>
-        <p:nvSpPr>
-          <p:cNvPr id="30" name="Text 28"/>
-          <p:cNvSpPr/>
-          <p:nvPr/>
-        </p:nvSpPr>
-        <p:spPr>
-          <a:xfrm>
-            <a:off x="7452360" y="5715000"/>
-            <a:ext cx="1472184" cy="384048"/>
+          <p:cNvPr id="25" name="Shape 23"/>
+          <p:cNvSpPr/>
+          <p:nvPr/>
+        </p:nvSpPr>
+        <p:spPr>
+          <a:xfrm>
+            <a:off x="6309360" y="4663440"/>
+            <a:ext cx="64008" cy="960120"/>
+          </a:xfrm>
+          <a:prstGeom prst="rect">
+            <a:avLst/>
+          </a:prstGeom>
+          <a:solidFill>
+            <a:srgbClr val="188977"/>
+          </a:solidFill>
+          <a:ln w="12700">
+            <a:solidFill>
+              <a:srgbClr val="188977"/>
+            </a:solidFill>
+            <a:prstDash val="solid"/>
+          </a:ln>
+        </p:spPr>
+      </p:sp>
+      <p:sp>
+        <p:nvSpPr>
+          <p:cNvPr id="26" name="Text 24"/>
+          <p:cNvSpPr/>
+          <p:nvPr/>
+        </p:nvSpPr>
+        <p:spPr>
+          <a:xfrm>
+            <a:off x="6510528" y="4818888"/>
+            <a:ext cx="4471416" cy="274320"/>
           </a:xfrm>
           <a:prstGeom prst="rect">
             <a:avLst/>
@@ -5870,106 +6575,69 @@
           </a:bodyPr>
           <a:lstStyle/>
           <a:p>
-            <a:pPr algn="ctr" indent="0" marL="0">
-              <a:buNone/>
-            </a:pPr>
-            <a:r>
-              <a:rPr lang="en-US" sz="950" dirty="0">
+            <a:pPr indent="0" marL="0">
+              <a:buNone/>
+            </a:pPr>
+            <a:r>
+              <a:rPr lang="en-US" sz="1400" b="1" dirty="0">
+                <a:solidFill>
+                  <a:srgbClr val="111111"/>
+                </a:solidFill>
+              </a:rPr>
+              <a:t>Retrieval</a:t>
+            </a:r>
+            <a:endParaRPr lang="en-US" sz="1400" dirty="0"/>
+          </a:p>
+        </p:txBody>
+      </p:sp>
+      <p:sp>
+        <p:nvSpPr>
+          <p:cNvPr id="27" name="Text 25"/>
+          <p:cNvSpPr/>
+          <p:nvPr/>
+        </p:nvSpPr>
+        <p:spPr>
+          <a:xfrm>
+            <a:off x="6510528" y="5193792"/>
+            <a:ext cx="4471416" cy="301752"/>
+          </a:xfrm>
+          <a:prstGeom prst="rect">
+            <a:avLst/>
+          </a:prstGeom>
+          <a:noFill/>
+          <a:ln/>
+        </p:spPr>
+        <p:txBody>
+          <a:bodyPr wrap="square" lIns="254" tIns="254" rIns="254" bIns="254" rtlCol="0" anchor="t">
+            <a:normAutofit/>
+          </a:bodyPr>
+          <a:lstStyle/>
+          <a:p>
+            <a:pPr indent="0" marL="0">
+              <a:buNone/>
+            </a:pPr>
+            <a:r>
+              <a:rPr lang="en-US" sz="1150" dirty="0">
                 <a:solidFill>
                   <a:srgbClr val="5E6470"/>
                 </a:solidFill>
               </a:rPr>
-              <a:t>ResNet-50</a:t>
-            </a:r>
-            <a:endParaRPr lang="en-US" sz="950" dirty="0"/>
-          </a:p>
-          <a:p>
-            <a:pPr algn="ctr" indent="0" marL="0">
-              <a:buNone/>
-            </a:pPr>
-            <a:r>
-              <a:rPr lang="en-US" sz="950" dirty="0">
-                <a:solidFill>
-                  <a:srgbClr val="5E6470"/>
-                </a:solidFill>
-              </a:rPr>
-              <a:t>256px</a:t>
-            </a:r>
-            <a:endParaRPr lang="en-US" sz="950" dirty="0"/>
-          </a:p>
-        </p:txBody>
-      </p:sp>
-      <p:sp>
-        <p:nvSpPr>
-          <p:cNvPr id="31" name="Shape 29"/>
-          <p:cNvSpPr/>
-          <p:nvPr/>
-        </p:nvSpPr>
-        <p:spPr>
-          <a:xfrm>
-            <a:off x="9326880" y="3629076"/>
-            <a:ext cx="1143000" cy="1994484"/>
-          </a:xfrm>
-          <a:prstGeom prst="rect">
-            <a:avLst/>
-          </a:prstGeom>
-          <a:solidFill>
-            <a:srgbClr val="2166AC"/>
-          </a:solidFill>
-          <a:ln w="12700">
-            <a:solidFill>
-              <a:srgbClr val="2166AC"/>
-            </a:solidFill>
-            <a:prstDash val="solid"/>
-          </a:ln>
-        </p:spPr>
-      </p:sp>
-      <p:sp>
-        <p:nvSpPr>
-          <p:cNvPr id="32" name="Text 30"/>
-          <p:cNvSpPr/>
-          <p:nvPr/>
-        </p:nvSpPr>
-        <p:spPr>
-          <a:xfrm>
-            <a:off x="9281160" y="3373044"/>
-            <a:ext cx="1234440" cy="201168"/>
-          </a:xfrm>
-          <a:prstGeom prst="rect">
-            <a:avLst/>
-          </a:prstGeom>
-          <a:noFill/>
-          <a:ln/>
-        </p:spPr>
-        <p:txBody>
-          <a:bodyPr wrap="square" lIns="0" tIns="0" rIns="0" bIns="0" rtlCol="0" anchor="ctr"/>
-          <a:lstStyle/>
-          <a:p>
-            <a:pPr algn="ctr" indent="0" marL="0">
-              <a:buNone/>
-            </a:pPr>
-            <a:r>
-              <a:rPr lang="en-US" sz="1000" b="1" dirty="0">
-                <a:solidFill>
-                  <a:srgbClr val="111111"/>
-                </a:solidFill>
-              </a:rPr>
-              <a:t>0.4619</a:t>
-            </a:r>
-            <a:endParaRPr lang="en-US" sz="1000" dirty="0"/>
-          </a:p>
-        </p:txBody>
-      </p:sp>
-      <p:sp>
-        <p:nvSpPr>
-          <p:cNvPr id="33" name="Text 31"/>
-          <p:cNvSpPr/>
-          <p:nvPr/>
-        </p:nvSpPr>
-        <p:spPr>
-          <a:xfrm>
-            <a:off x="9162288" y="5715000"/>
-            <a:ext cx="1472184" cy="384048"/>
+              <a:t>Cosine search, then optional query expansion or graph diffusion</a:t>
+            </a:r>
+            <a:endParaRPr lang="en-US" sz="1150" dirty="0"/>
+          </a:p>
+        </p:txBody>
+      </p:sp>
+      <p:sp>
+        <p:nvSpPr>
+          <p:cNvPr id="28" name="Text 26"/>
+          <p:cNvSpPr/>
+          <p:nvPr/>
+        </p:nvSpPr>
+        <p:spPr>
+          <a:xfrm>
+            <a:off x="2377440" y="6510528"/>
+            <a:ext cx="8229600" cy="164592"/>
           </a:xfrm>
           <a:prstGeom prst="rect">
             <a:avLst/>
@@ -5987,123 +6655,6 @@
               <a:buNone/>
             </a:pPr>
             <a:r>
-              <a:rPr lang="en-US" sz="950" dirty="0">
-                <a:solidFill>
-                  <a:srgbClr val="5E6470"/>
-                </a:solidFill>
-              </a:rPr>
-              <a:t>ResNet-152</a:t>
-            </a:r>
-            <a:endParaRPr lang="en-US" sz="950" dirty="0"/>
-          </a:p>
-          <a:p>
-            <a:pPr algn="ctr" indent="0" marL="0">
-              <a:buNone/>
-            </a:pPr>
-            <a:r>
-              <a:rPr lang="en-US" sz="950" dirty="0">
-                <a:solidFill>
-                  <a:srgbClr val="5E6470"/>
-                </a:solidFill>
-              </a:rPr>
-              <a:t>256px</a:t>
-            </a:r>
-            <a:endParaRPr lang="en-US" sz="950" dirty="0"/>
-          </a:p>
-        </p:txBody>
-      </p:sp>
-      <p:sp>
-        <p:nvSpPr>
-          <p:cNvPr id="34" name="Shape 32"/>
-          <p:cNvSpPr/>
-          <p:nvPr/>
-        </p:nvSpPr>
-        <p:spPr>
-          <a:xfrm>
-            <a:off x="9052560" y="1389888"/>
-            <a:ext cx="2057400" cy="310896"/>
-          </a:xfrm>
-          <a:prstGeom prst="roundRect">
-            <a:avLst>
-              <a:gd name="adj" fmla="val 23529"/>
-            </a:avLst>
-          </a:prstGeom>
-          <a:solidFill>
-            <a:srgbClr val="FF6B35"/>
-          </a:solidFill>
-          <a:ln w="12700">
-            <a:solidFill>
-              <a:srgbClr val="FF6B35"/>
-            </a:solidFill>
-            <a:prstDash val="solid"/>
-          </a:ln>
-        </p:spPr>
-      </p:sp>
-      <p:sp>
-        <p:nvSpPr>
-          <p:cNvPr id="35" name="Text 33"/>
-          <p:cNvSpPr/>
-          <p:nvPr/>
-        </p:nvSpPr>
-        <p:spPr>
-          <a:xfrm>
-            <a:off x="9116568" y="1453896"/>
-            <a:ext cx="1929384" cy="146304"/>
-          </a:xfrm>
-          <a:prstGeom prst="rect">
-            <a:avLst/>
-          </a:prstGeom>
-          <a:noFill/>
-          <a:ln/>
-        </p:spPr>
-        <p:txBody>
-          <a:bodyPr wrap="square" lIns="0" tIns="0" rIns="0" bIns="0" rtlCol="0" anchor="ctr">
-            <a:normAutofit/>
-          </a:bodyPr>
-          <a:lstStyle/>
-          <a:p>
-            <a:pPr algn="ctr" indent="0" marL="0">
-              <a:buNone/>
-            </a:pPr>
-            <a:r>
-              <a:rPr lang="en-US" sz="900" b="1" dirty="0">
-                <a:solidFill>
-                  <a:srgbClr val="FFFFFF"/>
-                </a:solidFill>
-              </a:rPr>
-              <a:t>BEST: 0.8193 mAP</a:t>
-            </a:r>
-            <a:endParaRPr lang="en-US" sz="900" dirty="0"/>
-          </a:p>
-        </p:txBody>
-      </p:sp>
-      <p:sp>
-        <p:nvSpPr>
-          <p:cNvPr id="36" name="Text 34"/>
-          <p:cNvSpPr/>
-          <p:nvPr/>
-        </p:nvSpPr>
-        <p:spPr>
-          <a:xfrm>
-            <a:off x="2377440" y="6510528"/>
-            <a:ext cx="8229600" cy="164592"/>
-          </a:xfrm>
-          <a:prstGeom prst="rect">
-            <a:avLst/>
-          </a:prstGeom>
-          <a:noFill/>
-          <a:ln/>
-        </p:spPr>
-        <p:txBody>
-          <a:bodyPr wrap="square" lIns="0" tIns="0" rIns="0" bIns="0" rtlCol="0" anchor="ctr">
-            <a:normAutofit/>
-          </a:bodyPr>
-          <a:lstStyle/>
-          <a:p>
-            <a:pPr algn="ctr" indent="0" marL="0">
-              <a:buNone/>
-            </a:pPr>
-            <a:r>
               <a:rPr lang="en-US" sz="750" dirty="0">
                 <a:solidFill>
                   <a:srgbClr val="5E6470"/>
@@ -6112,7 +6663,7 @@
                 <a:ea typeface="Arial" pitchFamily="34" charset="-122"/>
                 <a:cs typeface="Arial" pitchFamily="34" charset="-120"/>
               </a:rPr>
-              <a:t>Standard Gallery mean average precision</a:t>
+              <a:t>Model architecture and training protocol from the paper</a:t>
             </a:r>
             <a:endParaRPr lang="en-US" sz="750" dirty="0"/>
           </a:p>
@@ -6224,7 +6775,7 @@
                 <a:ea typeface="Arial" pitchFamily="34" charset="-122"/>
                 <a:cs typeface="Arial" pitchFamily="34" charset="-120"/>
               </a:rPr>
-              <a:t>BENCHMARK</a:t>
+              <a:t>MODEL SELECTION</a:t>
             </a:r>
             <a:endParaRPr lang="en-US" sz="900" dirty="0"/>
           </a:p>
@@ -6265,7 +6816,7 @@
                 <a:ea typeface="Arial" pitchFamily="34" charset="-122"/>
                 <a:cs typeface="Arial" pitchFamily="34" charset="-120"/>
               </a:rPr>
-              <a:t>The gain survives a much larger search gallery</a:t>
+              <a:t>Resolution and backbone capacity both matter</a:t>
             </a:r>
             <a:endParaRPr lang="en-US" sz="2800" dirty="0"/>
           </a:p>
@@ -6314,98 +6865,22 @@
       </p:sp>
       <p:sp>
         <p:nvSpPr>
-          <p:cNvPr id="5" name="Text 3"/>
-          <p:cNvSpPr/>
-          <p:nvPr/>
-        </p:nvSpPr>
-        <p:spPr>
-          <a:xfrm>
-            <a:off x="685800" y="1508760"/>
-            <a:ext cx="4937760" cy="365760"/>
-          </a:xfrm>
-          <a:prstGeom prst="rect">
-            <a:avLst/>
-          </a:prstGeom>
-          <a:noFill/>
-          <a:ln/>
-        </p:spPr>
-        <p:txBody>
-          <a:bodyPr wrap="square" lIns="0" tIns="0" rIns="0" bIns="0" rtlCol="0" anchor="ctr"/>
-          <a:lstStyle/>
-          <a:p>
-            <a:pPr algn="ctr" indent="0" marL="0">
-              <a:buNone/>
-            </a:pPr>
-            <a:r>
-              <a:rPr lang="en-US" sz="2000" b="1" dirty="0">
-                <a:solidFill>
-                  <a:srgbClr val="111111"/>
-                </a:solidFill>
-              </a:rPr>
-              <a:t>Standard Gallery</a:t>
-            </a:r>
-            <a:endParaRPr lang="en-US" sz="2000" dirty="0"/>
-          </a:p>
-        </p:txBody>
-      </p:sp>
-      <p:sp>
-        <p:nvSpPr>
-          <p:cNvPr id="6" name="Text 4"/>
-          <p:cNvSpPr/>
-          <p:nvPr/>
-        </p:nvSpPr>
-        <p:spPr>
-          <a:xfrm>
-            <a:off x="6400800" y="1508760"/>
-            <a:ext cx="4937760" cy="365760"/>
-          </a:xfrm>
-          <a:prstGeom prst="rect">
-            <a:avLst/>
-          </a:prstGeom>
-          <a:noFill/>
-          <a:ln/>
-        </p:spPr>
-        <p:txBody>
-          <a:bodyPr wrap="square" lIns="0" tIns="0" rIns="0" bIns="0" rtlCol="0" anchor="ctr"/>
-          <a:lstStyle/>
-          <a:p>
-            <a:pPr algn="ctr" indent="0" marL="0">
-              <a:buNone/>
-            </a:pPr>
-            <a:r>
-              <a:rPr lang="en-US" sz="2000" b="1" dirty="0">
-                <a:solidFill>
-                  <a:srgbClr val="111111"/>
-                </a:solidFill>
-              </a:rPr>
-              <a:t>Extended Gallery</a:t>
-            </a:r>
-            <a:endParaRPr lang="en-US" sz="2000" dirty="0"/>
-          </a:p>
-        </p:txBody>
-      </p:sp>
-      <p:sp>
-        <p:nvSpPr>
-          <p:cNvPr id="7" name="Shape 5"/>
-          <p:cNvSpPr/>
-          <p:nvPr/>
-        </p:nvSpPr>
-        <p:spPr>
-          <a:xfrm>
-            <a:off x="640080" y="2057400"/>
-            <a:ext cx="4983480" cy="2606040"/>
-          </a:xfrm>
-          <a:prstGeom prst="roundRect">
-            <a:avLst>
-              <a:gd name="adj" fmla="val 1754"/>
-            </a:avLst>
-          </a:prstGeom>
-          <a:solidFill>
-            <a:srgbClr val="F2F3F5"/>
-          </a:solidFill>
+          <p:cNvPr id="5" name="Shape 3"/>
+          <p:cNvSpPr/>
+          <p:nvPr/>
+        </p:nvSpPr>
+        <p:spPr>
+          <a:xfrm>
+            <a:off x="777240" y="5623560"/>
+            <a:ext cx="10241280" cy="0"/>
+          </a:xfrm>
+          <a:prstGeom prst="line">
+            <a:avLst/>
+          </a:prstGeom>
+          <a:noFill/>
           <a:ln w="12700">
             <a:solidFill>
-              <a:srgbClr val="F2F3F5"/>
+              <a:srgbClr val="111111"/>
             </a:solidFill>
             <a:prstDash val="solid"/>
           </a:ln>
@@ -6413,14 +6888,37 @@
       </p:sp>
       <p:sp>
         <p:nvSpPr>
-          <p:cNvPr id="8" name="Text 6"/>
-          <p:cNvSpPr/>
-          <p:nvPr/>
-        </p:nvSpPr>
-        <p:spPr>
-          <a:xfrm>
-            <a:off x="960120" y="2313432"/>
-            <a:ext cx="594360" cy="228600"/>
+          <p:cNvPr id="6" name="Shape 4"/>
+          <p:cNvSpPr/>
+          <p:nvPr/>
+        </p:nvSpPr>
+        <p:spPr>
+          <a:xfrm>
+            <a:off x="777240" y="5623560"/>
+            <a:ext cx="10241280" cy="0"/>
+          </a:xfrm>
+          <a:prstGeom prst="line">
+            <a:avLst/>
+          </a:prstGeom>
+          <a:noFill/>
+          <a:ln w="6350">
+            <a:solidFill>
+              <a:srgbClr val="C9CDD3"/>
+            </a:solidFill>
+            <a:prstDash val="solid"/>
+          </a:ln>
+        </p:spPr>
+      </p:sp>
+      <p:sp>
+        <p:nvSpPr>
+          <p:cNvPr id="7" name="Text 5"/>
+          <p:cNvSpPr/>
+          <p:nvPr/>
+        </p:nvSpPr>
+        <p:spPr>
+          <a:xfrm>
+            <a:off x="320040" y="5532120"/>
+            <a:ext cx="365760" cy="182880"/>
           </a:xfrm>
           <a:prstGeom prst="rect">
             <a:avLst/>
@@ -6432,31 +6930,267 @@
           <a:bodyPr wrap="square" lIns="0" tIns="0" rIns="0" bIns="0" rtlCol="0" anchor="ctr"/>
           <a:lstStyle/>
           <a:p>
-            <a:pPr indent="0" marL="0">
-              <a:buNone/>
-            </a:pPr>
-            <a:r>
-              <a:rPr lang="en-US" sz="1100" b="1" dirty="0">
+            <a:pPr algn="r" indent="0" marL="0">
+              <a:buNone/>
+            </a:pPr>
+            <a:r>
+              <a:rPr lang="en-US" sz="900" dirty="0">
                 <a:solidFill>
                   <a:srgbClr val="5E6470"/>
                 </a:solidFill>
               </a:rPr>
-              <a:t>mAP</a:t>
-            </a:r>
-            <a:endParaRPr lang="en-US" sz="1100" dirty="0"/>
-          </a:p>
-        </p:txBody>
-      </p:sp>
-      <p:sp>
-        <p:nvSpPr>
-          <p:cNvPr id="9" name="Shape 7"/>
-          <p:cNvSpPr/>
-          <p:nvPr/>
-        </p:nvSpPr>
-        <p:spPr>
-          <a:xfrm>
-            <a:off x="1600200" y="2331720"/>
-            <a:ext cx="3246394" cy="566928"/>
+              <a:t>0.0</a:t>
+            </a:r>
+            <a:endParaRPr lang="en-US" sz="900" dirty="0"/>
+          </a:p>
+        </p:txBody>
+      </p:sp>
+      <p:sp>
+        <p:nvSpPr>
+          <p:cNvPr id="8" name="Shape 6"/>
+          <p:cNvSpPr/>
+          <p:nvPr/>
+        </p:nvSpPr>
+        <p:spPr>
+          <a:xfrm>
+            <a:off x="777240" y="4759960"/>
+            <a:ext cx="10241280" cy="0"/>
+          </a:xfrm>
+          <a:prstGeom prst="line">
+            <a:avLst/>
+          </a:prstGeom>
+          <a:noFill/>
+          <a:ln w="6350">
+            <a:solidFill>
+              <a:srgbClr val="C9CDD3"/>
+            </a:solidFill>
+            <a:prstDash val="solid"/>
+          </a:ln>
+        </p:spPr>
+      </p:sp>
+      <p:sp>
+        <p:nvSpPr>
+          <p:cNvPr id="9" name="Text 7"/>
+          <p:cNvSpPr/>
+          <p:nvPr/>
+        </p:nvSpPr>
+        <p:spPr>
+          <a:xfrm>
+            <a:off x="320040" y="4668520"/>
+            <a:ext cx="365760" cy="182880"/>
+          </a:xfrm>
+          <a:prstGeom prst="rect">
+            <a:avLst/>
+          </a:prstGeom>
+          <a:noFill/>
+          <a:ln/>
+        </p:spPr>
+        <p:txBody>
+          <a:bodyPr wrap="square" lIns="0" tIns="0" rIns="0" bIns="0" rtlCol="0" anchor="ctr"/>
+          <a:lstStyle/>
+          <a:p>
+            <a:pPr algn="r" indent="0" marL="0">
+              <a:buNone/>
+            </a:pPr>
+            <a:r>
+              <a:rPr lang="en-US" sz="900" dirty="0">
+                <a:solidFill>
+                  <a:srgbClr val="5E6470"/>
+                </a:solidFill>
+              </a:rPr>
+              <a:t>0.2</a:t>
+            </a:r>
+            <a:endParaRPr lang="en-US" sz="900" dirty="0"/>
+          </a:p>
+        </p:txBody>
+      </p:sp>
+      <p:sp>
+        <p:nvSpPr>
+          <p:cNvPr id="10" name="Shape 8"/>
+          <p:cNvSpPr/>
+          <p:nvPr/>
+        </p:nvSpPr>
+        <p:spPr>
+          <a:xfrm>
+            <a:off x="777240" y="3896360"/>
+            <a:ext cx="10241280" cy="0"/>
+          </a:xfrm>
+          <a:prstGeom prst="line">
+            <a:avLst/>
+          </a:prstGeom>
+          <a:noFill/>
+          <a:ln w="6350">
+            <a:solidFill>
+              <a:srgbClr val="C9CDD3"/>
+            </a:solidFill>
+            <a:prstDash val="solid"/>
+          </a:ln>
+        </p:spPr>
+      </p:sp>
+      <p:sp>
+        <p:nvSpPr>
+          <p:cNvPr id="11" name="Text 9"/>
+          <p:cNvSpPr/>
+          <p:nvPr/>
+        </p:nvSpPr>
+        <p:spPr>
+          <a:xfrm>
+            <a:off x="320040" y="3804920"/>
+            <a:ext cx="365760" cy="182880"/>
+          </a:xfrm>
+          <a:prstGeom prst="rect">
+            <a:avLst/>
+          </a:prstGeom>
+          <a:noFill/>
+          <a:ln/>
+        </p:spPr>
+        <p:txBody>
+          <a:bodyPr wrap="square" lIns="0" tIns="0" rIns="0" bIns="0" rtlCol="0" anchor="ctr"/>
+          <a:lstStyle/>
+          <a:p>
+            <a:pPr algn="r" indent="0" marL="0">
+              <a:buNone/>
+            </a:pPr>
+            <a:r>
+              <a:rPr lang="en-US" sz="900" dirty="0">
+                <a:solidFill>
+                  <a:srgbClr val="5E6470"/>
+                </a:solidFill>
+              </a:rPr>
+              <a:t>0.4</a:t>
+            </a:r>
+            <a:endParaRPr lang="en-US" sz="900" dirty="0"/>
+          </a:p>
+        </p:txBody>
+      </p:sp>
+      <p:sp>
+        <p:nvSpPr>
+          <p:cNvPr id="12" name="Shape 10"/>
+          <p:cNvSpPr/>
+          <p:nvPr/>
+        </p:nvSpPr>
+        <p:spPr>
+          <a:xfrm>
+            <a:off x="777240" y="3032760"/>
+            <a:ext cx="10241280" cy="0"/>
+          </a:xfrm>
+          <a:prstGeom prst="line">
+            <a:avLst/>
+          </a:prstGeom>
+          <a:noFill/>
+          <a:ln w="6350">
+            <a:solidFill>
+              <a:srgbClr val="C9CDD3"/>
+            </a:solidFill>
+            <a:prstDash val="solid"/>
+          </a:ln>
+        </p:spPr>
+      </p:sp>
+      <p:sp>
+        <p:nvSpPr>
+          <p:cNvPr id="13" name="Text 11"/>
+          <p:cNvSpPr/>
+          <p:nvPr/>
+        </p:nvSpPr>
+        <p:spPr>
+          <a:xfrm>
+            <a:off x="320040" y="2941320"/>
+            <a:ext cx="365760" cy="182880"/>
+          </a:xfrm>
+          <a:prstGeom prst="rect">
+            <a:avLst/>
+          </a:prstGeom>
+          <a:noFill/>
+          <a:ln/>
+        </p:spPr>
+        <p:txBody>
+          <a:bodyPr wrap="square" lIns="0" tIns="0" rIns="0" bIns="0" rtlCol="0" anchor="ctr"/>
+          <a:lstStyle/>
+          <a:p>
+            <a:pPr algn="r" indent="0" marL="0">
+              <a:buNone/>
+            </a:pPr>
+            <a:r>
+              <a:rPr lang="en-US" sz="900" dirty="0">
+                <a:solidFill>
+                  <a:srgbClr val="5E6470"/>
+                </a:solidFill>
+              </a:rPr>
+              <a:t>0.6</a:t>
+            </a:r>
+            <a:endParaRPr lang="en-US" sz="900" dirty="0"/>
+          </a:p>
+        </p:txBody>
+      </p:sp>
+      <p:sp>
+        <p:nvSpPr>
+          <p:cNvPr id="14" name="Shape 12"/>
+          <p:cNvSpPr/>
+          <p:nvPr/>
+        </p:nvSpPr>
+        <p:spPr>
+          <a:xfrm>
+            <a:off x="777240" y="2169160"/>
+            <a:ext cx="10241280" cy="0"/>
+          </a:xfrm>
+          <a:prstGeom prst="line">
+            <a:avLst/>
+          </a:prstGeom>
+          <a:noFill/>
+          <a:ln w="6350">
+            <a:solidFill>
+              <a:srgbClr val="C9CDD3"/>
+            </a:solidFill>
+            <a:prstDash val="solid"/>
+          </a:ln>
+        </p:spPr>
+      </p:sp>
+      <p:sp>
+        <p:nvSpPr>
+          <p:cNvPr id="15" name="Text 13"/>
+          <p:cNvSpPr/>
+          <p:nvPr/>
+        </p:nvSpPr>
+        <p:spPr>
+          <a:xfrm>
+            <a:off x="320040" y="2077720"/>
+            <a:ext cx="365760" cy="182880"/>
+          </a:xfrm>
+          <a:prstGeom prst="rect">
+            <a:avLst/>
+          </a:prstGeom>
+          <a:noFill/>
+          <a:ln/>
+        </p:spPr>
+        <p:txBody>
+          <a:bodyPr wrap="square" lIns="0" tIns="0" rIns="0" bIns="0" rtlCol="0" anchor="ctr"/>
+          <a:lstStyle/>
+          <a:p>
+            <a:pPr algn="r" indent="0" marL="0">
+              <a:buNone/>
+            </a:pPr>
+            <a:r>
+              <a:rPr lang="en-US" sz="900" dirty="0">
+                <a:solidFill>
+                  <a:srgbClr val="5E6470"/>
+                </a:solidFill>
+              </a:rPr>
+              <a:t>0.8</a:t>
+            </a:r>
+            <a:endParaRPr lang="en-US" sz="900" dirty="0"/>
+          </a:p>
+        </p:txBody>
+      </p:sp>
+      <p:sp>
+        <p:nvSpPr>
+          <p:cNvPr id="16" name="Shape 14"/>
+          <p:cNvSpPr/>
+          <p:nvPr/>
+        </p:nvSpPr>
+        <p:spPr>
+          <a:xfrm>
+            <a:off x="777240" y="3271545"/>
+            <a:ext cx="1143000" cy="2352015"/>
           </a:xfrm>
           <a:prstGeom prst="rect">
             <a:avLst/>
@@ -6474,14 +7208,14 @@
       </p:sp>
       <p:sp>
         <p:nvSpPr>
-          <p:cNvPr id="10" name="Text 8"/>
-          <p:cNvSpPr/>
-          <p:nvPr/>
-        </p:nvSpPr>
-        <p:spPr>
-          <a:xfrm>
-            <a:off x="4910602" y="2487168"/>
-            <a:ext cx="713232" cy="182880"/>
+          <p:cNvPr id="17" name="Text 15"/>
+          <p:cNvSpPr/>
+          <p:nvPr/>
+        </p:nvSpPr>
+        <p:spPr>
+          <a:xfrm>
+            <a:off x="731520" y="3015513"/>
+            <a:ext cx="1234440" cy="201168"/>
           </a:xfrm>
           <a:prstGeom prst="rect">
             <a:avLst/>
@@ -6493,67 +7227,309 @@
           <a:bodyPr wrap="square" lIns="0" tIns="0" rIns="0" bIns="0" rtlCol="0" anchor="ctr"/>
           <a:lstStyle/>
           <a:p>
-            <a:pPr indent="0" marL="0">
-              <a:buNone/>
-            </a:pPr>
-            <a:r>
-              <a:rPr lang="en-US" sz="1100" b="1" dirty="0">
+            <a:pPr algn="ctr" indent="0" marL="0">
+              <a:buNone/>
+            </a:pPr>
+            <a:r>
+              <a:rPr lang="en-US" sz="1000" b="1" dirty="0">
                 <a:solidFill>
                   <a:srgbClr val="111111"/>
                 </a:solidFill>
               </a:rPr>
+              <a:t>0.5447</a:t>
+            </a:r>
+            <a:endParaRPr lang="en-US" sz="1000" dirty="0"/>
+          </a:p>
+        </p:txBody>
+      </p:sp>
+      <p:sp>
+        <p:nvSpPr>
+          <p:cNvPr id="18" name="Text 16"/>
+          <p:cNvSpPr/>
+          <p:nvPr/>
+        </p:nvSpPr>
+        <p:spPr>
+          <a:xfrm>
+            <a:off x="612648" y="5715000"/>
+            <a:ext cx="1472184" cy="384048"/>
+          </a:xfrm>
+          <a:prstGeom prst="rect">
+            <a:avLst/>
+          </a:prstGeom>
+          <a:noFill/>
+          <a:ln/>
+        </p:spPr>
+        <p:txBody>
+          <a:bodyPr wrap="square" lIns="0" tIns="0" rIns="0" bIns="0" rtlCol="0" anchor="ctr">
+            <a:normAutofit/>
+          </a:bodyPr>
+          <a:lstStyle/>
+          <a:p>
+            <a:pPr algn="ctr" indent="0" marL="0">
+              <a:buNone/>
+            </a:pPr>
+            <a:r>
+              <a:rPr lang="en-US" sz="950" dirty="0">
+                <a:solidFill>
+                  <a:srgbClr val="5E6470"/>
+                </a:solidFill>
+              </a:rPr>
+              <a:t>ConvNeXt-T</a:t>
+            </a:r>
+            <a:endParaRPr lang="en-US" sz="950" dirty="0"/>
+          </a:p>
+          <a:p>
+            <a:pPr algn="ctr" indent="0" marL="0">
+              <a:buNone/>
+            </a:pPr>
+            <a:r>
+              <a:rPr lang="en-US" sz="950" dirty="0">
+                <a:solidFill>
+                  <a:srgbClr val="5E6470"/>
+                </a:solidFill>
+              </a:rPr>
+              <a:t>64px</a:t>
+            </a:r>
+            <a:endParaRPr lang="en-US" sz="950" dirty="0"/>
+          </a:p>
+        </p:txBody>
+      </p:sp>
+      <p:sp>
+        <p:nvSpPr>
+          <p:cNvPr id="19" name="Shape 17"/>
+          <p:cNvSpPr/>
+          <p:nvPr/>
+        </p:nvSpPr>
+        <p:spPr>
+          <a:xfrm>
+            <a:off x="2487168" y="2491283"/>
+            <a:ext cx="1143000" cy="3132277"/>
+          </a:xfrm>
+          <a:prstGeom prst="rect">
+            <a:avLst/>
+          </a:prstGeom>
+          <a:solidFill>
+            <a:srgbClr val="FF6B35"/>
+          </a:solidFill>
+          <a:ln w="12700">
+            <a:solidFill>
+              <a:srgbClr val="FF6B35"/>
+            </a:solidFill>
+            <a:prstDash val="solid"/>
+          </a:ln>
+        </p:spPr>
+      </p:sp>
+      <p:sp>
+        <p:nvSpPr>
+          <p:cNvPr id="20" name="Text 18"/>
+          <p:cNvSpPr/>
+          <p:nvPr/>
+        </p:nvSpPr>
+        <p:spPr>
+          <a:xfrm>
+            <a:off x="2441448" y="2235251"/>
+            <a:ext cx="1234440" cy="201168"/>
+          </a:xfrm>
+          <a:prstGeom prst="rect">
+            <a:avLst/>
+          </a:prstGeom>
+          <a:noFill/>
+          <a:ln/>
+        </p:spPr>
+        <p:txBody>
+          <a:bodyPr wrap="square" lIns="0" tIns="0" rIns="0" bIns="0" rtlCol="0" anchor="ctr"/>
+          <a:lstStyle/>
+          <a:p>
+            <a:pPr algn="ctr" indent="0" marL="0">
+              <a:buNone/>
+            </a:pPr>
+            <a:r>
+              <a:rPr lang="en-US" sz="1000" b="1" dirty="0">
+                <a:solidFill>
+                  <a:srgbClr val="111111"/>
+                </a:solidFill>
+              </a:rPr>
+              <a:t>0.7254</a:t>
+            </a:r>
+            <a:endParaRPr lang="en-US" sz="1000" dirty="0"/>
+          </a:p>
+        </p:txBody>
+      </p:sp>
+      <p:sp>
+        <p:nvSpPr>
+          <p:cNvPr id="21" name="Text 19"/>
+          <p:cNvSpPr/>
+          <p:nvPr/>
+        </p:nvSpPr>
+        <p:spPr>
+          <a:xfrm>
+            <a:off x="2322576" y="5715000"/>
+            <a:ext cx="1472184" cy="384048"/>
+          </a:xfrm>
+          <a:prstGeom prst="rect">
+            <a:avLst/>
+          </a:prstGeom>
+          <a:noFill/>
+          <a:ln/>
+        </p:spPr>
+        <p:txBody>
+          <a:bodyPr wrap="square" lIns="0" tIns="0" rIns="0" bIns="0" rtlCol="0" anchor="ctr">
+            <a:normAutofit/>
+          </a:bodyPr>
+          <a:lstStyle/>
+          <a:p>
+            <a:pPr algn="ctr" indent="0" marL="0">
+              <a:buNone/>
+            </a:pPr>
+            <a:r>
+              <a:rPr lang="en-US" sz="950" dirty="0">
+                <a:solidFill>
+                  <a:srgbClr val="5E6470"/>
+                </a:solidFill>
+              </a:rPr>
+              <a:t>ConvNeXt-T</a:t>
+            </a:r>
+            <a:endParaRPr lang="en-US" sz="950" dirty="0"/>
+          </a:p>
+          <a:p>
+            <a:pPr algn="ctr" indent="0" marL="0">
+              <a:buNone/>
+            </a:pPr>
+            <a:r>
+              <a:rPr lang="en-US" sz="950" dirty="0">
+                <a:solidFill>
+                  <a:srgbClr val="5E6470"/>
+                </a:solidFill>
+              </a:rPr>
+              <a:t>128px</a:t>
+            </a:r>
+            <a:endParaRPr lang="en-US" sz="950" dirty="0"/>
+          </a:p>
+        </p:txBody>
+      </p:sp>
+      <p:sp>
+        <p:nvSpPr>
+          <p:cNvPr id="22" name="Shape 20"/>
+          <p:cNvSpPr/>
+          <p:nvPr/>
+        </p:nvSpPr>
+        <p:spPr>
+          <a:xfrm>
+            <a:off x="4197096" y="2085823"/>
+            <a:ext cx="1143000" cy="3537737"/>
+          </a:xfrm>
+          <a:prstGeom prst="rect">
+            <a:avLst/>
+          </a:prstGeom>
+          <a:solidFill>
+            <a:srgbClr val="FF6B35"/>
+          </a:solidFill>
+          <a:ln w="12700">
+            <a:solidFill>
+              <a:srgbClr val="FF6B35"/>
+            </a:solidFill>
+            <a:prstDash val="solid"/>
+          </a:ln>
+        </p:spPr>
+      </p:sp>
+      <p:sp>
+        <p:nvSpPr>
+          <p:cNvPr id="23" name="Text 21"/>
+          <p:cNvSpPr/>
+          <p:nvPr/>
+        </p:nvSpPr>
+        <p:spPr>
+          <a:xfrm>
+            <a:off x="4151376" y="1829791"/>
+            <a:ext cx="1234440" cy="201168"/>
+          </a:xfrm>
+          <a:prstGeom prst="rect">
+            <a:avLst/>
+          </a:prstGeom>
+          <a:noFill/>
+          <a:ln/>
+        </p:spPr>
+        <p:txBody>
+          <a:bodyPr wrap="square" lIns="0" tIns="0" rIns="0" bIns="0" rtlCol="0" anchor="ctr"/>
+          <a:lstStyle/>
+          <a:p>
+            <a:pPr algn="ctr" indent="0" marL="0">
+              <a:buNone/>
+            </a:pPr>
+            <a:r>
+              <a:rPr lang="en-US" sz="1000" b="1" dirty="0">
+                <a:solidFill>
+                  <a:srgbClr val="111111"/>
+                </a:solidFill>
+              </a:rPr>
               <a:t>0.8193</a:t>
             </a:r>
-            <a:endParaRPr lang="en-US" sz="1100" dirty="0"/>
-          </a:p>
-        </p:txBody>
-      </p:sp>
-      <p:sp>
-        <p:nvSpPr>
-          <p:cNvPr id="11" name="Text 9"/>
-          <p:cNvSpPr/>
-          <p:nvPr/>
-        </p:nvSpPr>
-        <p:spPr>
-          <a:xfrm>
-            <a:off x="1600200" y="2971800"/>
-            <a:ext cx="731520" cy="201168"/>
-          </a:xfrm>
-          <a:prstGeom prst="rect">
-            <a:avLst/>
-          </a:prstGeom>
-          <a:noFill/>
-          <a:ln/>
-        </p:spPr>
-        <p:txBody>
-          <a:bodyPr wrap="square" lIns="0" tIns="0" rIns="0" bIns="0" rtlCol="0" anchor="ctr"/>
-          <a:lstStyle/>
-          <a:p>
-            <a:pPr indent="0" marL="0">
-              <a:buNone/>
-            </a:pPr>
-            <a:r>
-              <a:rPr lang="en-US" sz="1000" dirty="0">
+            <a:endParaRPr lang="en-US" sz="1000" dirty="0"/>
+          </a:p>
+        </p:txBody>
+      </p:sp>
+      <p:sp>
+        <p:nvSpPr>
+          <p:cNvPr id="24" name="Text 22"/>
+          <p:cNvSpPr/>
+          <p:nvPr/>
+        </p:nvSpPr>
+        <p:spPr>
+          <a:xfrm>
+            <a:off x="4032504" y="5715000"/>
+            <a:ext cx="1472184" cy="384048"/>
+          </a:xfrm>
+          <a:prstGeom prst="rect">
+            <a:avLst/>
+          </a:prstGeom>
+          <a:noFill/>
+          <a:ln/>
+        </p:spPr>
+        <p:txBody>
+          <a:bodyPr wrap="square" lIns="0" tIns="0" rIns="0" bIns="0" rtlCol="0" anchor="ctr">
+            <a:normAutofit/>
+          </a:bodyPr>
+          <a:lstStyle/>
+          <a:p>
+            <a:pPr algn="ctr" indent="0" marL="0">
+              <a:buNone/>
+            </a:pPr>
+            <a:r>
+              <a:rPr lang="en-US" sz="950" dirty="0">
                 <a:solidFill>
                   <a:srgbClr val="5E6470"/>
                 </a:solidFill>
               </a:rPr>
-              <a:t>Ours</a:t>
-            </a:r>
-            <a:endParaRPr lang="en-US" sz="1000" dirty="0"/>
-          </a:p>
-        </p:txBody>
-      </p:sp>
-      <p:sp>
-        <p:nvSpPr>
-          <p:cNvPr id="12" name="Shape 10"/>
-          <p:cNvSpPr/>
-          <p:nvPr/>
-        </p:nvSpPr>
-        <p:spPr>
-          <a:xfrm>
-            <a:off x="1600200" y="3410712"/>
-            <a:ext cx="1489862" cy="566928"/>
+              <a:t>ConvNeXt-T</a:t>
+            </a:r>
+            <a:endParaRPr lang="en-US" sz="950" dirty="0"/>
+          </a:p>
+          <a:p>
+            <a:pPr algn="ctr" indent="0" marL="0">
+              <a:buNone/>
+            </a:pPr>
+            <a:r>
+              <a:rPr lang="en-US" sz="950" dirty="0">
+                <a:solidFill>
+                  <a:srgbClr val="5E6470"/>
+                </a:solidFill>
+              </a:rPr>
+              <a:t>256px</a:t>
+            </a:r>
+            <a:endParaRPr lang="en-US" sz="950" dirty="0"/>
+          </a:p>
+        </p:txBody>
+      </p:sp>
+      <p:sp>
+        <p:nvSpPr>
+          <p:cNvPr id="25" name="Shape 23"/>
+          <p:cNvSpPr/>
+          <p:nvPr/>
+        </p:nvSpPr>
+        <p:spPr>
+          <a:xfrm>
+            <a:off x="5907024" y="4145940"/>
+            <a:ext cx="1143000" cy="1477620"/>
           </a:xfrm>
           <a:prstGeom prst="rect">
             <a:avLst/>
@@ -6571,14 +7547,14 @@
       </p:sp>
       <p:sp>
         <p:nvSpPr>
-          <p:cNvPr id="13" name="Text 11"/>
-          <p:cNvSpPr/>
-          <p:nvPr/>
-        </p:nvSpPr>
-        <p:spPr>
-          <a:xfrm>
-            <a:off x="3154070" y="3566160"/>
-            <a:ext cx="713232" cy="182880"/>
+          <p:cNvPr id="26" name="Text 24"/>
+          <p:cNvSpPr/>
+          <p:nvPr/>
+        </p:nvSpPr>
+        <p:spPr>
+          <a:xfrm>
+            <a:off x="5861304" y="3889908"/>
+            <a:ext cx="1234440" cy="201168"/>
           </a:xfrm>
           <a:prstGeom prst="rect">
             <a:avLst/>
@@ -6590,79 +7566,93 @@
           <a:bodyPr wrap="square" lIns="0" tIns="0" rIns="0" bIns="0" rtlCol="0" anchor="ctr"/>
           <a:lstStyle/>
           <a:p>
-            <a:pPr indent="0" marL="0">
-              <a:buNone/>
-            </a:pPr>
-            <a:r>
-              <a:rPr lang="en-US" sz="1100" b="1" dirty="0">
+            <a:pPr algn="ctr" indent="0" marL="0">
+              <a:buNone/>
+            </a:pPr>
+            <a:r>
+              <a:rPr lang="en-US" sz="1000" b="1" dirty="0">
                 <a:solidFill>
                   <a:srgbClr val="111111"/>
                 </a:solidFill>
               </a:rPr>
-              <a:t>0.3760</a:t>
-            </a:r>
-            <a:endParaRPr lang="en-US" sz="1100" dirty="0"/>
-          </a:p>
-        </p:txBody>
-      </p:sp>
-      <p:sp>
-        <p:nvSpPr>
-          <p:cNvPr id="14" name="Text 12"/>
-          <p:cNvSpPr/>
-          <p:nvPr/>
-        </p:nvSpPr>
-        <p:spPr>
-          <a:xfrm>
-            <a:off x="1600200" y="4050792"/>
-            <a:ext cx="1097280" cy="201168"/>
-          </a:xfrm>
-          <a:prstGeom prst="rect">
-            <a:avLst/>
-          </a:prstGeom>
-          <a:noFill/>
-          <a:ln/>
-        </p:spPr>
-        <p:txBody>
-          <a:bodyPr wrap="square" lIns="0" tIns="0" rIns="0" bIns="0" rtlCol="0" anchor="ctr"/>
-          <a:lstStyle/>
-          <a:p>
-            <a:pPr indent="0" marL="0">
-              <a:buNone/>
-            </a:pPr>
-            <a:r>
-              <a:rPr lang="en-US" sz="1000" dirty="0">
+              <a:t>0.3422</a:t>
+            </a:r>
+            <a:endParaRPr lang="en-US" sz="1000" dirty="0"/>
+          </a:p>
+        </p:txBody>
+      </p:sp>
+      <p:sp>
+        <p:nvSpPr>
+          <p:cNvPr id="27" name="Text 25"/>
+          <p:cNvSpPr/>
+          <p:nvPr/>
+        </p:nvSpPr>
+        <p:spPr>
+          <a:xfrm>
+            <a:off x="5742432" y="5715000"/>
+            <a:ext cx="1472184" cy="384048"/>
+          </a:xfrm>
+          <a:prstGeom prst="rect">
+            <a:avLst/>
+          </a:prstGeom>
+          <a:noFill/>
+          <a:ln/>
+        </p:spPr>
+        <p:txBody>
+          <a:bodyPr wrap="square" lIns="0" tIns="0" rIns="0" bIns="0" rtlCol="0" anchor="ctr">
+            <a:normAutofit/>
+          </a:bodyPr>
+          <a:lstStyle/>
+          <a:p>
+            <a:pPr algn="ctr" indent="0" marL="0">
+              <a:buNone/>
+            </a:pPr>
+            <a:r>
+              <a:rPr lang="en-US" sz="950" dirty="0">
                 <a:solidFill>
                   <a:srgbClr val="5E6470"/>
                 </a:solidFill>
               </a:rPr>
-              <a:t>PatentNet</a:t>
-            </a:r>
-            <a:endParaRPr lang="en-US" sz="1000" dirty="0"/>
-          </a:p>
-        </p:txBody>
-      </p:sp>
-      <p:sp>
-        <p:nvSpPr>
-          <p:cNvPr id="15" name="Shape 13"/>
-          <p:cNvSpPr/>
-          <p:nvPr/>
-        </p:nvSpPr>
-        <p:spPr>
-          <a:xfrm>
-            <a:off x="6400800" y="2057400"/>
-            <a:ext cx="4983480" cy="2606040"/>
-          </a:xfrm>
-          <a:prstGeom prst="roundRect">
-            <a:avLst>
-              <a:gd name="adj" fmla="val 1754"/>
-            </a:avLst>
+              <a:t>ResNet-18</a:t>
+            </a:r>
+            <a:endParaRPr lang="en-US" sz="950" dirty="0"/>
+          </a:p>
+          <a:p>
+            <a:pPr algn="ctr" indent="0" marL="0">
+              <a:buNone/>
+            </a:pPr>
+            <a:r>
+              <a:rPr lang="en-US" sz="950" dirty="0">
+                <a:solidFill>
+                  <a:srgbClr val="5E6470"/>
+                </a:solidFill>
+              </a:rPr>
+              <a:t>256px</a:t>
+            </a:r>
+            <a:endParaRPr lang="en-US" sz="950" dirty="0"/>
+          </a:p>
+        </p:txBody>
+      </p:sp>
+      <p:sp>
+        <p:nvSpPr>
+          <p:cNvPr id="28" name="Shape 26"/>
+          <p:cNvSpPr/>
+          <p:nvPr/>
+        </p:nvSpPr>
+        <p:spPr>
+          <a:xfrm>
+            <a:off x="7616952" y="3958539"/>
+            <a:ext cx="1143000" cy="1665021"/>
+          </a:xfrm>
+          <a:prstGeom prst="rect">
+            <a:avLst/>
           </a:prstGeom>
           <a:solidFill>
-            <a:srgbClr val="F2F3F5"/>
+            <a:srgbClr val="2166AC"/>
           </a:solidFill>
           <a:ln w="12700">
             <a:solidFill>
-              <a:srgbClr val="F2F3F5"/>
+              <a:srgbClr val="2166AC"/>
             </a:solidFill>
             <a:prstDash val="solid"/>
           </a:ln>
@@ -6670,14 +7660,14 @@
       </p:sp>
       <p:sp>
         <p:nvSpPr>
-          <p:cNvPr id="16" name="Text 14"/>
-          <p:cNvSpPr/>
-          <p:nvPr/>
-        </p:nvSpPr>
-        <p:spPr>
-          <a:xfrm>
-            <a:off x="6720840" y="2313432"/>
-            <a:ext cx="594360" cy="228600"/>
+          <p:cNvPr id="29" name="Text 27"/>
+          <p:cNvSpPr/>
+          <p:nvPr/>
+        </p:nvSpPr>
+        <p:spPr>
+          <a:xfrm>
+            <a:off x="7571232" y="3702507"/>
+            <a:ext cx="1234440" cy="201168"/>
           </a:xfrm>
           <a:prstGeom prst="rect">
             <a:avLst/>
@@ -6689,34 +7679,201 @@
           <a:bodyPr wrap="square" lIns="0" tIns="0" rIns="0" bIns="0" rtlCol="0" anchor="ctr"/>
           <a:lstStyle/>
           <a:p>
-            <a:pPr indent="0" marL="0">
-              <a:buNone/>
-            </a:pPr>
-            <a:r>
-              <a:rPr lang="en-US" sz="1100" b="1" dirty="0">
+            <a:pPr algn="ctr" indent="0" marL="0">
+              <a:buNone/>
+            </a:pPr>
+            <a:r>
+              <a:rPr lang="en-US" sz="1000" b="1" dirty="0">
+                <a:solidFill>
+                  <a:srgbClr val="111111"/>
+                </a:solidFill>
+              </a:rPr>
+              <a:t>0.3856</a:t>
+            </a:r>
+            <a:endParaRPr lang="en-US" sz="1000" dirty="0"/>
+          </a:p>
+        </p:txBody>
+      </p:sp>
+      <p:sp>
+        <p:nvSpPr>
+          <p:cNvPr id="30" name="Text 28"/>
+          <p:cNvSpPr/>
+          <p:nvPr/>
+        </p:nvSpPr>
+        <p:spPr>
+          <a:xfrm>
+            <a:off x="7452360" y="5715000"/>
+            <a:ext cx="1472184" cy="384048"/>
+          </a:xfrm>
+          <a:prstGeom prst="rect">
+            <a:avLst/>
+          </a:prstGeom>
+          <a:noFill/>
+          <a:ln/>
+        </p:spPr>
+        <p:txBody>
+          <a:bodyPr wrap="square" lIns="0" tIns="0" rIns="0" bIns="0" rtlCol="0" anchor="ctr">
+            <a:normAutofit/>
+          </a:bodyPr>
+          <a:lstStyle/>
+          <a:p>
+            <a:pPr algn="ctr" indent="0" marL="0">
+              <a:buNone/>
+            </a:pPr>
+            <a:r>
+              <a:rPr lang="en-US" sz="950" dirty="0">
                 <a:solidFill>
                   <a:srgbClr val="5E6470"/>
                 </a:solidFill>
               </a:rPr>
-              <a:t>mAP</a:t>
-            </a:r>
-            <a:endParaRPr lang="en-US" sz="1100" dirty="0"/>
-          </a:p>
-        </p:txBody>
-      </p:sp>
-      <p:sp>
-        <p:nvSpPr>
-          <p:cNvPr id="17" name="Shape 15"/>
-          <p:cNvSpPr/>
-          <p:nvPr/>
-        </p:nvSpPr>
-        <p:spPr>
-          <a:xfrm>
-            <a:off x="7360920" y="2331720"/>
-            <a:ext cx="2572786" cy="566928"/>
-          </a:xfrm>
-          <a:prstGeom prst="rect">
-            <a:avLst/>
+              <a:t>ResNet-50</a:t>
+            </a:r>
+            <a:endParaRPr lang="en-US" sz="950" dirty="0"/>
+          </a:p>
+          <a:p>
+            <a:pPr algn="ctr" indent="0" marL="0">
+              <a:buNone/>
+            </a:pPr>
+            <a:r>
+              <a:rPr lang="en-US" sz="950" dirty="0">
+                <a:solidFill>
+                  <a:srgbClr val="5E6470"/>
+                </a:solidFill>
+              </a:rPr>
+              <a:t>256px</a:t>
+            </a:r>
+            <a:endParaRPr lang="en-US" sz="950" dirty="0"/>
+          </a:p>
+        </p:txBody>
+      </p:sp>
+      <p:sp>
+        <p:nvSpPr>
+          <p:cNvPr id="31" name="Shape 29"/>
+          <p:cNvSpPr/>
+          <p:nvPr/>
+        </p:nvSpPr>
+        <p:spPr>
+          <a:xfrm>
+            <a:off x="9326880" y="3629076"/>
+            <a:ext cx="1143000" cy="1994484"/>
+          </a:xfrm>
+          <a:prstGeom prst="rect">
+            <a:avLst/>
+          </a:prstGeom>
+          <a:solidFill>
+            <a:srgbClr val="2166AC"/>
+          </a:solidFill>
+          <a:ln w="12700">
+            <a:solidFill>
+              <a:srgbClr val="2166AC"/>
+            </a:solidFill>
+            <a:prstDash val="solid"/>
+          </a:ln>
+        </p:spPr>
+      </p:sp>
+      <p:sp>
+        <p:nvSpPr>
+          <p:cNvPr id="32" name="Text 30"/>
+          <p:cNvSpPr/>
+          <p:nvPr/>
+        </p:nvSpPr>
+        <p:spPr>
+          <a:xfrm>
+            <a:off x="9281160" y="3373044"/>
+            <a:ext cx="1234440" cy="201168"/>
+          </a:xfrm>
+          <a:prstGeom prst="rect">
+            <a:avLst/>
+          </a:prstGeom>
+          <a:noFill/>
+          <a:ln/>
+        </p:spPr>
+        <p:txBody>
+          <a:bodyPr wrap="square" lIns="0" tIns="0" rIns="0" bIns="0" rtlCol="0" anchor="ctr"/>
+          <a:lstStyle/>
+          <a:p>
+            <a:pPr algn="ctr" indent="0" marL="0">
+              <a:buNone/>
+            </a:pPr>
+            <a:r>
+              <a:rPr lang="en-US" sz="1000" b="1" dirty="0">
+                <a:solidFill>
+                  <a:srgbClr val="111111"/>
+                </a:solidFill>
+              </a:rPr>
+              <a:t>0.4619</a:t>
+            </a:r>
+            <a:endParaRPr lang="en-US" sz="1000" dirty="0"/>
+          </a:p>
+        </p:txBody>
+      </p:sp>
+      <p:sp>
+        <p:nvSpPr>
+          <p:cNvPr id="33" name="Text 31"/>
+          <p:cNvSpPr/>
+          <p:nvPr/>
+        </p:nvSpPr>
+        <p:spPr>
+          <a:xfrm>
+            <a:off x="9162288" y="5715000"/>
+            <a:ext cx="1472184" cy="384048"/>
+          </a:xfrm>
+          <a:prstGeom prst="rect">
+            <a:avLst/>
+          </a:prstGeom>
+          <a:noFill/>
+          <a:ln/>
+        </p:spPr>
+        <p:txBody>
+          <a:bodyPr wrap="square" lIns="0" tIns="0" rIns="0" bIns="0" rtlCol="0" anchor="ctr">
+            <a:normAutofit/>
+          </a:bodyPr>
+          <a:lstStyle/>
+          <a:p>
+            <a:pPr algn="ctr" indent="0" marL="0">
+              <a:buNone/>
+            </a:pPr>
+            <a:r>
+              <a:rPr lang="en-US" sz="950" dirty="0">
+                <a:solidFill>
+                  <a:srgbClr val="5E6470"/>
+                </a:solidFill>
+              </a:rPr>
+              <a:t>ResNet-152</a:t>
+            </a:r>
+            <a:endParaRPr lang="en-US" sz="950" dirty="0"/>
+          </a:p>
+          <a:p>
+            <a:pPr algn="ctr" indent="0" marL="0">
+              <a:buNone/>
+            </a:pPr>
+            <a:r>
+              <a:rPr lang="en-US" sz="950" dirty="0">
+                <a:solidFill>
+                  <a:srgbClr val="5E6470"/>
+                </a:solidFill>
+              </a:rPr>
+              <a:t>256px</a:t>
+            </a:r>
+            <a:endParaRPr lang="en-US" sz="950" dirty="0"/>
+          </a:p>
+        </p:txBody>
+      </p:sp>
+      <p:sp>
+        <p:nvSpPr>
+          <p:cNvPr id="34" name="Shape 32"/>
+          <p:cNvSpPr/>
+          <p:nvPr/>
+        </p:nvSpPr>
+        <p:spPr>
+          <a:xfrm>
+            <a:off x="9052560" y="1389888"/>
+            <a:ext cx="2057400" cy="310896"/>
+          </a:xfrm>
+          <a:prstGeom prst="roundRect">
+            <a:avLst>
+              <a:gd name="adj" fmla="val 23529"/>
+            </a:avLst>
           </a:prstGeom>
           <a:solidFill>
             <a:srgbClr val="FF6B35"/>
@@ -6731,327 +7888,14 @@
       </p:sp>
       <p:sp>
         <p:nvSpPr>
-          <p:cNvPr id="18" name="Text 16"/>
-          <p:cNvSpPr/>
-          <p:nvPr/>
-        </p:nvSpPr>
-        <p:spPr>
-          <a:xfrm>
-            <a:off x="9997714" y="2487168"/>
-            <a:ext cx="713232" cy="182880"/>
-          </a:xfrm>
-          <a:prstGeom prst="rect">
-            <a:avLst/>
-          </a:prstGeom>
-          <a:noFill/>
-          <a:ln/>
-        </p:spPr>
-        <p:txBody>
-          <a:bodyPr wrap="square" lIns="0" tIns="0" rIns="0" bIns="0" rtlCol="0" anchor="ctr"/>
-          <a:lstStyle/>
-          <a:p>
-            <a:pPr indent="0" marL="0">
-              <a:buNone/>
-            </a:pPr>
-            <a:r>
-              <a:rPr lang="en-US" sz="1100" b="1" dirty="0">
-                <a:solidFill>
-                  <a:srgbClr val="111111"/>
-                </a:solidFill>
-              </a:rPr>
-              <a:t>0.6493</a:t>
-            </a:r>
-            <a:endParaRPr lang="en-US" sz="1100" dirty="0"/>
-          </a:p>
-        </p:txBody>
-      </p:sp>
-      <p:sp>
-        <p:nvSpPr>
-          <p:cNvPr id="19" name="Text 17"/>
-          <p:cNvSpPr/>
-          <p:nvPr/>
-        </p:nvSpPr>
-        <p:spPr>
-          <a:xfrm>
-            <a:off x="7360920" y="2971800"/>
-            <a:ext cx="731520" cy="201168"/>
-          </a:xfrm>
-          <a:prstGeom prst="rect">
-            <a:avLst/>
-          </a:prstGeom>
-          <a:noFill/>
-          <a:ln/>
-        </p:spPr>
-        <p:txBody>
-          <a:bodyPr wrap="square" lIns="0" tIns="0" rIns="0" bIns="0" rtlCol="0" anchor="ctr"/>
-          <a:lstStyle/>
-          <a:p>
-            <a:pPr indent="0" marL="0">
-              <a:buNone/>
-            </a:pPr>
-            <a:r>
-              <a:rPr lang="en-US" sz="1000" dirty="0">
-                <a:solidFill>
-                  <a:srgbClr val="5E6470"/>
-                </a:solidFill>
-              </a:rPr>
-              <a:t>Ours</a:t>
-            </a:r>
-            <a:endParaRPr lang="en-US" sz="1000" dirty="0"/>
-          </a:p>
-        </p:txBody>
-      </p:sp>
-      <p:sp>
-        <p:nvSpPr>
-          <p:cNvPr id="20" name="Shape 18"/>
-          <p:cNvSpPr/>
-          <p:nvPr/>
-        </p:nvSpPr>
-        <p:spPr>
-          <a:xfrm>
-            <a:off x="7360920" y="3410712"/>
-            <a:ext cx="1038149" cy="566928"/>
-          </a:xfrm>
-          <a:prstGeom prst="rect">
-            <a:avLst/>
-          </a:prstGeom>
-          <a:solidFill>
-            <a:srgbClr val="2166AC"/>
-          </a:solidFill>
-          <a:ln w="12700">
-            <a:solidFill>
-              <a:srgbClr val="2166AC"/>
-            </a:solidFill>
-            <a:prstDash val="solid"/>
-          </a:ln>
-        </p:spPr>
-      </p:sp>
-      <p:sp>
-        <p:nvSpPr>
-          <p:cNvPr id="21" name="Text 19"/>
-          <p:cNvSpPr/>
-          <p:nvPr/>
-        </p:nvSpPr>
-        <p:spPr>
-          <a:xfrm>
-            <a:off x="8463077" y="3566160"/>
-            <a:ext cx="713232" cy="182880"/>
-          </a:xfrm>
-          <a:prstGeom prst="rect">
-            <a:avLst/>
-          </a:prstGeom>
-          <a:noFill/>
-          <a:ln/>
-        </p:spPr>
-        <p:txBody>
-          <a:bodyPr wrap="square" lIns="0" tIns="0" rIns="0" bIns="0" rtlCol="0" anchor="ctr"/>
-          <a:lstStyle/>
-          <a:p>
-            <a:pPr indent="0" marL="0">
-              <a:buNone/>
-            </a:pPr>
-            <a:r>
-              <a:rPr lang="en-US" sz="1100" b="1" dirty="0">
-                <a:solidFill>
-                  <a:srgbClr val="111111"/>
-                </a:solidFill>
-              </a:rPr>
-              <a:t>0.2620</a:t>
-            </a:r>
-            <a:endParaRPr lang="en-US" sz="1100" dirty="0"/>
-          </a:p>
-        </p:txBody>
-      </p:sp>
-      <p:sp>
-        <p:nvSpPr>
-          <p:cNvPr id="22" name="Text 20"/>
-          <p:cNvSpPr/>
-          <p:nvPr/>
-        </p:nvSpPr>
-        <p:spPr>
-          <a:xfrm>
-            <a:off x="7360920" y="4050792"/>
-            <a:ext cx="1097280" cy="201168"/>
-          </a:xfrm>
-          <a:prstGeom prst="rect">
-            <a:avLst/>
-          </a:prstGeom>
-          <a:noFill/>
-          <a:ln/>
-        </p:spPr>
-        <p:txBody>
-          <a:bodyPr wrap="square" lIns="0" tIns="0" rIns="0" bIns="0" rtlCol="0" anchor="ctr"/>
-          <a:lstStyle/>
-          <a:p>
-            <a:pPr indent="0" marL="0">
-              <a:buNone/>
-            </a:pPr>
-            <a:r>
-              <a:rPr lang="en-US" sz="1000" dirty="0">
-                <a:solidFill>
-                  <a:srgbClr val="5E6470"/>
-                </a:solidFill>
-              </a:rPr>
-              <a:t>PatentNet</a:t>
-            </a:r>
-            <a:endParaRPr lang="en-US" sz="1000" dirty="0"/>
-          </a:p>
-        </p:txBody>
-      </p:sp>
-      <p:sp>
-        <p:nvSpPr>
-          <p:cNvPr id="23" name="Text 21"/>
-          <p:cNvSpPr/>
-          <p:nvPr/>
-        </p:nvSpPr>
-        <p:spPr>
-          <a:xfrm>
-            <a:off x="868680" y="5074920"/>
-            <a:ext cx="2194560" cy="320040"/>
-          </a:xfrm>
-          <a:prstGeom prst="rect">
-            <a:avLst/>
-          </a:prstGeom>
-          <a:noFill/>
-          <a:ln/>
-        </p:spPr>
-        <p:txBody>
-          <a:bodyPr wrap="square" lIns="0" tIns="0" rIns="0" bIns="0" rtlCol="0" anchor="ctr"/>
-          <a:lstStyle/>
-          <a:p>
-            <a:pPr indent="0" marL="0">
-              <a:buNone/>
-            </a:pPr>
-            <a:r>
-              <a:rPr lang="en-US" sz="1700" b="1" dirty="0">
-                <a:solidFill>
-                  <a:srgbClr val="FF6B35"/>
-                </a:solidFill>
-              </a:rPr>
-              <a:t>Acc@1 = 0.9312</a:t>
-            </a:r>
-            <a:endParaRPr lang="en-US" sz="1700" dirty="0"/>
-          </a:p>
-        </p:txBody>
-      </p:sp>
-      <p:sp>
-        <p:nvSpPr>
-          <p:cNvPr id="24" name="Text 22"/>
-          <p:cNvSpPr/>
-          <p:nvPr/>
-        </p:nvSpPr>
-        <p:spPr>
-          <a:xfrm>
-            <a:off x="3291840" y="5074920"/>
-            <a:ext cx="2194560" cy="320040"/>
-          </a:xfrm>
-          <a:prstGeom prst="rect">
-            <a:avLst/>
-          </a:prstGeom>
-          <a:noFill/>
-          <a:ln/>
-        </p:spPr>
-        <p:txBody>
-          <a:bodyPr wrap="square" lIns="0" tIns="0" rIns="0" bIns="0" rtlCol="0" anchor="ctr"/>
-          <a:lstStyle/>
-          <a:p>
-            <a:pPr indent="0" marL="0">
-              <a:buNone/>
-            </a:pPr>
-            <a:r>
-              <a:rPr lang="en-US" sz="1700" b="1" dirty="0">
-                <a:solidFill>
-                  <a:srgbClr val="FF6B35"/>
-                </a:solidFill>
-              </a:rPr>
-              <a:t>Acc@20 = 0.9906</a:t>
-            </a:r>
-            <a:endParaRPr lang="en-US" sz="1700" dirty="0"/>
-          </a:p>
-        </p:txBody>
-      </p:sp>
-      <p:sp>
-        <p:nvSpPr>
-          <p:cNvPr id="25" name="Text 23"/>
-          <p:cNvSpPr/>
-          <p:nvPr/>
-        </p:nvSpPr>
-        <p:spPr>
-          <a:xfrm>
-            <a:off x="6629400" y="5074920"/>
-            <a:ext cx="2194560" cy="320040"/>
-          </a:xfrm>
-          <a:prstGeom prst="rect">
-            <a:avLst/>
-          </a:prstGeom>
-          <a:noFill/>
-          <a:ln/>
-        </p:spPr>
-        <p:txBody>
-          <a:bodyPr wrap="square" lIns="0" tIns="0" rIns="0" bIns="0" rtlCol="0" anchor="ctr"/>
-          <a:lstStyle/>
-          <a:p>
-            <a:pPr indent="0" marL="0">
-              <a:buNone/>
-            </a:pPr>
-            <a:r>
-              <a:rPr lang="en-US" sz="1700" b="1" dirty="0">
-                <a:solidFill>
-                  <a:srgbClr val="FF6B35"/>
-                </a:solidFill>
-              </a:rPr>
-              <a:t>Acc@1 = 0.8088</a:t>
-            </a:r>
-            <a:endParaRPr lang="en-US" sz="1700" dirty="0"/>
-          </a:p>
-        </p:txBody>
-      </p:sp>
-      <p:sp>
-        <p:nvSpPr>
-          <p:cNvPr id="26" name="Text 24"/>
-          <p:cNvSpPr/>
-          <p:nvPr/>
-        </p:nvSpPr>
-        <p:spPr>
-          <a:xfrm>
-            <a:off x="9052560" y="5074920"/>
-            <a:ext cx="2194560" cy="320040"/>
-          </a:xfrm>
-          <a:prstGeom prst="rect">
-            <a:avLst/>
-          </a:prstGeom>
-          <a:noFill/>
-          <a:ln/>
-        </p:spPr>
-        <p:txBody>
-          <a:bodyPr wrap="square" lIns="0" tIns="0" rIns="0" bIns="0" rtlCol="0" anchor="ctr"/>
-          <a:lstStyle/>
-          <a:p>
-            <a:pPr indent="0" marL="0">
-              <a:buNone/>
-            </a:pPr>
-            <a:r>
-              <a:rPr lang="en-US" sz="1700" b="1" dirty="0">
-                <a:solidFill>
-                  <a:srgbClr val="FF6B35"/>
-                </a:solidFill>
-              </a:rPr>
-              <a:t>Acc@20 = 0.9711</a:t>
-            </a:r>
-            <a:endParaRPr lang="en-US" sz="1700" dirty="0"/>
-          </a:p>
-        </p:txBody>
-      </p:sp>
-      <p:sp>
-        <p:nvSpPr>
-          <p:cNvPr id="27" name="Text 25"/>
-          <p:cNvSpPr/>
-          <p:nvPr/>
-        </p:nvSpPr>
-        <p:spPr>
-          <a:xfrm>
-            <a:off x="2377440" y="6510528"/>
-            <a:ext cx="8229600" cy="164592"/>
+          <p:cNvPr id="35" name="Text 33"/>
+          <p:cNvSpPr/>
+          <p:nvPr/>
+        </p:nvSpPr>
+        <p:spPr>
+          <a:xfrm>
+            <a:off x="9116568" y="1453896"/>
+            <a:ext cx="1929384" cy="146304"/>
           </a:xfrm>
           <a:prstGeom prst="rect">
             <a:avLst/>
@@ -7069,6 +7913,44 @@
               <a:buNone/>
             </a:pPr>
             <a:r>
+              <a:rPr lang="en-US" sz="900" b="1" dirty="0">
+                <a:solidFill>
+                  <a:srgbClr val="FFFFFF"/>
+                </a:solidFill>
+              </a:rPr>
+              <a:t>BEST: 0.8193 mAP</a:t>
+            </a:r>
+            <a:endParaRPr lang="en-US" sz="900" dirty="0"/>
+          </a:p>
+        </p:txBody>
+      </p:sp>
+      <p:sp>
+        <p:nvSpPr>
+          <p:cNvPr id="36" name="Text 34"/>
+          <p:cNvSpPr/>
+          <p:nvPr/>
+        </p:nvSpPr>
+        <p:spPr>
+          <a:xfrm>
+            <a:off x="2377440" y="6510528"/>
+            <a:ext cx="8229600" cy="164592"/>
+          </a:xfrm>
+          <a:prstGeom prst="rect">
+            <a:avLst/>
+          </a:prstGeom>
+          <a:noFill/>
+          <a:ln/>
+        </p:spPr>
+        <p:txBody>
+          <a:bodyPr wrap="square" lIns="0" tIns="0" rIns="0" bIns="0" rtlCol="0" anchor="ctr">
+            <a:normAutofit/>
+          </a:bodyPr>
+          <a:lstStyle/>
+          <a:p>
+            <a:pPr algn="ctr" indent="0" marL="0">
+              <a:buNone/>
+            </a:pPr>
+            <a:r>
               <a:rPr lang="en-US" sz="750" dirty="0">
                 <a:solidFill>
                   <a:srgbClr val="5E6470"/>
@@ -7077,7 +7959,7 @@
                 <a:ea typeface="Arial" pitchFamily="34" charset="-122"/>
                 <a:cs typeface="Arial" pitchFamily="34" charset="-120"/>
               </a:rPr>
-              <a:t>Best 256px ConvNeXtV2-Tiny vs. PatentNet</a:t>
+              <a:t>Standard Gallery mean average precision</a:t>
             </a:r>
             <a:endParaRPr lang="en-US" sz="750" dirty="0"/>
           </a:p>
@@ -7189,7 +8071,7 @@
                 <a:ea typeface="Arial" pitchFamily="34" charset="-122"/>
                 <a:cs typeface="Arial" pitchFamily="34" charset="-120"/>
               </a:rPr>
-              <a:t>REPRESENTATION</a:t>
+              <a:t>BENCHMARK</a:t>
             </a:r>
             <a:endParaRPr lang="en-US" sz="900" dirty="0"/>
           </a:p>
@@ -7230,7 +8112,7 @@
                 <a:ea typeface="Arial" pitchFamily="34" charset="-122"/>
                 <a:cs typeface="Arial" pitchFamily="34" charset="-120"/>
               </a:rPr>
-              <a:t>The embedding learns identity—not just taxonomy</a:t>
+              <a:t>The gain survives a much larger search gallery</a:t>
             </a:r>
             <a:endParaRPr lang="en-US" sz="2800" dirty="0"/>
           </a:p>
@@ -7277,71 +8159,92 @@
           </a:p>
         </p:txBody>
       </p:sp>
-      <p:pic>
-        <p:nvPicPr>
-          <p:cNvPr id="5" name="Image 0" descr="C:\Dropbox\Apps\Overleaf\ACM Conference Proceedings Primary Article Template\figure\Hierarchical_Cosine_Distribution.png">    </p:cNvPr>
-          <p:cNvPicPr>
-            <a:picLocks noChangeAspect="1"/>
-          </p:cNvPicPr>
-          <p:nvPr/>
-        </p:nvPicPr>
-        <p:blipFill>
-          <a:blip r:embed="rId1"/>
-          <a:stretch>
-            <a:fillRect/>
-          </a:stretch>
-        </p:blipFill>
-        <p:spPr>
-          <a:xfrm>
-            <a:off x="862237" y="1371600"/>
-            <a:ext cx="6825166" cy="4526280"/>
-          </a:xfrm>
-          <a:prstGeom prst="rect">
-            <a:avLst/>
-          </a:prstGeom>
-        </p:spPr>
-      </p:pic>
-      <p:sp>
-        <p:nvSpPr>
-          <p:cNvPr id="6" name="Shape 3"/>
-          <p:cNvSpPr/>
-          <p:nvPr/>
-        </p:nvSpPr>
-        <p:spPr>
-          <a:xfrm>
-            <a:off x="862237" y="1371600"/>
-            <a:ext cx="6825166" cy="4526280"/>
-          </a:xfrm>
-          <a:prstGeom prst="rect">
-            <a:avLst/>
-          </a:prstGeom>
-          <a:solidFill>
-            <a:srgbClr val="FFFFFF">
-              <a:alpha val="0"/>
-            </a:srgbClr>
-          </a:solidFill>
-          <a:ln w="10160">
-            <a:solidFill>
-              <a:srgbClr val="C9CDD3"/>
-            </a:solidFill>
-            <a:prstDash val="solid"/>
-          </a:ln>
-        </p:spPr>
-      </p:sp>
-      <p:sp>
-        <p:nvSpPr>
-          <p:cNvPr id="7" name="Shape 4"/>
-          <p:cNvSpPr/>
-          <p:nvPr/>
-        </p:nvSpPr>
-        <p:spPr>
-          <a:xfrm>
-            <a:off x="8275320" y="1463040"/>
-            <a:ext cx="2971800" cy="1225296"/>
+      <p:sp>
+        <p:nvSpPr>
+          <p:cNvPr id="5" name="Text 3"/>
+          <p:cNvSpPr/>
+          <p:nvPr/>
+        </p:nvSpPr>
+        <p:spPr>
+          <a:xfrm>
+            <a:off x="685800" y="1508760"/>
+            <a:ext cx="4937760" cy="365760"/>
+          </a:xfrm>
+          <a:prstGeom prst="rect">
+            <a:avLst/>
+          </a:prstGeom>
+          <a:noFill/>
+          <a:ln/>
+        </p:spPr>
+        <p:txBody>
+          <a:bodyPr wrap="square" lIns="0" tIns="0" rIns="0" bIns="0" rtlCol="0" anchor="ctr"/>
+          <a:lstStyle/>
+          <a:p>
+            <a:pPr algn="ctr" indent="0" marL="0">
+              <a:buNone/>
+            </a:pPr>
+            <a:r>
+              <a:rPr lang="en-US" sz="2000" b="1" dirty="0">
+                <a:solidFill>
+                  <a:srgbClr val="111111"/>
+                </a:solidFill>
+              </a:rPr>
+              <a:t>Standard Gallery</a:t>
+            </a:r>
+            <a:endParaRPr lang="en-US" sz="2000" dirty="0"/>
+          </a:p>
+        </p:txBody>
+      </p:sp>
+      <p:sp>
+        <p:nvSpPr>
+          <p:cNvPr id="6" name="Text 4"/>
+          <p:cNvSpPr/>
+          <p:nvPr/>
+        </p:nvSpPr>
+        <p:spPr>
+          <a:xfrm>
+            <a:off x="6400800" y="1508760"/>
+            <a:ext cx="4937760" cy="365760"/>
+          </a:xfrm>
+          <a:prstGeom prst="rect">
+            <a:avLst/>
+          </a:prstGeom>
+          <a:noFill/>
+          <a:ln/>
+        </p:spPr>
+        <p:txBody>
+          <a:bodyPr wrap="square" lIns="0" tIns="0" rIns="0" bIns="0" rtlCol="0" anchor="ctr"/>
+          <a:lstStyle/>
+          <a:p>
+            <a:pPr algn="ctr" indent="0" marL="0">
+              <a:buNone/>
+            </a:pPr>
+            <a:r>
+              <a:rPr lang="en-US" sz="2000" b="1" dirty="0">
+                <a:solidFill>
+                  <a:srgbClr val="111111"/>
+                </a:solidFill>
+              </a:rPr>
+              <a:t>Extended Gallery</a:t>
+            </a:r>
+            <a:endParaRPr lang="en-US" sz="2000" dirty="0"/>
+          </a:p>
+        </p:txBody>
+      </p:sp>
+      <p:sp>
+        <p:nvSpPr>
+          <p:cNvPr id="7" name="Shape 5"/>
+          <p:cNvSpPr/>
+          <p:nvPr/>
+        </p:nvSpPr>
+        <p:spPr>
+          <a:xfrm>
+            <a:off x="640080" y="2057400"/>
+            <a:ext cx="4983480" cy="2606040"/>
           </a:xfrm>
           <a:prstGeom prst="roundRect">
             <a:avLst>
-              <a:gd name="adj" fmla="val 4478"/>
+              <a:gd name="adj" fmla="val 1754"/>
             </a:avLst>
           </a:prstGeom>
           <a:solidFill>
@@ -7357,14 +8260,50 @@
       </p:sp>
       <p:sp>
         <p:nvSpPr>
-          <p:cNvPr id="8" name="Shape 5"/>
-          <p:cNvSpPr/>
-          <p:nvPr/>
-        </p:nvSpPr>
-        <p:spPr>
-          <a:xfrm>
-            <a:off x="8275320" y="1463040"/>
-            <a:ext cx="73152" cy="1225296"/>
+          <p:cNvPr id="8" name="Text 6"/>
+          <p:cNvSpPr/>
+          <p:nvPr/>
+        </p:nvSpPr>
+        <p:spPr>
+          <a:xfrm>
+            <a:off x="960120" y="2313432"/>
+            <a:ext cx="594360" cy="228600"/>
+          </a:xfrm>
+          <a:prstGeom prst="rect">
+            <a:avLst/>
+          </a:prstGeom>
+          <a:noFill/>
+          <a:ln/>
+        </p:spPr>
+        <p:txBody>
+          <a:bodyPr wrap="square" lIns="0" tIns="0" rIns="0" bIns="0" rtlCol="0" anchor="ctr"/>
+          <a:lstStyle/>
+          <a:p>
+            <a:pPr indent="0" marL="0">
+              <a:buNone/>
+            </a:pPr>
+            <a:r>
+              <a:rPr lang="en-US" sz="1100" b="1" dirty="0">
+                <a:solidFill>
+                  <a:srgbClr val="5E6470"/>
+                </a:solidFill>
+              </a:rPr>
+              <a:t>mAP</a:t>
+            </a:r>
+            <a:endParaRPr lang="en-US" sz="1100" dirty="0"/>
+          </a:p>
+        </p:txBody>
+      </p:sp>
+      <p:sp>
+        <p:nvSpPr>
+          <p:cNvPr id="9" name="Shape 7"/>
+          <p:cNvSpPr/>
+          <p:nvPr/>
+        </p:nvSpPr>
+        <p:spPr>
+          <a:xfrm>
+            <a:off x="1600200" y="2331720"/>
+            <a:ext cx="3246394" cy="566928"/>
           </a:xfrm>
           <a:prstGeom prst="rect">
             <a:avLst/>
@@ -7382,94 +8321,187 @@
       </p:sp>
       <p:sp>
         <p:nvSpPr>
-          <p:cNvPr id="9" name="Text 6"/>
-          <p:cNvSpPr/>
-          <p:nvPr/>
-        </p:nvSpPr>
-        <p:spPr>
-          <a:xfrm>
-            <a:off x="8476488" y="1627632"/>
-            <a:ext cx="2651760" cy="438912"/>
-          </a:xfrm>
-          <a:prstGeom prst="rect">
-            <a:avLst/>
-          </a:prstGeom>
-          <a:noFill/>
-          <a:ln/>
-        </p:spPr>
-        <p:txBody>
-          <a:bodyPr wrap="square" lIns="0" tIns="0" rIns="0" bIns="0" rtlCol="0" anchor="ctr">
-            <a:normAutofit/>
-          </a:bodyPr>
+          <p:cNvPr id="10" name="Text 8"/>
+          <p:cNvSpPr/>
+          <p:nvPr/>
+        </p:nvSpPr>
+        <p:spPr>
+          <a:xfrm>
+            <a:off x="4910602" y="2487168"/>
+            <a:ext cx="713232" cy="182880"/>
+          </a:xfrm>
+          <a:prstGeom prst="rect">
+            <a:avLst/>
+          </a:prstGeom>
+          <a:noFill/>
+          <a:ln/>
+        </p:spPr>
+        <p:txBody>
+          <a:bodyPr wrap="square" lIns="0" tIns="0" rIns="0" bIns="0" rtlCol="0" anchor="ctr"/>
           <a:lstStyle/>
           <a:p>
             <a:pPr indent="0" marL="0">
               <a:buNone/>
             </a:pPr>
             <a:r>
-              <a:rPr lang="en-US" sz="2600" b="1" dirty="0">
+              <a:rPr lang="en-US" sz="1100" b="1" dirty="0">
                 <a:solidFill>
                   <a:srgbClr val="111111"/>
                 </a:solidFill>
               </a:rPr>
-              <a:t>0.617</a:t>
-            </a:r>
-            <a:endParaRPr lang="en-US" sz="2600" dirty="0"/>
-          </a:p>
-        </p:txBody>
-      </p:sp>
-      <p:sp>
-        <p:nvSpPr>
-          <p:cNvPr id="10" name="Text 7"/>
-          <p:cNvSpPr/>
-          <p:nvPr/>
-        </p:nvSpPr>
-        <p:spPr>
-          <a:xfrm>
-            <a:off x="8476488" y="2176272"/>
-            <a:ext cx="2651760" cy="310896"/>
-          </a:xfrm>
-          <a:prstGeom prst="rect">
-            <a:avLst/>
-          </a:prstGeom>
-          <a:noFill/>
-          <a:ln/>
-        </p:spPr>
-        <p:txBody>
-          <a:bodyPr wrap="square" lIns="0" tIns="0" rIns="0" bIns="0" rtlCol="0" anchor="ctr">
-            <a:normAutofit/>
-          </a:bodyPr>
+              <a:t>0.8193</a:t>
+            </a:r>
+            <a:endParaRPr lang="en-US" sz="1100" dirty="0"/>
+          </a:p>
+        </p:txBody>
+      </p:sp>
+      <p:sp>
+        <p:nvSpPr>
+          <p:cNvPr id="11" name="Text 9"/>
+          <p:cNvSpPr/>
+          <p:nvPr/>
+        </p:nvSpPr>
+        <p:spPr>
+          <a:xfrm>
+            <a:off x="1600200" y="2971800"/>
+            <a:ext cx="731520" cy="201168"/>
+          </a:xfrm>
+          <a:prstGeom prst="rect">
+            <a:avLst/>
+          </a:prstGeom>
+          <a:noFill/>
+          <a:ln/>
+        </p:spPr>
+        <p:txBody>
+          <a:bodyPr wrap="square" lIns="0" tIns="0" rIns="0" bIns="0" rtlCol="0" anchor="ctr"/>
           <a:lstStyle/>
           <a:p>
             <a:pPr indent="0" marL="0">
               <a:buNone/>
             </a:pPr>
             <a:r>
-              <a:rPr lang="en-US" sz="1150" dirty="0">
+              <a:rPr lang="en-US" sz="1000" dirty="0">
                 <a:solidFill>
                   <a:srgbClr val="5E6470"/>
                 </a:solidFill>
               </a:rPr>
-              <a:t>median: same patent</a:t>
-            </a:r>
-            <a:endParaRPr lang="en-US" sz="1150" dirty="0"/>
-          </a:p>
-        </p:txBody>
-      </p:sp>
-      <p:sp>
-        <p:nvSpPr>
-          <p:cNvPr id="11" name="Shape 8"/>
-          <p:cNvSpPr/>
-          <p:nvPr/>
-        </p:nvSpPr>
-        <p:spPr>
-          <a:xfrm>
-            <a:off x="8275320" y="2880360"/>
-            <a:ext cx="2971800" cy="1225296"/>
+              <a:t>Ours</a:t>
+            </a:r>
+            <a:endParaRPr lang="en-US" sz="1000" dirty="0"/>
+          </a:p>
+        </p:txBody>
+      </p:sp>
+      <p:sp>
+        <p:nvSpPr>
+          <p:cNvPr id="12" name="Shape 10"/>
+          <p:cNvSpPr/>
+          <p:nvPr/>
+        </p:nvSpPr>
+        <p:spPr>
+          <a:xfrm>
+            <a:off x="1600200" y="3410712"/>
+            <a:ext cx="1489862" cy="566928"/>
+          </a:xfrm>
+          <a:prstGeom prst="rect">
+            <a:avLst/>
+          </a:prstGeom>
+          <a:solidFill>
+            <a:srgbClr val="2166AC"/>
+          </a:solidFill>
+          <a:ln w="12700">
+            <a:solidFill>
+              <a:srgbClr val="2166AC"/>
+            </a:solidFill>
+            <a:prstDash val="solid"/>
+          </a:ln>
+        </p:spPr>
+      </p:sp>
+      <p:sp>
+        <p:nvSpPr>
+          <p:cNvPr id="13" name="Text 11"/>
+          <p:cNvSpPr/>
+          <p:nvPr/>
+        </p:nvSpPr>
+        <p:spPr>
+          <a:xfrm>
+            <a:off x="3154070" y="3566160"/>
+            <a:ext cx="713232" cy="182880"/>
+          </a:xfrm>
+          <a:prstGeom prst="rect">
+            <a:avLst/>
+          </a:prstGeom>
+          <a:noFill/>
+          <a:ln/>
+        </p:spPr>
+        <p:txBody>
+          <a:bodyPr wrap="square" lIns="0" tIns="0" rIns="0" bIns="0" rtlCol="0" anchor="ctr"/>
+          <a:lstStyle/>
+          <a:p>
+            <a:pPr indent="0" marL="0">
+              <a:buNone/>
+            </a:pPr>
+            <a:r>
+              <a:rPr lang="en-US" sz="1100" b="1" dirty="0">
+                <a:solidFill>
+                  <a:srgbClr val="111111"/>
+                </a:solidFill>
+              </a:rPr>
+              <a:t>0.3760</a:t>
+            </a:r>
+            <a:endParaRPr lang="en-US" sz="1100" dirty="0"/>
+          </a:p>
+        </p:txBody>
+      </p:sp>
+      <p:sp>
+        <p:nvSpPr>
+          <p:cNvPr id="14" name="Text 12"/>
+          <p:cNvSpPr/>
+          <p:nvPr/>
+        </p:nvSpPr>
+        <p:spPr>
+          <a:xfrm>
+            <a:off x="1600200" y="4050792"/>
+            <a:ext cx="1097280" cy="201168"/>
+          </a:xfrm>
+          <a:prstGeom prst="rect">
+            <a:avLst/>
+          </a:prstGeom>
+          <a:noFill/>
+          <a:ln/>
+        </p:spPr>
+        <p:txBody>
+          <a:bodyPr wrap="square" lIns="0" tIns="0" rIns="0" bIns="0" rtlCol="0" anchor="ctr"/>
+          <a:lstStyle/>
+          <a:p>
+            <a:pPr indent="0" marL="0">
+              <a:buNone/>
+            </a:pPr>
+            <a:r>
+              <a:rPr lang="en-US" sz="1000" dirty="0">
+                <a:solidFill>
+                  <a:srgbClr val="5E6470"/>
+                </a:solidFill>
+              </a:rPr>
+              <a:t>PatentNet</a:t>
+            </a:r>
+            <a:endParaRPr lang="en-US" sz="1000" dirty="0"/>
+          </a:p>
+        </p:txBody>
+      </p:sp>
+      <p:sp>
+        <p:nvSpPr>
+          <p:cNvPr id="15" name="Shape 13"/>
+          <p:cNvSpPr/>
+          <p:nvPr/>
+        </p:nvSpPr>
+        <p:spPr>
+          <a:xfrm>
+            <a:off x="6400800" y="2057400"/>
+            <a:ext cx="4983480" cy="2606040"/>
           </a:xfrm>
           <a:prstGeom prst="roundRect">
             <a:avLst>
-              <a:gd name="adj" fmla="val 4478"/>
+              <a:gd name="adj" fmla="val 1754"/>
             </a:avLst>
           </a:prstGeom>
           <a:solidFill>
@@ -7485,14 +8517,147 @@
       </p:sp>
       <p:sp>
         <p:nvSpPr>
-          <p:cNvPr id="12" name="Shape 9"/>
-          <p:cNvSpPr/>
-          <p:nvPr/>
-        </p:nvSpPr>
-        <p:spPr>
-          <a:xfrm>
-            <a:off x="8275320" y="2880360"/>
-            <a:ext cx="73152" cy="1225296"/>
+          <p:cNvPr id="16" name="Text 14"/>
+          <p:cNvSpPr/>
+          <p:nvPr/>
+        </p:nvSpPr>
+        <p:spPr>
+          <a:xfrm>
+            <a:off x="6720840" y="2313432"/>
+            <a:ext cx="594360" cy="228600"/>
+          </a:xfrm>
+          <a:prstGeom prst="rect">
+            <a:avLst/>
+          </a:prstGeom>
+          <a:noFill/>
+          <a:ln/>
+        </p:spPr>
+        <p:txBody>
+          <a:bodyPr wrap="square" lIns="0" tIns="0" rIns="0" bIns="0" rtlCol="0" anchor="ctr"/>
+          <a:lstStyle/>
+          <a:p>
+            <a:pPr indent="0" marL="0">
+              <a:buNone/>
+            </a:pPr>
+            <a:r>
+              <a:rPr lang="en-US" sz="1100" b="1" dirty="0">
+                <a:solidFill>
+                  <a:srgbClr val="5E6470"/>
+                </a:solidFill>
+              </a:rPr>
+              <a:t>mAP</a:t>
+            </a:r>
+            <a:endParaRPr lang="en-US" sz="1100" dirty="0"/>
+          </a:p>
+        </p:txBody>
+      </p:sp>
+      <p:sp>
+        <p:nvSpPr>
+          <p:cNvPr id="17" name="Shape 15"/>
+          <p:cNvSpPr/>
+          <p:nvPr/>
+        </p:nvSpPr>
+        <p:spPr>
+          <a:xfrm>
+            <a:off x="7360920" y="2331720"/>
+            <a:ext cx="2572786" cy="566928"/>
+          </a:xfrm>
+          <a:prstGeom prst="rect">
+            <a:avLst/>
+          </a:prstGeom>
+          <a:solidFill>
+            <a:srgbClr val="FF6B35"/>
+          </a:solidFill>
+          <a:ln w="12700">
+            <a:solidFill>
+              <a:srgbClr val="FF6B35"/>
+            </a:solidFill>
+            <a:prstDash val="solid"/>
+          </a:ln>
+        </p:spPr>
+      </p:sp>
+      <p:sp>
+        <p:nvSpPr>
+          <p:cNvPr id="18" name="Text 16"/>
+          <p:cNvSpPr/>
+          <p:nvPr/>
+        </p:nvSpPr>
+        <p:spPr>
+          <a:xfrm>
+            <a:off x="9997714" y="2487168"/>
+            <a:ext cx="713232" cy="182880"/>
+          </a:xfrm>
+          <a:prstGeom prst="rect">
+            <a:avLst/>
+          </a:prstGeom>
+          <a:noFill/>
+          <a:ln/>
+        </p:spPr>
+        <p:txBody>
+          <a:bodyPr wrap="square" lIns="0" tIns="0" rIns="0" bIns="0" rtlCol="0" anchor="ctr"/>
+          <a:lstStyle/>
+          <a:p>
+            <a:pPr indent="0" marL="0">
+              <a:buNone/>
+            </a:pPr>
+            <a:r>
+              <a:rPr lang="en-US" sz="1100" b="1" dirty="0">
+                <a:solidFill>
+                  <a:srgbClr val="111111"/>
+                </a:solidFill>
+              </a:rPr>
+              <a:t>0.6493</a:t>
+            </a:r>
+            <a:endParaRPr lang="en-US" sz="1100" dirty="0"/>
+          </a:p>
+        </p:txBody>
+      </p:sp>
+      <p:sp>
+        <p:nvSpPr>
+          <p:cNvPr id="19" name="Text 17"/>
+          <p:cNvSpPr/>
+          <p:nvPr/>
+        </p:nvSpPr>
+        <p:spPr>
+          <a:xfrm>
+            <a:off x="7360920" y="2971800"/>
+            <a:ext cx="731520" cy="201168"/>
+          </a:xfrm>
+          <a:prstGeom prst="rect">
+            <a:avLst/>
+          </a:prstGeom>
+          <a:noFill/>
+          <a:ln/>
+        </p:spPr>
+        <p:txBody>
+          <a:bodyPr wrap="square" lIns="0" tIns="0" rIns="0" bIns="0" rtlCol="0" anchor="ctr"/>
+          <a:lstStyle/>
+          <a:p>
+            <a:pPr indent="0" marL="0">
+              <a:buNone/>
+            </a:pPr>
+            <a:r>
+              <a:rPr lang="en-US" sz="1000" dirty="0">
+                <a:solidFill>
+                  <a:srgbClr val="5E6470"/>
+                </a:solidFill>
+              </a:rPr>
+              <a:t>Ours</a:t>
+            </a:r>
+            <a:endParaRPr lang="en-US" sz="1000" dirty="0"/>
+          </a:p>
+        </p:txBody>
+      </p:sp>
+      <p:sp>
+        <p:nvSpPr>
+          <p:cNvPr id="20" name="Shape 18"/>
+          <p:cNvSpPr/>
+          <p:nvPr/>
+        </p:nvSpPr>
+        <p:spPr>
+          <a:xfrm>
+            <a:off x="7360920" y="3410712"/>
+            <a:ext cx="1038149" cy="566928"/>
           </a:xfrm>
           <a:prstGeom prst="rect">
             <a:avLst/>
@@ -7510,14 +8675,230 @@
       </p:sp>
       <p:sp>
         <p:nvSpPr>
-          <p:cNvPr id="13" name="Text 10"/>
-          <p:cNvSpPr/>
-          <p:nvPr/>
-        </p:nvSpPr>
-        <p:spPr>
-          <a:xfrm>
-            <a:off x="8476488" y="3044952"/>
-            <a:ext cx="2651760" cy="438912"/>
+          <p:cNvPr id="21" name="Text 19"/>
+          <p:cNvSpPr/>
+          <p:nvPr/>
+        </p:nvSpPr>
+        <p:spPr>
+          <a:xfrm>
+            <a:off x="8463077" y="3566160"/>
+            <a:ext cx="713232" cy="182880"/>
+          </a:xfrm>
+          <a:prstGeom prst="rect">
+            <a:avLst/>
+          </a:prstGeom>
+          <a:noFill/>
+          <a:ln/>
+        </p:spPr>
+        <p:txBody>
+          <a:bodyPr wrap="square" lIns="0" tIns="0" rIns="0" bIns="0" rtlCol="0" anchor="ctr"/>
+          <a:lstStyle/>
+          <a:p>
+            <a:pPr indent="0" marL="0">
+              <a:buNone/>
+            </a:pPr>
+            <a:r>
+              <a:rPr lang="en-US" sz="1100" b="1" dirty="0">
+                <a:solidFill>
+                  <a:srgbClr val="111111"/>
+                </a:solidFill>
+              </a:rPr>
+              <a:t>0.2620</a:t>
+            </a:r>
+            <a:endParaRPr lang="en-US" sz="1100" dirty="0"/>
+          </a:p>
+        </p:txBody>
+      </p:sp>
+      <p:sp>
+        <p:nvSpPr>
+          <p:cNvPr id="22" name="Text 20"/>
+          <p:cNvSpPr/>
+          <p:nvPr/>
+        </p:nvSpPr>
+        <p:spPr>
+          <a:xfrm>
+            <a:off x="7360920" y="4050792"/>
+            <a:ext cx="1097280" cy="201168"/>
+          </a:xfrm>
+          <a:prstGeom prst="rect">
+            <a:avLst/>
+          </a:prstGeom>
+          <a:noFill/>
+          <a:ln/>
+        </p:spPr>
+        <p:txBody>
+          <a:bodyPr wrap="square" lIns="0" tIns="0" rIns="0" bIns="0" rtlCol="0" anchor="ctr"/>
+          <a:lstStyle/>
+          <a:p>
+            <a:pPr indent="0" marL="0">
+              <a:buNone/>
+            </a:pPr>
+            <a:r>
+              <a:rPr lang="en-US" sz="1000" dirty="0">
+                <a:solidFill>
+                  <a:srgbClr val="5E6470"/>
+                </a:solidFill>
+              </a:rPr>
+              <a:t>PatentNet</a:t>
+            </a:r>
+            <a:endParaRPr lang="en-US" sz="1000" dirty="0"/>
+          </a:p>
+        </p:txBody>
+      </p:sp>
+      <p:sp>
+        <p:nvSpPr>
+          <p:cNvPr id="23" name="Text 21"/>
+          <p:cNvSpPr/>
+          <p:nvPr/>
+        </p:nvSpPr>
+        <p:spPr>
+          <a:xfrm>
+            <a:off x="868680" y="5074920"/>
+            <a:ext cx="2194560" cy="320040"/>
+          </a:xfrm>
+          <a:prstGeom prst="rect">
+            <a:avLst/>
+          </a:prstGeom>
+          <a:noFill/>
+          <a:ln/>
+        </p:spPr>
+        <p:txBody>
+          <a:bodyPr wrap="square" lIns="0" tIns="0" rIns="0" bIns="0" rtlCol="0" anchor="ctr"/>
+          <a:lstStyle/>
+          <a:p>
+            <a:pPr indent="0" marL="0">
+              <a:buNone/>
+            </a:pPr>
+            <a:r>
+              <a:rPr lang="en-US" sz="1700" b="1" dirty="0">
+                <a:solidFill>
+                  <a:srgbClr val="FF6B35"/>
+                </a:solidFill>
+              </a:rPr>
+              <a:t>Acc@1 = 0.9312</a:t>
+            </a:r>
+            <a:endParaRPr lang="en-US" sz="1700" dirty="0"/>
+          </a:p>
+        </p:txBody>
+      </p:sp>
+      <p:sp>
+        <p:nvSpPr>
+          <p:cNvPr id="24" name="Text 22"/>
+          <p:cNvSpPr/>
+          <p:nvPr/>
+        </p:nvSpPr>
+        <p:spPr>
+          <a:xfrm>
+            <a:off x="3291840" y="5074920"/>
+            <a:ext cx="2194560" cy="320040"/>
+          </a:xfrm>
+          <a:prstGeom prst="rect">
+            <a:avLst/>
+          </a:prstGeom>
+          <a:noFill/>
+          <a:ln/>
+        </p:spPr>
+        <p:txBody>
+          <a:bodyPr wrap="square" lIns="0" tIns="0" rIns="0" bIns="0" rtlCol="0" anchor="ctr"/>
+          <a:lstStyle/>
+          <a:p>
+            <a:pPr indent="0" marL="0">
+              <a:buNone/>
+            </a:pPr>
+            <a:r>
+              <a:rPr lang="en-US" sz="1700" b="1" dirty="0">
+                <a:solidFill>
+                  <a:srgbClr val="FF6B35"/>
+                </a:solidFill>
+              </a:rPr>
+              <a:t>Acc@20 = 0.9906</a:t>
+            </a:r>
+            <a:endParaRPr lang="en-US" sz="1700" dirty="0"/>
+          </a:p>
+        </p:txBody>
+      </p:sp>
+      <p:sp>
+        <p:nvSpPr>
+          <p:cNvPr id="25" name="Text 23"/>
+          <p:cNvSpPr/>
+          <p:nvPr/>
+        </p:nvSpPr>
+        <p:spPr>
+          <a:xfrm>
+            <a:off x="6629400" y="5074920"/>
+            <a:ext cx="2194560" cy="320040"/>
+          </a:xfrm>
+          <a:prstGeom prst="rect">
+            <a:avLst/>
+          </a:prstGeom>
+          <a:noFill/>
+          <a:ln/>
+        </p:spPr>
+        <p:txBody>
+          <a:bodyPr wrap="square" lIns="0" tIns="0" rIns="0" bIns="0" rtlCol="0" anchor="ctr"/>
+          <a:lstStyle/>
+          <a:p>
+            <a:pPr indent="0" marL="0">
+              <a:buNone/>
+            </a:pPr>
+            <a:r>
+              <a:rPr lang="en-US" sz="1700" b="1" dirty="0">
+                <a:solidFill>
+                  <a:srgbClr val="FF6B35"/>
+                </a:solidFill>
+              </a:rPr>
+              <a:t>Acc@1 = 0.8088</a:t>
+            </a:r>
+            <a:endParaRPr lang="en-US" sz="1700" dirty="0"/>
+          </a:p>
+        </p:txBody>
+      </p:sp>
+      <p:sp>
+        <p:nvSpPr>
+          <p:cNvPr id="26" name="Text 24"/>
+          <p:cNvSpPr/>
+          <p:nvPr/>
+        </p:nvSpPr>
+        <p:spPr>
+          <a:xfrm>
+            <a:off x="9052560" y="5074920"/>
+            <a:ext cx="2194560" cy="320040"/>
+          </a:xfrm>
+          <a:prstGeom prst="rect">
+            <a:avLst/>
+          </a:prstGeom>
+          <a:noFill/>
+          <a:ln/>
+        </p:spPr>
+        <p:txBody>
+          <a:bodyPr wrap="square" lIns="0" tIns="0" rIns="0" bIns="0" rtlCol="0" anchor="ctr"/>
+          <a:lstStyle/>
+          <a:p>
+            <a:pPr indent="0" marL="0">
+              <a:buNone/>
+            </a:pPr>
+            <a:r>
+              <a:rPr lang="en-US" sz="1700" b="1" dirty="0">
+                <a:solidFill>
+                  <a:srgbClr val="FF6B35"/>
+                </a:solidFill>
+              </a:rPr>
+              <a:t>Acc@20 = 0.9711</a:t>
+            </a:r>
+            <a:endParaRPr lang="en-US" sz="1700" dirty="0"/>
+          </a:p>
+        </p:txBody>
+      </p:sp>
+      <p:sp>
+        <p:nvSpPr>
+          <p:cNvPr id="27" name="Text 25"/>
+          <p:cNvSpPr/>
+          <p:nvPr/>
+        </p:nvSpPr>
+        <p:spPr>
+          <a:xfrm>
+            <a:off x="2377440" y="6510528"/>
+            <a:ext cx="8229600" cy="164592"/>
           </a:xfrm>
           <a:prstGeom prst="rect">
             <a:avLst/>
@@ -7531,210 +8912,6 @@
           </a:bodyPr>
           <a:lstStyle/>
           <a:p>
-            <a:pPr indent="0" marL="0">
-              <a:buNone/>
-            </a:pPr>
-            <a:r>
-              <a:rPr lang="en-US" sz="2600" b="1" dirty="0">
-                <a:solidFill>
-                  <a:srgbClr val="111111"/>
-                </a:solidFill>
-              </a:rPr>
-              <a:t>0.013</a:t>
-            </a:r>
-            <a:endParaRPr lang="en-US" sz="2600" dirty="0"/>
-          </a:p>
-        </p:txBody>
-      </p:sp>
-      <p:sp>
-        <p:nvSpPr>
-          <p:cNvPr id="14" name="Text 11"/>
-          <p:cNvSpPr/>
-          <p:nvPr/>
-        </p:nvSpPr>
-        <p:spPr>
-          <a:xfrm>
-            <a:off x="8476488" y="3593592"/>
-            <a:ext cx="2651760" cy="310896"/>
-          </a:xfrm>
-          <a:prstGeom prst="rect">
-            <a:avLst/>
-          </a:prstGeom>
-          <a:noFill/>
-          <a:ln/>
-        </p:spPr>
-        <p:txBody>
-          <a:bodyPr wrap="square" lIns="0" tIns="0" rIns="0" bIns="0" rtlCol="0" anchor="ctr">
-            <a:normAutofit/>
-          </a:bodyPr>
-          <a:lstStyle/>
-          <a:p>
-            <a:pPr indent="0" marL="0">
-              <a:buNone/>
-            </a:pPr>
-            <a:r>
-              <a:rPr lang="en-US" sz="1150" dirty="0">
-                <a:solidFill>
-                  <a:srgbClr val="5E6470"/>
-                </a:solidFill>
-              </a:rPr>
-              <a:t>same subclass, other patent</a:t>
-            </a:r>
-            <a:endParaRPr lang="en-US" sz="1150" dirty="0"/>
-          </a:p>
-        </p:txBody>
-      </p:sp>
-      <p:sp>
-        <p:nvSpPr>
-          <p:cNvPr id="15" name="Shape 12"/>
-          <p:cNvSpPr/>
-          <p:nvPr/>
-        </p:nvSpPr>
-        <p:spPr>
-          <a:xfrm>
-            <a:off x="8275320" y="4297680"/>
-            <a:ext cx="2971800" cy="1225296"/>
-          </a:xfrm>
-          <a:prstGeom prst="roundRect">
-            <a:avLst>
-              <a:gd name="adj" fmla="val 4478"/>
-            </a:avLst>
-          </a:prstGeom>
-          <a:solidFill>
-            <a:srgbClr val="F2F3F5"/>
-          </a:solidFill>
-          <a:ln w="12700">
-            <a:solidFill>
-              <a:srgbClr val="F2F3F5"/>
-            </a:solidFill>
-            <a:prstDash val="solid"/>
-          </a:ln>
-        </p:spPr>
-      </p:sp>
-      <p:sp>
-        <p:nvSpPr>
-          <p:cNvPr id="16" name="Shape 13"/>
-          <p:cNvSpPr/>
-          <p:nvPr/>
-        </p:nvSpPr>
-        <p:spPr>
-          <a:xfrm>
-            <a:off x="8275320" y="4297680"/>
-            <a:ext cx="73152" cy="1225296"/>
-          </a:xfrm>
-          <a:prstGeom prst="rect">
-            <a:avLst/>
-          </a:prstGeom>
-          <a:solidFill>
-            <a:srgbClr val="188977"/>
-          </a:solidFill>
-          <a:ln w="12700">
-            <a:solidFill>
-              <a:srgbClr val="188977"/>
-            </a:solidFill>
-            <a:prstDash val="solid"/>
-          </a:ln>
-        </p:spPr>
-      </p:sp>
-      <p:sp>
-        <p:nvSpPr>
-          <p:cNvPr id="17" name="Text 14"/>
-          <p:cNvSpPr/>
-          <p:nvPr/>
-        </p:nvSpPr>
-        <p:spPr>
-          <a:xfrm>
-            <a:off x="8476488" y="4462272"/>
-            <a:ext cx="2651760" cy="438912"/>
-          </a:xfrm>
-          <a:prstGeom prst="rect">
-            <a:avLst/>
-          </a:prstGeom>
-          <a:noFill/>
-          <a:ln/>
-        </p:spPr>
-        <p:txBody>
-          <a:bodyPr wrap="square" lIns="0" tIns="0" rIns="0" bIns="0" rtlCol="0" anchor="ctr">
-            <a:normAutofit/>
-          </a:bodyPr>
-          <a:lstStyle/>
-          <a:p>
-            <a:pPr indent="0" marL="0">
-              <a:buNone/>
-            </a:pPr>
-            <a:r>
-              <a:rPr lang="en-US" sz="2600" b="1" dirty="0">
-                <a:solidFill>
-                  <a:srgbClr val="111111"/>
-                </a:solidFill>
-              </a:rPr>
-              <a:t>≈0</a:t>
-            </a:r>
-            <a:endParaRPr lang="en-US" sz="2600" dirty="0"/>
-          </a:p>
-        </p:txBody>
-      </p:sp>
-      <p:sp>
-        <p:nvSpPr>
-          <p:cNvPr id="18" name="Text 15"/>
-          <p:cNvSpPr/>
-          <p:nvPr/>
-        </p:nvSpPr>
-        <p:spPr>
-          <a:xfrm>
-            <a:off x="8476488" y="5010912"/>
-            <a:ext cx="2651760" cy="310896"/>
-          </a:xfrm>
-          <a:prstGeom prst="rect">
-            <a:avLst/>
-          </a:prstGeom>
-          <a:noFill/>
-          <a:ln/>
-        </p:spPr>
-        <p:txBody>
-          <a:bodyPr wrap="square" lIns="0" tIns="0" rIns="0" bIns="0" rtlCol="0" anchor="ctr">
-            <a:normAutofit/>
-          </a:bodyPr>
-          <a:lstStyle/>
-          <a:p>
-            <a:pPr indent="0" marL="0">
-              <a:buNone/>
-            </a:pPr>
-            <a:r>
-              <a:rPr lang="en-US" sz="1150" dirty="0">
-                <a:solidFill>
-                  <a:srgbClr val="5E6470"/>
-                </a:solidFill>
-              </a:rPr>
-              <a:t>different main class</a:t>
-            </a:r>
-            <a:endParaRPr lang="en-US" sz="1150" dirty="0"/>
-          </a:p>
-        </p:txBody>
-      </p:sp>
-      <p:sp>
-        <p:nvSpPr>
-          <p:cNvPr id="19" name="Text 16"/>
-          <p:cNvSpPr/>
-          <p:nvPr/>
-        </p:nvSpPr>
-        <p:spPr>
-          <a:xfrm>
-            <a:off x="2377440" y="6510528"/>
-            <a:ext cx="8229600" cy="164592"/>
-          </a:xfrm>
-          <a:prstGeom prst="rect">
-            <a:avLst/>
-          </a:prstGeom>
-          <a:noFill/>
-          <a:ln/>
-        </p:spPr>
-        <p:txBody>
-          <a:bodyPr wrap="square" lIns="0" tIns="0" rIns="0" bIns="0" rtlCol="0" anchor="ctr">
-            <a:normAutofit/>
-          </a:bodyPr>
-          <a:lstStyle/>
-          <a:p>
             <a:pPr algn="ctr" indent="0" marL="0">
               <a:buNone/>
             </a:pPr>
@@ -7747,7 +8924,7 @@
                 <a:ea typeface="Arial" pitchFamily="34" charset="-122"/>
                 <a:cs typeface="Arial" pitchFamily="34" charset="-120"/>
               </a:rPr>
-              <a:t>Cosine-similarity distribution across the design hierarchy</a:t>
+              <a:t>Best 256px ConvNeXtV2-Tiny vs. PatentNet</a:t>
             </a:r>
             <a:endParaRPr lang="en-US" sz="750" dirty="0"/>
           </a:p>
@@ -7859,7 +9036,7 @@
                 <a:ea typeface="Arial" pitchFamily="34" charset="-122"/>
                 <a:cs typeface="Arial" pitchFamily="34" charset="-120"/>
               </a:rPr>
-              <a:t>RANKING</a:t>
+              <a:t>REPRESENTATION</a:t>
             </a:r>
             <a:endParaRPr lang="en-US" sz="900" dirty="0"/>
           </a:p>
@@ -7900,7 +9077,7 @@
                 <a:ea typeface="Arial" pitchFamily="34" charset="-122"/>
                 <a:cs typeface="Arial" pitchFamily="34" charset="-120"/>
               </a:rPr>
-              <a:t>Query expansion improves ranking—selectively</a:t>
+              <a:t>The embedding learns identity—not just taxonomy</a:t>
             </a:r>
             <a:endParaRPr lang="en-US" sz="2800" dirty="0"/>
           </a:p>
@@ -7949,7 +9126,7 @@
       </p:sp>
       <p:pic>
         <p:nvPicPr>
-          <p:cNvPr id="5" name="Image 0" descr="C:\Dropbox\Apps\Overleaf\ACM Conference Proceedings Primary Article Template\figure\QE_Success_D0823510.png">    </p:cNvPr>
+          <p:cNvPr id="5" name="Image 0" descr="C:\Dropbox\Apps\Overleaf\ACM Conference Proceedings Primary Article Template\figure\Hierarchical_Cosine_Distribution.png">    </p:cNvPr>
           <p:cNvPicPr>
             <a:picLocks noChangeAspect="1"/>
           </p:cNvPicPr>
@@ -7963,8 +9140,8 @@
         </p:blipFill>
         <p:spPr>
           <a:xfrm>
-            <a:off x="594360" y="2217234"/>
-            <a:ext cx="7726680" cy="2835011"/>
+            <a:off x="862237" y="1371600"/>
+            <a:ext cx="6825166" cy="4526280"/>
           </a:xfrm>
           <a:prstGeom prst="rect">
             <a:avLst/>
@@ -7979,8 +9156,8 @@
         </p:nvSpPr>
         <p:spPr>
           <a:xfrm>
-            <a:off x="594360" y="2217234"/>
-            <a:ext cx="7726680" cy="2835011"/>
+            <a:off x="862237" y="1371600"/>
+            <a:ext cx="6825166" cy="4526280"/>
           </a:xfrm>
           <a:prstGeom prst="rect">
             <a:avLst/>
@@ -8006,8 +9183,8 @@
         </p:nvSpPr>
         <p:spPr>
           <a:xfrm>
-            <a:off x="8595360" y="1417320"/>
-            <a:ext cx="2606040" cy="1225296"/>
+            <a:off x="8275320" y="1463040"/>
+            <a:ext cx="2971800" cy="1225296"/>
           </a:xfrm>
           <a:prstGeom prst="roundRect">
             <a:avLst>
@@ -8033,7 +9210,135 @@
         </p:nvSpPr>
         <p:spPr>
           <a:xfrm>
-            <a:off x="8595360" y="1417320"/>
+            <a:off x="8275320" y="1463040"/>
+            <a:ext cx="73152" cy="1225296"/>
+          </a:xfrm>
+          <a:prstGeom prst="rect">
+            <a:avLst/>
+          </a:prstGeom>
+          <a:solidFill>
+            <a:srgbClr val="FF6B35"/>
+          </a:solidFill>
+          <a:ln w="12700">
+            <a:solidFill>
+              <a:srgbClr val="FF6B35"/>
+            </a:solidFill>
+            <a:prstDash val="solid"/>
+          </a:ln>
+        </p:spPr>
+      </p:sp>
+      <p:sp>
+        <p:nvSpPr>
+          <p:cNvPr id="9" name="Text 6"/>
+          <p:cNvSpPr/>
+          <p:nvPr/>
+        </p:nvSpPr>
+        <p:spPr>
+          <a:xfrm>
+            <a:off x="8476488" y="1627632"/>
+            <a:ext cx="2651760" cy="438912"/>
+          </a:xfrm>
+          <a:prstGeom prst="rect">
+            <a:avLst/>
+          </a:prstGeom>
+          <a:noFill/>
+          <a:ln/>
+        </p:spPr>
+        <p:txBody>
+          <a:bodyPr wrap="square" lIns="0" tIns="0" rIns="0" bIns="0" rtlCol="0" anchor="ctr">
+            <a:normAutofit/>
+          </a:bodyPr>
+          <a:lstStyle/>
+          <a:p>
+            <a:pPr indent="0" marL="0">
+              <a:buNone/>
+            </a:pPr>
+            <a:r>
+              <a:rPr lang="en-US" sz="2600" b="1" dirty="0">
+                <a:solidFill>
+                  <a:srgbClr val="111111"/>
+                </a:solidFill>
+              </a:rPr>
+              <a:t>0.617</a:t>
+            </a:r>
+            <a:endParaRPr lang="en-US" sz="2600" dirty="0"/>
+          </a:p>
+        </p:txBody>
+      </p:sp>
+      <p:sp>
+        <p:nvSpPr>
+          <p:cNvPr id="10" name="Text 7"/>
+          <p:cNvSpPr/>
+          <p:nvPr/>
+        </p:nvSpPr>
+        <p:spPr>
+          <a:xfrm>
+            <a:off x="8476488" y="2176272"/>
+            <a:ext cx="2651760" cy="310896"/>
+          </a:xfrm>
+          <a:prstGeom prst="rect">
+            <a:avLst/>
+          </a:prstGeom>
+          <a:noFill/>
+          <a:ln/>
+        </p:spPr>
+        <p:txBody>
+          <a:bodyPr wrap="square" lIns="0" tIns="0" rIns="0" bIns="0" rtlCol="0" anchor="ctr">
+            <a:normAutofit/>
+          </a:bodyPr>
+          <a:lstStyle/>
+          <a:p>
+            <a:pPr indent="0" marL="0">
+              <a:buNone/>
+            </a:pPr>
+            <a:r>
+              <a:rPr lang="en-US" sz="1150" dirty="0">
+                <a:solidFill>
+                  <a:srgbClr val="5E6470"/>
+                </a:solidFill>
+              </a:rPr>
+              <a:t>median: same patent</a:t>
+            </a:r>
+            <a:endParaRPr lang="en-US" sz="1150" dirty="0"/>
+          </a:p>
+        </p:txBody>
+      </p:sp>
+      <p:sp>
+        <p:nvSpPr>
+          <p:cNvPr id="11" name="Shape 8"/>
+          <p:cNvSpPr/>
+          <p:nvPr/>
+        </p:nvSpPr>
+        <p:spPr>
+          <a:xfrm>
+            <a:off x="8275320" y="2880360"/>
+            <a:ext cx="2971800" cy="1225296"/>
+          </a:xfrm>
+          <a:prstGeom prst="roundRect">
+            <a:avLst>
+              <a:gd name="adj" fmla="val 4478"/>
+            </a:avLst>
+          </a:prstGeom>
+          <a:solidFill>
+            <a:srgbClr val="F2F3F5"/>
+          </a:solidFill>
+          <a:ln w="12700">
+            <a:solidFill>
+              <a:srgbClr val="F2F3F5"/>
+            </a:solidFill>
+            <a:prstDash val="solid"/>
+          </a:ln>
+        </p:spPr>
+      </p:sp>
+      <p:sp>
+        <p:nvSpPr>
+          <p:cNvPr id="12" name="Shape 9"/>
+          <p:cNvSpPr/>
+          <p:nvPr/>
+        </p:nvSpPr>
+        <p:spPr>
+          <a:xfrm>
+            <a:off x="8275320" y="2880360"/>
             <a:ext cx="73152" cy="1225296"/>
           </a:xfrm>
           <a:prstGeom prst="rect">
@@ -8052,14 +9357,14 @@
       </p:sp>
       <p:sp>
         <p:nvSpPr>
-          <p:cNvPr id="9" name="Text 6"/>
-          <p:cNvSpPr/>
-          <p:nvPr/>
-        </p:nvSpPr>
-        <p:spPr>
-          <a:xfrm>
-            <a:off x="8796528" y="1581912"/>
-            <a:ext cx="2286000" cy="438912"/>
+          <p:cNvPr id="13" name="Text 10"/>
+          <p:cNvSpPr/>
+          <p:nvPr/>
+        </p:nvSpPr>
+        <p:spPr>
+          <a:xfrm>
+            <a:off x="8476488" y="3044952"/>
+            <a:ext cx="2651760" cy="438912"/>
           </a:xfrm>
           <a:prstGeom prst="rect">
             <a:avLst/>
@@ -8082,7 +9387,7 @@
                   <a:srgbClr val="111111"/>
                 </a:solidFill>
               </a:rPr>
-              <a:t>0.8193</a:t>
+              <a:t>0.013</a:t>
             </a:r>
             <a:endParaRPr lang="en-US" sz="2600" dirty="0"/>
           </a:p>
@@ -8090,14 +9395,14 @@
       </p:sp>
       <p:sp>
         <p:nvSpPr>
-          <p:cNvPr id="10" name="Text 7"/>
-          <p:cNvSpPr/>
-          <p:nvPr/>
-        </p:nvSpPr>
-        <p:spPr>
-          <a:xfrm>
-            <a:off x="8796528" y="2130552"/>
-            <a:ext cx="2286000" cy="310896"/>
+          <p:cNvPr id="14" name="Text 11"/>
+          <p:cNvSpPr/>
+          <p:nvPr/>
+        </p:nvSpPr>
+        <p:spPr>
+          <a:xfrm>
+            <a:off x="8476488" y="3593592"/>
+            <a:ext cx="2651760" cy="310896"/>
           </a:xfrm>
           <a:prstGeom prst="rect">
             <a:avLst/>
@@ -8120,7 +9425,7 @@
                   <a:srgbClr val="5E6470"/>
                 </a:solidFill>
               </a:rPr>
-              <a:t>baseline mAP</a:t>
+              <a:t>same subclass, other patent</a:t>
             </a:r>
             <a:endParaRPr lang="en-US" sz="1150" dirty="0"/>
           </a:p>
@@ -8128,14 +9433,14 @@
       </p:sp>
       <p:sp>
         <p:nvSpPr>
-          <p:cNvPr id="11" name="Shape 8"/>
-          <p:cNvSpPr/>
-          <p:nvPr/>
-        </p:nvSpPr>
-        <p:spPr>
-          <a:xfrm>
-            <a:off x="8595360" y="2834640"/>
-            <a:ext cx="2606040" cy="1225296"/>
+          <p:cNvPr id="15" name="Shape 12"/>
+          <p:cNvSpPr/>
+          <p:nvPr/>
+        </p:nvSpPr>
+        <p:spPr>
+          <a:xfrm>
+            <a:off x="8275320" y="4297680"/>
+            <a:ext cx="2971800" cy="1225296"/>
           </a:xfrm>
           <a:prstGeom prst="roundRect">
             <a:avLst>
@@ -8155,142 +9460,14 @@
       </p:sp>
       <p:sp>
         <p:nvSpPr>
-          <p:cNvPr id="12" name="Shape 9"/>
-          <p:cNvSpPr/>
-          <p:nvPr/>
-        </p:nvSpPr>
-        <p:spPr>
-          <a:xfrm>
-            <a:off x="8595360" y="2834640"/>
+          <p:cNvPr id="16" name="Shape 13"/>
+          <p:cNvSpPr/>
+          <p:nvPr/>
+        </p:nvSpPr>
+        <p:spPr>
+          <a:xfrm>
+            <a:off x="8275320" y="4297680"/>
             <a:ext cx="73152" cy="1225296"/>
-          </a:xfrm>
-          <a:prstGeom prst="rect">
-            <a:avLst/>
-          </a:prstGeom>
-          <a:solidFill>
-            <a:srgbClr val="FF6B35"/>
-          </a:solidFill>
-          <a:ln w="12700">
-            <a:solidFill>
-              <a:srgbClr val="FF6B35"/>
-            </a:solidFill>
-            <a:prstDash val="solid"/>
-          </a:ln>
-        </p:spPr>
-      </p:sp>
-      <p:sp>
-        <p:nvSpPr>
-          <p:cNvPr id="13" name="Text 10"/>
-          <p:cNvSpPr/>
-          <p:nvPr/>
-        </p:nvSpPr>
-        <p:spPr>
-          <a:xfrm>
-            <a:off x="8796528" y="2999232"/>
-            <a:ext cx="2286000" cy="438912"/>
-          </a:xfrm>
-          <a:prstGeom prst="rect">
-            <a:avLst/>
-          </a:prstGeom>
-          <a:noFill/>
-          <a:ln/>
-        </p:spPr>
-        <p:txBody>
-          <a:bodyPr wrap="square" lIns="0" tIns="0" rIns="0" bIns="0" rtlCol="0" anchor="ctr">
-            <a:normAutofit/>
-          </a:bodyPr>
-          <a:lstStyle/>
-          <a:p>
-            <a:pPr indent="0" marL="0">
-              <a:buNone/>
-            </a:pPr>
-            <a:r>
-              <a:rPr lang="en-US" sz="2600" b="1" dirty="0">
-                <a:solidFill>
-                  <a:srgbClr val="111111"/>
-                </a:solidFill>
-              </a:rPr>
-              <a:t>0.8417</a:t>
-            </a:r>
-            <a:endParaRPr lang="en-US" sz="2600" dirty="0"/>
-          </a:p>
-        </p:txBody>
-      </p:sp>
-      <p:sp>
-        <p:nvSpPr>
-          <p:cNvPr id="14" name="Text 11"/>
-          <p:cNvSpPr/>
-          <p:nvPr/>
-        </p:nvSpPr>
-        <p:spPr>
-          <a:xfrm>
-            <a:off x="8796528" y="3547872"/>
-            <a:ext cx="2286000" cy="310896"/>
-          </a:xfrm>
-          <a:prstGeom prst="rect">
-            <a:avLst/>
-          </a:prstGeom>
-          <a:noFill/>
-          <a:ln/>
-        </p:spPr>
-        <p:txBody>
-          <a:bodyPr wrap="square" lIns="0" tIns="0" rIns="0" bIns="0" rtlCol="0" anchor="ctr">
-            <a:normAutofit/>
-          </a:bodyPr>
-          <a:lstStyle/>
-          <a:p>
-            <a:pPr indent="0" marL="0">
-              <a:buNone/>
-            </a:pPr>
-            <a:r>
-              <a:rPr lang="en-US" sz="1150" dirty="0">
-                <a:solidFill>
-                  <a:srgbClr val="5E6470"/>
-                </a:solidFill>
-              </a:rPr>
-              <a:t>query expansion mAP</a:t>
-            </a:r>
-            <a:endParaRPr lang="en-US" sz="1150" dirty="0"/>
-          </a:p>
-        </p:txBody>
-      </p:sp>
-      <p:sp>
-        <p:nvSpPr>
-          <p:cNvPr id="15" name="Shape 12"/>
-          <p:cNvSpPr/>
-          <p:nvPr/>
-        </p:nvSpPr>
-        <p:spPr>
-          <a:xfrm>
-            <a:off x="8595360" y="4297680"/>
-            <a:ext cx="2606040" cy="1325880"/>
-          </a:xfrm>
-          <a:prstGeom prst="roundRect">
-            <a:avLst>
-              <a:gd name="adj" fmla="val 3448"/>
-            </a:avLst>
-          </a:prstGeom>
-          <a:solidFill>
-            <a:srgbClr val="FFFFFF"/>
-          </a:solidFill>
-          <a:ln w="12700">
-            <a:solidFill>
-              <a:srgbClr val="C9CDD3"/>
-            </a:solidFill>
-            <a:prstDash val="solid"/>
-          </a:ln>
-        </p:spPr>
-      </p:sp>
-      <p:sp>
-        <p:nvSpPr>
-          <p:cNvPr id="16" name="Shape 13"/>
-          <p:cNvSpPr/>
-          <p:nvPr/>
-        </p:nvSpPr>
-        <p:spPr>
-          <a:xfrm>
-            <a:off x="8595360" y="4297680"/>
-            <a:ext cx="64008" cy="1325880"/>
           </a:xfrm>
           <a:prstGeom prst="rect">
             <a:avLst/>
@@ -8314,8 +9491,8 @@
         </p:nvSpPr>
         <p:spPr>
           <a:xfrm>
-            <a:off x="8796528" y="4453128"/>
-            <a:ext cx="2276856" cy="274320"/>
+            <a:off x="8476488" y="4462272"/>
+            <a:ext cx="2651760" cy="438912"/>
           </a:xfrm>
           <a:prstGeom prst="rect">
             <a:avLst/>
@@ -8333,14 +9510,14 @@
               <a:buNone/>
             </a:pPr>
             <a:r>
-              <a:rPr lang="en-US" sz="1400" b="1" dirty="0">
+              <a:rPr lang="en-US" sz="2600" b="1" dirty="0">
                 <a:solidFill>
                   <a:srgbClr val="111111"/>
                 </a:solidFill>
               </a:rPr>
-              <a:t>Best setting</a:t>
-            </a:r>
-            <a:endParaRPr lang="en-US" sz="1400" dirty="0"/>
+              <a:t>≈0</a:t>
+            </a:r>
+            <a:endParaRPr lang="en-US" sz="2600" dirty="0"/>
           </a:p>
         </p:txBody>
       </p:sp>
@@ -8352,60 +9529,8 @@
         </p:nvSpPr>
         <p:spPr>
           <a:xfrm>
-            <a:off x="8796528" y="4828032"/>
-            <a:ext cx="2276856" cy="667512"/>
-          </a:xfrm>
-          <a:prstGeom prst="rect">
-            <a:avLst/>
-          </a:prstGeom>
-          <a:noFill/>
-          <a:ln/>
-        </p:spPr>
-        <p:txBody>
-          <a:bodyPr wrap="square" lIns="254" tIns="254" rIns="254" bIns="254" rtlCol="0" anchor="t">
-            <a:normAutofit/>
-          </a:bodyPr>
-          <a:lstStyle/>
-          <a:p>
-            <a:pPr indent="0" marL="0">
-              <a:buNone/>
-            </a:pPr>
-            <a:r>
-              <a:rPr lang="en-US" sz="1150" dirty="0">
-                <a:solidFill>
-                  <a:srgbClr val="5E6470"/>
-                </a:solidFill>
-              </a:rPr>
-              <a:t>k = 3 · α = 1</a:t>
-            </a:r>
-            <a:endParaRPr lang="en-US" sz="1150" dirty="0"/>
-          </a:p>
-          <a:p>
-            <a:pPr indent="0" marL="0">
-              <a:buNone/>
-            </a:pPr>
-            <a:r>
-              <a:rPr lang="en-US" sz="1150" dirty="0">
-                <a:solidFill>
-                  <a:srgbClr val="5E6470"/>
-                </a:solidFill>
-              </a:rPr>
-              <a:t>Diffusion peaks at 0.8332.</a:t>
-            </a:r>
-            <a:endParaRPr lang="en-US" sz="1150" dirty="0"/>
-          </a:p>
-        </p:txBody>
-      </p:sp>
-      <p:sp>
-        <p:nvSpPr>
-          <p:cNvPr id="19" name="Text 16"/>
-          <p:cNvSpPr/>
-          <p:nvPr/>
-        </p:nvSpPr>
-        <p:spPr>
-          <a:xfrm>
-            <a:off x="2377440" y="6510528"/>
-            <a:ext cx="8229600" cy="164592"/>
+            <a:off x="8476488" y="5010912"/>
+            <a:ext cx="2651760" cy="310896"/>
           </a:xfrm>
           <a:prstGeom prst="rect">
             <a:avLst/>
@@ -8419,6 +9544,44 @@
           </a:bodyPr>
           <a:lstStyle/>
           <a:p>
+            <a:pPr indent="0" marL="0">
+              <a:buNone/>
+            </a:pPr>
+            <a:r>
+              <a:rPr lang="en-US" sz="1150" dirty="0">
+                <a:solidFill>
+                  <a:srgbClr val="5E6470"/>
+                </a:solidFill>
+              </a:rPr>
+              <a:t>different main class</a:t>
+            </a:r>
+            <a:endParaRPr lang="en-US" sz="1150" dirty="0"/>
+          </a:p>
+        </p:txBody>
+      </p:sp>
+      <p:sp>
+        <p:nvSpPr>
+          <p:cNvPr id="19" name="Text 16"/>
+          <p:cNvSpPr/>
+          <p:nvPr/>
+        </p:nvSpPr>
+        <p:spPr>
+          <a:xfrm>
+            <a:off x="2377440" y="6510528"/>
+            <a:ext cx="8229600" cy="164592"/>
+          </a:xfrm>
+          <a:prstGeom prst="rect">
+            <a:avLst/>
+          </a:prstGeom>
+          <a:noFill/>
+          <a:ln/>
+        </p:spPr>
+        <p:txBody>
+          <a:bodyPr wrap="square" lIns="0" tIns="0" rIns="0" bIns="0" rtlCol="0" anchor="ctr">
+            <a:normAutofit/>
+          </a:bodyPr>
+          <a:lstStyle/>
+          <a:p>
             <a:pPr algn="ctr" indent="0" marL="0">
               <a:buNone/>
             </a:pPr>
@@ -8431,7 +9594,7 @@
                 <a:ea typeface="Arial" pitchFamily="34" charset="-122"/>
                 <a:cs typeface="Arial" pitchFamily="34" charset="-120"/>
               </a:rPr>
-              <a:t>Standard Gallery; qualitative query-expansion example</a:t>
+              <a:t>Cosine-similarity distribution across the design hierarchy</a:t>
             </a:r>
             <a:endParaRPr lang="en-US" sz="750" dirty="0"/>
           </a:p>
@@ -8543,7 +9706,7 @@
                 <a:ea typeface="Arial" pitchFamily="34" charset="-122"/>
                 <a:cs typeface="Arial" pitchFamily="34" charset="-120"/>
               </a:rPr>
-              <a:t>TAKEAWAYS</a:t>
+              <a:t>RANKING</a:t>
             </a:r>
             <a:endParaRPr lang="en-US" sz="900" dirty="0"/>
           </a:p>
@@ -8584,7 +9747,7 @@
                 <a:ea typeface="Arial" pitchFamily="34" charset="-122"/>
                 <a:cs typeface="Arial" pitchFamily="34" charset="-120"/>
               </a:rPr>
-              <a:t>A deployable retrieval layer—with clear limits</a:t>
+              <a:t>Query expansion improves ranking—selectively</a:t>
             </a:r>
             <a:endParaRPr lang="en-US" sz="2800" dirty="0"/>
           </a:p>
@@ -8631,20 +9794,327 @@
           </a:p>
         </p:txBody>
       </p:sp>
-      <p:sp>
-        <p:nvSpPr>
-          <p:cNvPr id="5" name="Shape 3"/>
-          <p:cNvSpPr/>
-          <p:nvPr/>
-        </p:nvSpPr>
-        <p:spPr>
-          <a:xfrm>
-            <a:off x="640080" y="1417320"/>
-            <a:ext cx="3429000" cy="3520440"/>
+      <p:pic>
+        <p:nvPicPr>
+          <p:cNvPr id="5" name="Image 0" descr="C:\Dropbox\Apps\Overleaf\ACM Conference Proceedings Primary Article Template\figure\QE_Success_D0823510.png">    </p:cNvPr>
+          <p:cNvPicPr>
+            <a:picLocks noChangeAspect="1"/>
+          </p:cNvPicPr>
+          <p:nvPr/>
+        </p:nvPicPr>
+        <p:blipFill>
+          <a:blip r:embed="rId1"/>
+          <a:stretch>
+            <a:fillRect/>
+          </a:stretch>
+        </p:blipFill>
+        <p:spPr>
+          <a:xfrm>
+            <a:off x="594360" y="2217234"/>
+            <a:ext cx="7726680" cy="2835011"/>
+          </a:xfrm>
+          <a:prstGeom prst="rect">
+            <a:avLst/>
+          </a:prstGeom>
+        </p:spPr>
+      </p:pic>
+      <p:sp>
+        <p:nvSpPr>
+          <p:cNvPr id="6" name="Shape 3"/>
+          <p:cNvSpPr/>
+          <p:nvPr/>
+        </p:nvSpPr>
+        <p:spPr>
+          <a:xfrm>
+            <a:off x="594360" y="2217234"/>
+            <a:ext cx="7726680" cy="2835011"/>
+          </a:xfrm>
+          <a:prstGeom prst="rect">
+            <a:avLst/>
+          </a:prstGeom>
+          <a:solidFill>
+            <a:srgbClr val="FFFFFF">
+              <a:alpha val="0"/>
+            </a:srgbClr>
+          </a:solidFill>
+          <a:ln w="10160">
+            <a:solidFill>
+              <a:srgbClr val="C9CDD3"/>
+            </a:solidFill>
+            <a:prstDash val="solid"/>
+          </a:ln>
+        </p:spPr>
+      </p:sp>
+      <p:sp>
+        <p:nvSpPr>
+          <p:cNvPr id="7" name="Shape 4"/>
+          <p:cNvSpPr/>
+          <p:nvPr/>
+        </p:nvSpPr>
+        <p:spPr>
+          <a:xfrm>
+            <a:off x="8595360" y="1417320"/>
+            <a:ext cx="2606040" cy="1225296"/>
           </a:xfrm>
           <a:prstGeom prst="roundRect">
             <a:avLst>
-              <a:gd name="adj" fmla="val 1333"/>
+              <a:gd name="adj" fmla="val 4478"/>
+            </a:avLst>
+          </a:prstGeom>
+          <a:solidFill>
+            <a:srgbClr val="F2F3F5"/>
+          </a:solidFill>
+          <a:ln w="12700">
+            <a:solidFill>
+              <a:srgbClr val="F2F3F5"/>
+            </a:solidFill>
+            <a:prstDash val="solid"/>
+          </a:ln>
+        </p:spPr>
+      </p:sp>
+      <p:sp>
+        <p:nvSpPr>
+          <p:cNvPr id="8" name="Shape 5"/>
+          <p:cNvSpPr/>
+          <p:nvPr/>
+        </p:nvSpPr>
+        <p:spPr>
+          <a:xfrm>
+            <a:off x="8595360" y="1417320"/>
+            <a:ext cx="73152" cy="1225296"/>
+          </a:xfrm>
+          <a:prstGeom prst="rect">
+            <a:avLst/>
+          </a:prstGeom>
+          <a:solidFill>
+            <a:srgbClr val="2166AC"/>
+          </a:solidFill>
+          <a:ln w="12700">
+            <a:solidFill>
+              <a:srgbClr val="2166AC"/>
+            </a:solidFill>
+            <a:prstDash val="solid"/>
+          </a:ln>
+        </p:spPr>
+      </p:sp>
+      <p:sp>
+        <p:nvSpPr>
+          <p:cNvPr id="9" name="Text 6"/>
+          <p:cNvSpPr/>
+          <p:nvPr/>
+        </p:nvSpPr>
+        <p:spPr>
+          <a:xfrm>
+            <a:off x="8796528" y="1581912"/>
+            <a:ext cx="2286000" cy="438912"/>
+          </a:xfrm>
+          <a:prstGeom prst="rect">
+            <a:avLst/>
+          </a:prstGeom>
+          <a:noFill/>
+          <a:ln/>
+        </p:spPr>
+        <p:txBody>
+          <a:bodyPr wrap="square" lIns="0" tIns="0" rIns="0" bIns="0" rtlCol="0" anchor="ctr">
+            <a:normAutofit/>
+          </a:bodyPr>
+          <a:lstStyle/>
+          <a:p>
+            <a:pPr indent="0" marL="0">
+              <a:buNone/>
+            </a:pPr>
+            <a:r>
+              <a:rPr lang="en-US" sz="2600" b="1" dirty="0">
+                <a:solidFill>
+                  <a:srgbClr val="111111"/>
+                </a:solidFill>
+              </a:rPr>
+              <a:t>0.8193</a:t>
+            </a:r>
+            <a:endParaRPr lang="en-US" sz="2600" dirty="0"/>
+          </a:p>
+        </p:txBody>
+      </p:sp>
+      <p:sp>
+        <p:nvSpPr>
+          <p:cNvPr id="10" name="Text 7"/>
+          <p:cNvSpPr/>
+          <p:nvPr/>
+        </p:nvSpPr>
+        <p:spPr>
+          <a:xfrm>
+            <a:off x="8796528" y="2130552"/>
+            <a:ext cx="2286000" cy="310896"/>
+          </a:xfrm>
+          <a:prstGeom prst="rect">
+            <a:avLst/>
+          </a:prstGeom>
+          <a:noFill/>
+          <a:ln/>
+        </p:spPr>
+        <p:txBody>
+          <a:bodyPr wrap="square" lIns="0" tIns="0" rIns="0" bIns="0" rtlCol="0" anchor="ctr">
+            <a:normAutofit/>
+          </a:bodyPr>
+          <a:lstStyle/>
+          <a:p>
+            <a:pPr indent="0" marL="0">
+              <a:buNone/>
+            </a:pPr>
+            <a:r>
+              <a:rPr lang="en-US" sz="1150" dirty="0">
+                <a:solidFill>
+                  <a:srgbClr val="5E6470"/>
+                </a:solidFill>
+              </a:rPr>
+              <a:t>baseline mAP</a:t>
+            </a:r>
+            <a:endParaRPr lang="en-US" sz="1150" dirty="0"/>
+          </a:p>
+        </p:txBody>
+      </p:sp>
+      <p:sp>
+        <p:nvSpPr>
+          <p:cNvPr id="11" name="Shape 8"/>
+          <p:cNvSpPr/>
+          <p:nvPr/>
+        </p:nvSpPr>
+        <p:spPr>
+          <a:xfrm>
+            <a:off x="8595360" y="2834640"/>
+            <a:ext cx="2606040" cy="1225296"/>
+          </a:xfrm>
+          <a:prstGeom prst="roundRect">
+            <a:avLst>
+              <a:gd name="adj" fmla="val 4478"/>
+            </a:avLst>
+          </a:prstGeom>
+          <a:solidFill>
+            <a:srgbClr val="F2F3F5"/>
+          </a:solidFill>
+          <a:ln w="12700">
+            <a:solidFill>
+              <a:srgbClr val="F2F3F5"/>
+            </a:solidFill>
+            <a:prstDash val="solid"/>
+          </a:ln>
+        </p:spPr>
+      </p:sp>
+      <p:sp>
+        <p:nvSpPr>
+          <p:cNvPr id="12" name="Shape 9"/>
+          <p:cNvSpPr/>
+          <p:nvPr/>
+        </p:nvSpPr>
+        <p:spPr>
+          <a:xfrm>
+            <a:off x="8595360" y="2834640"/>
+            <a:ext cx="73152" cy="1225296"/>
+          </a:xfrm>
+          <a:prstGeom prst="rect">
+            <a:avLst/>
+          </a:prstGeom>
+          <a:solidFill>
+            <a:srgbClr val="FF6B35"/>
+          </a:solidFill>
+          <a:ln w="12700">
+            <a:solidFill>
+              <a:srgbClr val="FF6B35"/>
+            </a:solidFill>
+            <a:prstDash val="solid"/>
+          </a:ln>
+        </p:spPr>
+      </p:sp>
+      <p:sp>
+        <p:nvSpPr>
+          <p:cNvPr id="13" name="Text 10"/>
+          <p:cNvSpPr/>
+          <p:nvPr/>
+        </p:nvSpPr>
+        <p:spPr>
+          <a:xfrm>
+            <a:off x="8796528" y="2999232"/>
+            <a:ext cx="2286000" cy="438912"/>
+          </a:xfrm>
+          <a:prstGeom prst="rect">
+            <a:avLst/>
+          </a:prstGeom>
+          <a:noFill/>
+          <a:ln/>
+        </p:spPr>
+        <p:txBody>
+          <a:bodyPr wrap="square" lIns="0" tIns="0" rIns="0" bIns="0" rtlCol="0" anchor="ctr">
+            <a:normAutofit/>
+          </a:bodyPr>
+          <a:lstStyle/>
+          <a:p>
+            <a:pPr indent="0" marL="0">
+              <a:buNone/>
+            </a:pPr>
+            <a:r>
+              <a:rPr lang="en-US" sz="2600" b="1" dirty="0">
+                <a:solidFill>
+                  <a:srgbClr val="111111"/>
+                </a:solidFill>
+              </a:rPr>
+              <a:t>0.8417</a:t>
+            </a:r>
+            <a:endParaRPr lang="en-US" sz="2600" dirty="0"/>
+          </a:p>
+        </p:txBody>
+      </p:sp>
+      <p:sp>
+        <p:nvSpPr>
+          <p:cNvPr id="14" name="Text 11"/>
+          <p:cNvSpPr/>
+          <p:nvPr/>
+        </p:nvSpPr>
+        <p:spPr>
+          <a:xfrm>
+            <a:off x="8796528" y="3547872"/>
+            <a:ext cx="2286000" cy="310896"/>
+          </a:xfrm>
+          <a:prstGeom prst="rect">
+            <a:avLst/>
+          </a:prstGeom>
+          <a:noFill/>
+          <a:ln/>
+        </p:spPr>
+        <p:txBody>
+          <a:bodyPr wrap="square" lIns="0" tIns="0" rIns="0" bIns="0" rtlCol="0" anchor="ctr">
+            <a:normAutofit/>
+          </a:bodyPr>
+          <a:lstStyle/>
+          <a:p>
+            <a:pPr indent="0" marL="0">
+              <a:buNone/>
+            </a:pPr>
+            <a:r>
+              <a:rPr lang="en-US" sz="1150" dirty="0">
+                <a:solidFill>
+                  <a:srgbClr val="5E6470"/>
+                </a:solidFill>
+              </a:rPr>
+              <a:t>query expansion mAP</a:t>
+            </a:r>
+            <a:endParaRPr lang="en-US" sz="1150" dirty="0"/>
+          </a:p>
+        </p:txBody>
+      </p:sp>
+      <p:sp>
+        <p:nvSpPr>
+          <p:cNvPr id="15" name="Shape 12"/>
+          <p:cNvSpPr/>
+          <p:nvPr/>
+        </p:nvSpPr>
+        <p:spPr>
+          <a:xfrm>
+            <a:off x="8595360" y="4297680"/>
+            <a:ext cx="2606040" cy="1325880"/>
+          </a:xfrm>
+          <a:prstGeom prst="roundRect">
+            <a:avLst>
+              <a:gd name="adj" fmla="val 3448"/>
             </a:avLst>
           </a:prstGeom>
           <a:solidFill>
@@ -8660,270 +10130,14 @@
       </p:sp>
       <p:sp>
         <p:nvSpPr>
-          <p:cNvPr id="6" name="Shape 4"/>
-          <p:cNvSpPr/>
-          <p:nvPr/>
-        </p:nvSpPr>
-        <p:spPr>
-          <a:xfrm>
-            <a:off x="640080" y="1417320"/>
-            <a:ext cx="64008" cy="3520440"/>
-          </a:xfrm>
-          <a:prstGeom prst="rect">
-            <a:avLst/>
-          </a:prstGeom>
-          <a:solidFill>
-            <a:srgbClr val="FF6B35"/>
-          </a:solidFill>
-          <a:ln w="12700">
-            <a:solidFill>
-              <a:srgbClr val="FF6B35"/>
-            </a:solidFill>
-            <a:prstDash val="solid"/>
-          </a:ln>
-        </p:spPr>
-      </p:sp>
-      <p:sp>
-        <p:nvSpPr>
-          <p:cNvPr id="7" name="Text 5"/>
-          <p:cNvSpPr/>
-          <p:nvPr/>
-        </p:nvSpPr>
-        <p:spPr>
-          <a:xfrm>
-            <a:off x="841248" y="1572768"/>
-            <a:ext cx="3099816" cy="274320"/>
-          </a:xfrm>
-          <a:prstGeom prst="rect">
-            <a:avLst/>
-          </a:prstGeom>
-          <a:noFill/>
-          <a:ln/>
-        </p:spPr>
-        <p:txBody>
-          <a:bodyPr wrap="square" lIns="0" tIns="0" rIns="0" bIns="0" rtlCol="0" anchor="ctr">
-            <a:normAutofit/>
-          </a:bodyPr>
-          <a:lstStyle/>
-          <a:p>
-            <a:pPr indent="0" marL="0">
-              <a:buNone/>
-            </a:pPr>
-            <a:r>
-              <a:rPr lang="en-US" sz="1400" b="1" dirty="0">
-                <a:solidFill>
-                  <a:srgbClr val="111111"/>
-                </a:solidFill>
-              </a:rPr>
-              <a:t>1 · Supervision</a:t>
-            </a:r>
-            <a:endParaRPr lang="en-US" sz="1400" dirty="0"/>
-          </a:p>
-        </p:txBody>
-      </p:sp>
-      <p:sp>
-        <p:nvSpPr>
-          <p:cNvPr id="8" name="Text 6"/>
-          <p:cNvSpPr/>
-          <p:nvPr/>
-        </p:nvSpPr>
-        <p:spPr>
-          <a:xfrm>
-            <a:off x="841248" y="1947672"/>
-            <a:ext cx="3099816" cy="2862072"/>
-          </a:xfrm>
-          <a:prstGeom prst="rect">
-            <a:avLst/>
-          </a:prstGeom>
-          <a:noFill/>
-          <a:ln/>
-        </p:spPr>
-        <p:txBody>
-          <a:bodyPr wrap="square" lIns="254" tIns="254" rIns="254" bIns="254" rtlCol="0" anchor="t">
-            <a:normAutofit/>
-          </a:bodyPr>
-          <a:lstStyle/>
-          <a:p>
-            <a:pPr indent="0" marL="0">
-              <a:buNone/>
-            </a:pPr>
-            <a:r>
-              <a:rPr lang="en-US" sz="1150" dirty="0">
-                <a:solidFill>
-                  <a:srgbClr val="5E6470"/>
-                </a:solidFill>
-              </a:rPr>
-              <a:t>Patent identity turns multi-view drawings into strong positive pairs and avoids category-only shortcuts.</a:t>
-            </a:r>
-            <a:endParaRPr lang="en-US" sz="1150" dirty="0"/>
-          </a:p>
-        </p:txBody>
-      </p:sp>
-      <p:sp>
-        <p:nvSpPr>
-          <p:cNvPr id="9" name="Shape 7"/>
-          <p:cNvSpPr/>
-          <p:nvPr/>
-        </p:nvSpPr>
-        <p:spPr>
-          <a:xfrm>
-            <a:off x="4389120" y="1417320"/>
-            <a:ext cx="3429000" cy="3520440"/>
-          </a:xfrm>
-          <a:prstGeom prst="roundRect">
-            <a:avLst>
-              <a:gd name="adj" fmla="val 1333"/>
-            </a:avLst>
-          </a:prstGeom>
-          <a:solidFill>
-            <a:srgbClr val="FFFFFF"/>
-          </a:solidFill>
-          <a:ln w="12700">
-            <a:solidFill>
-              <a:srgbClr val="C9CDD3"/>
-            </a:solidFill>
-            <a:prstDash val="solid"/>
-          </a:ln>
-        </p:spPr>
-      </p:sp>
-      <p:sp>
-        <p:nvSpPr>
-          <p:cNvPr id="10" name="Shape 8"/>
-          <p:cNvSpPr/>
-          <p:nvPr/>
-        </p:nvSpPr>
-        <p:spPr>
-          <a:xfrm>
-            <a:off x="4389120" y="1417320"/>
-            <a:ext cx="64008" cy="3520440"/>
-          </a:xfrm>
-          <a:prstGeom prst="rect">
-            <a:avLst/>
-          </a:prstGeom>
-          <a:solidFill>
-            <a:srgbClr val="2166AC"/>
-          </a:solidFill>
-          <a:ln w="12700">
-            <a:solidFill>
-              <a:srgbClr val="2166AC"/>
-            </a:solidFill>
-            <a:prstDash val="solid"/>
-          </a:ln>
-        </p:spPr>
-      </p:sp>
-      <p:sp>
-        <p:nvSpPr>
-          <p:cNvPr id="11" name="Text 9"/>
-          <p:cNvSpPr/>
-          <p:nvPr/>
-        </p:nvSpPr>
-        <p:spPr>
-          <a:xfrm>
-            <a:off x="4590288" y="1572768"/>
-            <a:ext cx="3099816" cy="274320"/>
-          </a:xfrm>
-          <a:prstGeom prst="rect">
-            <a:avLst/>
-          </a:prstGeom>
-          <a:noFill/>
-          <a:ln/>
-        </p:spPr>
-        <p:txBody>
-          <a:bodyPr wrap="square" lIns="0" tIns="0" rIns="0" bIns="0" rtlCol="0" anchor="ctr">
-            <a:normAutofit/>
-          </a:bodyPr>
-          <a:lstStyle/>
-          <a:p>
-            <a:pPr indent="0" marL="0">
-              <a:buNone/>
-            </a:pPr>
-            <a:r>
-              <a:rPr lang="en-US" sz="1400" b="1" dirty="0">
-                <a:solidFill>
-                  <a:srgbClr val="111111"/>
-                </a:solidFill>
-              </a:rPr>
-              <a:t>2 · Scale</a:t>
-            </a:r>
-            <a:endParaRPr lang="en-US" sz="1400" dirty="0"/>
-          </a:p>
-        </p:txBody>
-      </p:sp>
-      <p:sp>
-        <p:nvSpPr>
-          <p:cNvPr id="12" name="Text 10"/>
-          <p:cNvSpPr/>
-          <p:nvPr/>
-        </p:nvSpPr>
-        <p:spPr>
-          <a:xfrm>
-            <a:off x="4590288" y="1947672"/>
-            <a:ext cx="3099816" cy="2862072"/>
-          </a:xfrm>
-          <a:prstGeom prst="rect">
-            <a:avLst/>
-          </a:prstGeom>
-          <a:noFill/>
-          <a:ln/>
-        </p:spPr>
-        <p:txBody>
-          <a:bodyPr wrap="square" lIns="254" tIns="254" rIns="254" bIns="254" rtlCol="0" anchor="t">
-            <a:normAutofit/>
-          </a:bodyPr>
-          <a:lstStyle/>
-          <a:p>
-            <a:pPr indent="0" marL="0">
-              <a:buNone/>
-            </a:pPr>
-            <a:r>
-              <a:rPr lang="en-US" sz="1150" dirty="0">
-                <a:solidFill>
-                  <a:srgbClr val="5E6470"/>
-                </a:solidFill>
-              </a:rPr>
-              <a:t>High-resolution ConvNeXt features maintain useful precision in a 338k-image extended gallery.</a:t>
-            </a:r>
-            <a:endParaRPr lang="en-US" sz="1150" dirty="0"/>
-          </a:p>
-        </p:txBody>
-      </p:sp>
-      <p:sp>
-        <p:nvSpPr>
-          <p:cNvPr id="13" name="Shape 11"/>
-          <p:cNvSpPr/>
-          <p:nvPr/>
-        </p:nvSpPr>
-        <p:spPr>
-          <a:xfrm>
-            <a:off x="8138160" y="1417320"/>
-            <a:ext cx="3429000" cy="3520440"/>
-          </a:xfrm>
-          <a:prstGeom prst="roundRect">
-            <a:avLst>
-              <a:gd name="adj" fmla="val 1333"/>
-            </a:avLst>
-          </a:prstGeom>
-          <a:solidFill>
-            <a:srgbClr val="FFFFFF"/>
-          </a:solidFill>
-          <a:ln w="12700">
-            <a:solidFill>
-              <a:srgbClr val="C9CDD3"/>
-            </a:solidFill>
-            <a:prstDash val="solid"/>
-          </a:ln>
-        </p:spPr>
-      </p:sp>
-      <p:sp>
-        <p:nvSpPr>
-          <p:cNvPr id="14" name="Shape 12"/>
-          <p:cNvSpPr/>
-          <p:nvPr/>
-        </p:nvSpPr>
-        <p:spPr>
-          <a:xfrm>
-            <a:off x="8138160" y="1417320"/>
-            <a:ext cx="64008" cy="3520440"/>
+          <p:cNvPr id="16" name="Shape 13"/>
+          <p:cNvSpPr/>
+          <p:nvPr/>
+        </p:nvSpPr>
+        <p:spPr>
+          <a:xfrm>
+            <a:off x="8595360" y="4297680"/>
+            <a:ext cx="64008" cy="1325880"/>
           </a:xfrm>
           <a:prstGeom prst="rect">
             <a:avLst/>
@@ -8941,14 +10155,14 @@
       </p:sp>
       <p:sp>
         <p:nvSpPr>
-          <p:cNvPr id="15" name="Text 13"/>
-          <p:cNvSpPr/>
-          <p:nvPr/>
-        </p:nvSpPr>
-        <p:spPr>
-          <a:xfrm>
-            <a:off x="8339328" y="1572768"/>
-            <a:ext cx="3099816" cy="274320"/>
+          <p:cNvPr id="17" name="Text 14"/>
+          <p:cNvSpPr/>
+          <p:nvPr/>
+        </p:nvSpPr>
+        <p:spPr>
+          <a:xfrm>
+            <a:off x="8796528" y="4453128"/>
+            <a:ext cx="2276856" cy="274320"/>
           </a:xfrm>
           <a:prstGeom prst="rect">
             <a:avLst/>
@@ -8971,7 +10185,7 @@
                   <a:srgbClr val="111111"/>
                 </a:solidFill>
               </a:rPr>
-              <a:t>3 · Next step</a:t>
+              <a:t>Best setting</a:t>
             </a:r>
             <a:endParaRPr lang="en-US" sz="1400" dirty="0"/>
           </a:p>
@@ -8979,14 +10193,14 @@
       </p:sp>
       <p:sp>
         <p:nvSpPr>
-          <p:cNvPr id="16" name="Text 14"/>
-          <p:cNvSpPr/>
-          <p:nvPr/>
-        </p:nvSpPr>
-        <p:spPr>
-          <a:xfrm>
-            <a:off x="8339328" y="1947672"/>
-            <a:ext cx="3099816" cy="2862072"/>
+          <p:cNvPr id="18" name="Text 15"/>
+          <p:cNvSpPr/>
+          <p:nvPr/>
+        </p:nvSpPr>
+        <p:spPr>
+          <a:xfrm>
+            <a:off x="8796528" y="4828032"/>
+            <a:ext cx="2276856" cy="667512"/>
           </a:xfrm>
           <a:prstGeom prst="rect">
             <a:avLst/>
@@ -9009,22 +10223,36 @@
                   <a:srgbClr val="5E6470"/>
                 </a:solidFill>
               </a:rPr>
-              <a:t>Hard negatives, domain filtering, and examiner-centered evaluation remain essential.</a:t>
+              <a:t>k = 3 · α = 1</a:t>
             </a:r>
             <a:endParaRPr lang="en-US" sz="1150" dirty="0"/>
           </a:p>
-        </p:txBody>
-      </p:sp>
-      <p:sp>
-        <p:nvSpPr>
-          <p:cNvPr id="17" name="Text 15"/>
-          <p:cNvSpPr/>
-          <p:nvPr/>
-        </p:nvSpPr>
-        <p:spPr>
-          <a:xfrm>
-            <a:off x="685800" y="5321808"/>
-            <a:ext cx="10789920" cy="502920"/>
+          <a:p>
+            <a:pPr indent="0" marL="0">
+              <a:buNone/>
+            </a:pPr>
+            <a:r>
+              <a:rPr lang="en-US" sz="1150" dirty="0">
+                <a:solidFill>
+                  <a:srgbClr val="5E6470"/>
+                </a:solidFill>
+              </a:rPr>
+              <a:t>Diffusion peaks at 0.8332.</a:t>
+            </a:r>
+            <a:endParaRPr lang="en-US" sz="1150" dirty="0"/>
+          </a:p>
+        </p:txBody>
+      </p:sp>
+      <p:sp>
+        <p:nvSpPr>
+          <p:cNvPr id="19" name="Text 16"/>
+          <p:cNvSpPr/>
+          <p:nvPr/>
+        </p:nvSpPr>
+        <p:spPr>
+          <a:xfrm>
+            <a:off x="2377440" y="6510528"/>
+            <a:ext cx="8229600" cy="164592"/>
           </a:xfrm>
           <a:prstGeom prst="rect">
             <a:avLst/>
@@ -9042,44 +10270,6 @@
               <a:buNone/>
             </a:pPr>
             <a:r>
-              <a:rPr lang="en-US" sz="2100" b="1" dirty="0">
-                <a:solidFill>
-                  <a:srgbClr val="111111"/>
-                </a:solidFill>
-              </a:rPr>
-              <a:t>Bottom line: metric learning can narrow prior art; it does not replace legal judgment.</a:t>
-            </a:r>
-            <a:endParaRPr lang="en-US" sz="2100" dirty="0"/>
-          </a:p>
-        </p:txBody>
-      </p:sp>
-      <p:sp>
-        <p:nvSpPr>
-          <p:cNvPr id="18" name="Text 16"/>
-          <p:cNvSpPr/>
-          <p:nvPr/>
-        </p:nvSpPr>
-        <p:spPr>
-          <a:xfrm>
-            <a:off x="2377440" y="6510528"/>
-            <a:ext cx="8229600" cy="164592"/>
-          </a:xfrm>
-          <a:prstGeom prst="rect">
-            <a:avLst/>
-          </a:prstGeom>
-          <a:noFill/>
-          <a:ln/>
-        </p:spPr>
-        <p:txBody>
-          <a:bodyPr wrap="square" lIns="0" tIns="0" rIns="0" bIns="0" rtlCol="0" anchor="ctr">
-            <a:normAutofit/>
-          </a:bodyPr>
-          <a:lstStyle/>
-          <a:p>
-            <a:pPr algn="ctr" indent="0" marL="0">
-              <a:buNone/>
-            </a:pPr>
-            <a:r>
               <a:rPr lang="en-US" sz="750" dirty="0">
                 <a:solidFill>
                   <a:srgbClr val="5E6470"/>
@@ -9088,7 +10278,7 @@
                 <a:ea typeface="Arial" pitchFamily="34" charset="-122"/>
                 <a:cs typeface="Arial" pitchFamily="34" charset="-120"/>
               </a:rPr>
-              <a:t>Design Patent Similarity with ArcFace Metric Learning</a:t>
+              <a:t>Standard Gallery; qualitative query-expansion example</a:t>
             </a:r>
             <a:endParaRPr lang="en-US" sz="750" dirty="0"/>
           </a:p>
